--- a/docs/Phoenix_Arena_PSR_Elegante.pptx
+++ b/docs/Phoenix_Arena_PSR_Elegante.pptx
@@ -4,6 +4,9 @@
   <p:sldMasterIdLst>
     <p:sldMasterId id="2147483648" r:id="rId1"/>
   </p:sldMasterIdLst>
+  <p:notesMasterIdLst>
+    <p:notesMasterId r:id="rId14"/>
+  </p:notesMasterIdLst>
   <p:sldIdLst>
     <p:sldId id="256" r:id="rId2"/>
     <p:sldId id="257" r:id="rId3"/>
@@ -18,10 +21,7 @@
     <p:sldId id="266" r:id="rId12"/>
     <p:sldId id="267" r:id="rId13"/>
   </p:sldIdLst>
-  <p:notesMasterIdLst>
-    <p:notesMasterId r:id="rId14"/>
-  </p:notesMasterIdLst>
-  <p:sldSz cx="9144000" cy="5143500"/>
+  <p:sldSz cx="9144000" cy="5143500" type="screen16x9"/>
   <p:notesSz cx="5143500" cy="9144000"/>
   <p:defaultTextStyle>
     <a:lvl1pPr marL="0" algn="l" defTabSz="914400" rtl="0" eaLnBrk="1" latinLnBrk="0" hangingPunct="1">
@@ -115,13 +115,20 @@
       </a:defRPr>
     </a:lvl9pPr>
   </p:defaultTextStyle>
+  <p:extLst>
+    <p:ext uri="{EFAFB233-063F-42B5-8137-9DF3F51BA10A}">
+      <p15:sldGuideLst xmlns:p15="http://schemas.microsoft.com/office/powerpoint/2012/main"/>
+    </p:ext>
+  </p:extLst>
 </p:presentation>
 </file>
 
 <file path=ppt/charts/chart1.xml><?xml version="1.0" encoding="utf-8"?>
-<c:chartSpace xmlns:c="http://schemas.openxmlformats.org/drawingml/2006/chart" xmlns:a="http://schemas.openxmlformats.org/drawingml/2006/main" xmlns:r="http://schemas.openxmlformats.org/officeDocument/2006/relationships">
+<c:chartSpace xmlns:c="http://schemas.openxmlformats.org/drawingml/2006/chart" xmlns:a="http://schemas.openxmlformats.org/drawingml/2006/main" xmlns:r="http://schemas.openxmlformats.org/officeDocument/2006/relationships" xmlns:c16r2="http://schemas.microsoft.com/office/drawing/2015/06/chart">
   <c:date1904 val="0"/>
+  <c:lang val="es-MX"/>
   <c:roundedCorners val="1"/>
+  <c:style val="2"/>
   <c:chart>
     <c:autoTitleDeleted val="1"/>
     <c:plotArea>
@@ -164,6 +171,11 @@
               </a:solidFill>
               <a:effectLst/>
             </c:spPr>
+            <c:extLst>
+              <c:ext xmlns:c16="http://schemas.microsoft.com/office/drawing/2014/chart" uri="{C3380CC4-5D6E-409C-BE32-E72D297353CC}">
+                <c16:uniqueId val="{00000001-B041-904C-8CC6-DA31324D5CDF}"/>
+              </c:ext>
+            </c:extLst>
           </c:dPt>
           <c:dPt>
             <c:idx val="1"/>
@@ -174,6 +186,11 @@
               </a:solidFill>
               <a:effectLst/>
             </c:spPr>
+            <c:extLst>
+              <c:ext xmlns:c16="http://schemas.microsoft.com/office/drawing/2014/chart" uri="{C3380CC4-5D6E-409C-BE32-E72D297353CC}">
+                <c16:uniqueId val="{00000003-B041-904C-8CC6-DA31324D5CDF}"/>
+              </c:ext>
+            </c:extLst>
           </c:dPt>
           <c:dPt>
             <c:idx val="2"/>
@@ -184,6 +201,11 @@
               </a:solidFill>
               <a:effectLst/>
             </c:spPr>
+            <c:extLst>
+              <c:ext xmlns:c16="http://schemas.microsoft.com/office/drawing/2014/chart" uri="{C3380CC4-5D6E-409C-BE32-E72D297353CC}">
+                <c16:uniqueId val="{00000005-B041-904C-8CC6-DA31324D5CDF}"/>
+              </c:ext>
+            </c:extLst>
           </c:dPt>
           <c:dLbls>
             <c:dLbl>
@@ -202,6 +224,7 @@
                       <a:latin typeface="Arial"/>
                     </a:defRPr>
                   </a:pPr>
+                  <a:endParaRPr lang="es-MX"/>
                 </a:p>
               </c:txPr>
               <c:showLegendKey val="0"/>
@@ -210,6 +233,12 @@
               <c:showSerName val="0"/>
               <c:showPercent val="0"/>
               <c:showBubbleSize val="0"/>
+              <c:extLst>
+                <c:ext xmlns:c15="http://schemas.microsoft.com/office/drawing/2012/chart" uri="{CE6537A1-D6FC-4f65-9D91-7224C49458BB}"/>
+                <c:ext xmlns:c16="http://schemas.microsoft.com/office/drawing/2014/chart" uri="{C3380CC4-5D6E-409C-BE32-E72D297353CC}">
+                  <c16:uniqueId val="{00000001-B041-904C-8CC6-DA31324D5CDF}"/>
+                </c:ext>
+              </c:extLst>
             </c:dLbl>
             <c:dLbl>
               <c:idx val="1"/>
@@ -227,6 +256,7 @@
                       <a:latin typeface="Arial"/>
                     </a:defRPr>
                   </a:pPr>
+                  <a:endParaRPr lang="es-MX"/>
                 </a:p>
               </c:txPr>
               <c:showLegendKey val="0"/>
@@ -235,6 +265,12 @@
               <c:showSerName val="0"/>
               <c:showPercent val="0"/>
               <c:showBubbleSize val="0"/>
+              <c:extLst>
+                <c:ext xmlns:c15="http://schemas.microsoft.com/office/drawing/2012/chart" uri="{CE6537A1-D6FC-4f65-9D91-7224C49458BB}"/>
+                <c:ext xmlns:c16="http://schemas.microsoft.com/office/drawing/2014/chart" uri="{C3380CC4-5D6E-409C-BE32-E72D297353CC}">
+                  <c16:uniqueId val="{00000003-B041-904C-8CC6-DA31324D5CDF}"/>
+                </c:ext>
+              </c:extLst>
             </c:dLbl>
             <c:dLbl>
               <c:idx val="2"/>
@@ -252,6 +288,7 @@
                       <a:latin typeface="Arial"/>
                     </a:defRPr>
                   </a:pPr>
+                  <a:endParaRPr lang="es-MX"/>
                 </a:p>
               </c:txPr>
               <c:showLegendKey val="0"/>
@@ -260,8 +297,21 @@
               <c:showSerName val="0"/>
               <c:showPercent val="0"/>
               <c:showBubbleSize val="0"/>
+              <c:extLst>
+                <c:ext xmlns:c15="http://schemas.microsoft.com/office/drawing/2012/chart" uri="{CE6537A1-D6FC-4f65-9D91-7224C49458BB}"/>
+                <c:ext xmlns:c16="http://schemas.microsoft.com/office/drawing/2014/chart" uri="{C3380CC4-5D6E-409C-BE32-E72D297353CC}">
+                  <c16:uniqueId val="{00000005-B041-904C-8CC6-DA31324D5CDF}"/>
+                </c:ext>
+              </c:extLst>
             </c:dLbl>
             <c:numFmt formatCode="General" sourceLinked="0"/>
+            <c:spPr>
+              <a:noFill/>
+              <a:ln>
+                <a:noFill/>
+              </a:ln>
+              <a:effectLst/>
+            </c:spPr>
             <c:txPr>
               <a:bodyPr/>
               <a:lstStyle/>
@@ -274,6 +324,7 @@
                     <a:latin typeface="Arial"/>
                   </a:defRPr>
                 </a:pPr>
+                <a:endParaRPr lang="es-MX"/>
               </a:p>
             </c:txPr>
             <c:showLegendKey val="0"/>
@@ -283,6 +334,9 @@
             <c:showPercent val="1"/>
             <c:showBubbleSize val="0"/>
             <c:showLeaderLines val="0"/>
+            <c:extLst>
+              <c:ext xmlns:c15="http://schemas.microsoft.com/office/drawing/2012/chart" uri="{CE6537A1-D6FC-4f65-9D91-7224C49458BB}"/>
+            </c:extLst>
           </c:dLbls>
           <c:cat>
             <c:strRef>
@@ -305,6 +359,7 @@
             <c:numRef>
               <c:f>Sheet1!$B$2:$B$4</c:f>
               <c:numCache>
+                <c:formatCode>General</c:formatCode>
                 <c:ptCount val="3"/>
                 <c:pt idx="0">
                   <c:v>70</c:v>
@@ -318,7 +373,21 @@
               </c:numCache>
             </c:numRef>
           </c:val>
+          <c:extLst>
+            <c:ext xmlns:c16="http://schemas.microsoft.com/office/drawing/2014/chart" uri="{C3380CC4-5D6E-409C-BE32-E72D297353CC}">
+              <c16:uniqueId val="{00000006-B041-904C-8CC6-DA31324D5CDF}"/>
+            </c:ext>
+          </c:extLst>
         </c:ser>
+        <c:dLbls>
+          <c:showLegendKey val="0"/>
+          <c:showVal val="0"/>
+          <c:showCatName val="0"/>
+          <c:showSerName val="0"/>
+          <c:showPercent val="0"/>
+          <c:showBubbleSize val="0"/>
+          <c:showLeaderLines val="0"/>
+        </c:dLbls>
         <c:firstSliceAng val="0"/>
         <c:holeSize val="50"/>
       </c:doughnutChart>
@@ -344,12 +413,13 @@
               </a:solidFill>
             </a:defRPr>
           </a:pPr>
-          <a:endParaRPr lang="en-US"/>
+          <a:endParaRPr lang="es-MX"/>
         </a:p>
       </c:txPr>
     </c:legend>
     <c:plotVisOnly val="1"/>
     <c:dispBlanksAs val="span"/>
+    <c:showDLblsOverMax val="1"/>
   </c:chart>
   <c:spPr>
     <a:solidFill>
@@ -367,14 +437,17 @@
 </file>
 
 <file path=ppt/charts/chart2.xml><?xml version="1.0" encoding="utf-8"?>
-<c:chartSpace xmlns:c="http://schemas.openxmlformats.org/drawingml/2006/chart" xmlns:a="http://schemas.openxmlformats.org/drawingml/2006/main" xmlns:r="http://schemas.openxmlformats.org/officeDocument/2006/relationships">
+<c:chartSpace xmlns:c="http://schemas.openxmlformats.org/drawingml/2006/chart" xmlns:a="http://schemas.openxmlformats.org/drawingml/2006/main" xmlns:r="http://schemas.openxmlformats.org/officeDocument/2006/relationships" xmlns:c16r2="http://schemas.microsoft.com/office/drawing/2015/06/chart">
   <c:date1904 val="0"/>
+  <c:lang val="es-MX"/>
   <c:roundedCorners val="1"/>
+  <c:style val="2"/>
   <c:chart>
     <c:autoTitleDeleted val="1"/>
     <c:plotArea>
       <c:layout/>
       <c:lineChart>
+        <c:grouping val="standard"/>
         <c:varyColors val="0"/>
         <c:ser>
           <c:idx val="0"/>
@@ -391,9 +464,6 @@
             </c:strRef>
           </c:tx>
           <c:spPr>
-            <a:solidFill>
-              <a:srgbClr val="2D6B6B"/>
-            </a:solidFill>
             <a:ln w="31750" cap="flat">
               <a:solidFill>
                 <a:srgbClr val="2D6B6B"/>
@@ -403,31 +473,6 @@
             </a:ln>
             <a:effectLst/>
           </c:spPr>
-          <c:invertIfNegative val="0"/>
-          <c:dLbls>
-            <c:numFmt formatCode="#,##0" sourceLinked="0"/>
-            <c:txPr>
-              <a:bodyPr/>
-              <a:lstStyle/>
-              <a:p>
-                <a:pPr>
-                  <a:defRPr b="0" i="0" strike="noStrike" sz="1200" u="none">
-                    <a:solidFill>
-                      <a:srgbClr val="000000"/>
-                    </a:solidFill>
-                    <a:latin typeface="Arial"/>
-                  </a:defRPr>
-                </a:pPr>
-              </a:p>
-            </c:txPr>
-            <c:showLegendKey val="0"/>
-            <c:showVal val="0"/>
-            <c:showCatName val="0"/>
-            <c:showSerName val="0"/>
-            <c:showPercent val="0"/>
-            <c:showBubbleSize val="0"/>
-            <c:showLeaderLines val="0"/>
-          </c:dLbls>
           <c:marker>
             <c:symbol val="circle"/>
             <c:size val="6"/>
@@ -446,59 +491,57 @@
             </c:spPr>
           </c:marker>
           <c:cat>
-            <c:multiLvlStrRef>
+            <c:strRef>
               <c:f>Sheet1!$A$2:$A$16</c:f>
-              <c:multiLvlStrCache>
+              <c:strCache>
                 <c:ptCount val="15"/>
-                <c:lvl>
-                  <c:pt idx="0">
-                    <c:v>1</c:v>
-                  </c:pt>
-                  <c:pt idx="1">
-                    <c:v>2</c:v>
-                  </c:pt>
-                  <c:pt idx="2">
-                    <c:v>3</c:v>
-                  </c:pt>
-                  <c:pt idx="3">
-                    <c:v>4</c:v>
-                  </c:pt>
-                  <c:pt idx="4">
-                    <c:v>5</c:v>
-                  </c:pt>
-                  <c:pt idx="5">
-                    <c:v>6</c:v>
-                  </c:pt>
-                  <c:pt idx="6">
-                    <c:v>7</c:v>
-                  </c:pt>
-                  <c:pt idx="7">
-                    <c:v>8</c:v>
-                  </c:pt>
-                  <c:pt idx="8">
-                    <c:v>9</c:v>
-                  </c:pt>
-                  <c:pt idx="9">
-                    <c:v>10</c:v>
-                  </c:pt>
-                  <c:pt idx="10">
-                    <c:v>11</c:v>
-                  </c:pt>
-                  <c:pt idx="11">
-                    <c:v>12</c:v>
-                  </c:pt>
-                  <c:pt idx="12">
-                    <c:v>13</c:v>
-                  </c:pt>
-                  <c:pt idx="13">
-                    <c:v>14</c:v>
-                  </c:pt>
-                  <c:pt idx="14">
-                    <c:v>15</c:v>
-                  </c:pt>
-                </c:lvl>
-              </c:multiLvlStrCache>
-            </c:multiLvlStrRef>
+                <c:pt idx="0">
+                  <c:v>1</c:v>
+                </c:pt>
+                <c:pt idx="1">
+                  <c:v>2</c:v>
+                </c:pt>
+                <c:pt idx="2">
+                  <c:v>3</c:v>
+                </c:pt>
+                <c:pt idx="3">
+                  <c:v>4</c:v>
+                </c:pt>
+                <c:pt idx="4">
+                  <c:v>5</c:v>
+                </c:pt>
+                <c:pt idx="5">
+                  <c:v>6</c:v>
+                </c:pt>
+                <c:pt idx="6">
+                  <c:v>7</c:v>
+                </c:pt>
+                <c:pt idx="7">
+                  <c:v>8</c:v>
+                </c:pt>
+                <c:pt idx="8">
+                  <c:v>9</c:v>
+                </c:pt>
+                <c:pt idx="9">
+                  <c:v>10</c:v>
+                </c:pt>
+                <c:pt idx="10">
+                  <c:v>11</c:v>
+                </c:pt>
+                <c:pt idx="11">
+                  <c:v>12</c:v>
+                </c:pt>
+                <c:pt idx="12">
+                  <c:v>13</c:v>
+                </c:pt>
+                <c:pt idx="13">
+                  <c:v>14</c:v>
+                </c:pt>
+                <c:pt idx="14">
+                  <c:v>15</c:v>
+                </c:pt>
+              </c:strCache>
+            </c:strRef>
           </c:cat>
           <c:val>
             <c:numRef>
@@ -534,7 +577,7 @@
                   <c:v>32</c:v>
                 </c:pt>
                 <c:pt idx="9">
-                  <c:v>32.8</c:v>
+                  <c:v>32.799999999999997</c:v>
                 </c:pt>
                 <c:pt idx="10">
                   <c:v>33.5</c:v>
@@ -555,6 +598,11 @@
             </c:numRef>
           </c:val>
           <c:smooth val="1"/>
+          <c:extLst>
+            <c:ext xmlns:c16="http://schemas.microsoft.com/office/drawing/2014/chart" uri="{C3380CC4-5D6E-409C-BE32-E72D297353CC}">
+              <c16:uniqueId val="{00000000-3CCF-244C-81C8-9B0C522C3357}"/>
+            </c:ext>
+          </c:extLst>
         </c:ser>
         <c:ser>
           <c:idx val="1"/>
@@ -571,9 +619,6 @@
             </c:strRef>
           </c:tx>
           <c:spPr>
-            <a:solidFill>
-              <a:srgbClr val="C4956A"/>
-            </a:solidFill>
             <a:ln w="31750" cap="flat">
               <a:solidFill>
                 <a:srgbClr val="C4956A"/>
@@ -583,31 +628,6 @@
             </a:ln>
             <a:effectLst/>
           </c:spPr>
-          <c:invertIfNegative val="0"/>
-          <c:dLbls>
-            <c:numFmt formatCode="#,##0" sourceLinked="0"/>
-            <c:txPr>
-              <a:bodyPr/>
-              <a:lstStyle/>
-              <a:p>
-                <a:pPr>
-                  <a:defRPr b="0" i="0" strike="noStrike" sz="1200" u="none">
-                    <a:solidFill>
-                      <a:srgbClr val="000000"/>
-                    </a:solidFill>
-                    <a:latin typeface="Arial"/>
-                  </a:defRPr>
-                </a:pPr>
-              </a:p>
-            </c:txPr>
-            <c:showLegendKey val="0"/>
-            <c:showVal val="0"/>
-            <c:showCatName val="0"/>
-            <c:showSerName val="0"/>
-            <c:showPercent val="0"/>
-            <c:showBubbleSize val="0"/>
-            <c:showLeaderLines val="0"/>
-          </c:dLbls>
           <c:marker>
             <c:symbol val="circle"/>
             <c:size val="6"/>
@@ -626,59 +646,57 @@
             </c:spPr>
           </c:marker>
           <c:cat>
-            <c:multiLvlStrRef>
+            <c:strRef>
               <c:f>Sheet1!$A$2:$A$16</c:f>
-              <c:multiLvlStrCache>
+              <c:strCache>
                 <c:ptCount val="15"/>
-                <c:lvl>
-                  <c:pt idx="0">
-                    <c:v>1</c:v>
-                  </c:pt>
-                  <c:pt idx="1">
-                    <c:v>2</c:v>
-                  </c:pt>
-                  <c:pt idx="2">
-                    <c:v>3</c:v>
-                  </c:pt>
-                  <c:pt idx="3">
-                    <c:v>4</c:v>
-                  </c:pt>
-                  <c:pt idx="4">
-                    <c:v>5</c:v>
-                  </c:pt>
-                  <c:pt idx="5">
-                    <c:v>6</c:v>
-                  </c:pt>
-                  <c:pt idx="6">
-                    <c:v>7</c:v>
-                  </c:pt>
-                  <c:pt idx="7">
-                    <c:v>8</c:v>
-                  </c:pt>
-                  <c:pt idx="8">
-                    <c:v>9</c:v>
-                  </c:pt>
-                  <c:pt idx="9">
-                    <c:v>10</c:v>
-                  </c:pt>
-                  <c:pt idx="10">
-                    <c:v>11</c:v>
-                  </c:pt>
-                  <c:pt idx="11">
-                    <c:v>12</c:v>
-                  </c:pt>
-                  <c:pt idx="12">
-                    <c:v>13</c:v>
-                  </c:pt>
-                  <c:pt idx="13">
-                    <c:v>14</c:v>
-                  </c:pt>
-                  <c:pt idx="14">
-                    <c:v>15</c:v>
-                  </c:pt>
-                </c:lvl>
-              </c:multiLvlStrCache>
-            </c:multiLvlStrRef>
+                <c:pt idx="0">
+                  <c:v>1</c:v>
+                </c:pt>
+                <c:pt idx="1">
+                  <c:v>2</c:v>
+                </c:pt>
+                <c:pt idx="2">
+                  <c:v>3</c:v>
+                </c:pt>
+                <c:pt idx="3">
+                  <c:v>4</c:v>
+                </c:pt>
+                <c:pt idx="4">
+                  <c:v>5</c:v>
+                </c:pt>
+                <c:pt idx="5">
+                  <c:v>6</c:v>
+                </c:pt>
+                <c:pt idx="6">
+                  <c:v>7</c:v>
+                </c:pt>
+                <c:pt idx="7">
+                  <c:v>8</c:v>
+                </c:pt>
+                <c:pt idx="8">
+                  <c:v>9</c:v>
+                </c:pt>
+                <c:pt idx="9">
+                  <c:v>10</c:v>
+                </c:pt>
+                <c:pt idx="10">
+                  <c:v>11</c:v>
+                </c:pt>
+                <c:pt idx="11">
+                  <c:v>12</c:v>
+                </c:pt>
+                <c:pt idx="12">
+                  <c:v>13</c:v>
+                </c:pt>
+                <c:pt idx="13">
+                  <c:v>14</c:v>
+                </c:pt>
+                <c:pt idx="14">
+                  <c:v>15</c:v>
+                </c:pt>
+              </c:strCache>
+            </c:strRef>
           </c:cat>
           <c:val>
             <c:numRef>
@@ -735,6 +753,11 @@
             </c:numRef>
           </c:val>
           <c:smooth val="1"/>
+          <c:extLst>
+            <c:ext xmlns:c16="http://schemas.microsoft.com/office/drawing/2014/chart" uri="{C3380CC4-5D6E-409C-BE32-E72D297353CC}">
+              <c16:uniqueId val="{00000001-3CCF-244C-81C8-9B0C522C3357}"/>
+            </c:ext>
+          </c:extLst>
         </c:ser>
         <c:ser>
           <c:idx val="2"/>
@@ -751,9 +774,6 @@
             </c:strRef>
           </c:tx>
           <c:spPr>
-            <a:solidFill>
-              <a:srgbClr val="B8860B"/>
-            </a:solidFill>
             <a:ln w="31750" cap="flat">
               <a:solidFill>
                 <a:srgbClr val="B8860B"/>
@@ -763,31 +783,6 @@
             </a:ln>
             <a:effectLst/>
           </c:spPr>
-          <c:invertIfNegative val="0"/>
-          <c:dLbls>
-            <c:numFmt formatCode="#,##0" sourceLinked="0"/>
-            <c:txPr>
-              <a:bodyPr/>
-              <a:lstStyle/>
-              <a:p>
-                <a:pPr>
-                  <a:defRPr b="0" i="0" strike="noStrike" sz="1200" u="none">
-                    <a:solidFill>
-                      <a:srgbClr val="000000"/>
-                    </a:solidFill>
-                    <a:latin typeface="Arial"/>
-                  </a:defRPr>
-                </a:pPr>
-              </a:p>
-            </c:txPr>
-            <c:showLegendKey val="0"/>
-            <c:showVal val="0"/>
-            <c:showCatName val="0"/>
-            <c:showSerName val="0"/>
-            <c:showPercent val="0"/>
-            <c:showBubbleSize val="0"/>
-            <c:showLeaderLines val="0"/>
-          </c:dLbls>
           <c:marker>
             <c:symbol val="circle"/>
             <c:size val="6"/>
@@ -806,59 +801,57 @@
             </c:spPr>
           </c:marker>
           <c:cat>
-            <c:multiLvlStrRef>
+            <c:strRef>
               <c:f>Sheet1!$A$2:$A$16</c:f>
-              <c:multiLvlStrCache>
+              <c:strCache>
                 <c:ptCount val="15"/>
-                <c:lvl>
-                  <c:pt idx="0">
-                    <c:v>1</c:v>
-                  </c:pt>
-                  <c:pt idx="1">
-                    <c:v>2</c:v>
-                  </c:pt>
-                  <c:pt idx="2">
-                    <c:v>3</c:v>
-                  </c:pt>
-                  <c:pt idx="3">
-                    <c:v>4</c:v>
-                  </c:pt>
-                  <c:pt idx="4">
-                    <c:v>5</c:v>
-                  </c:pt>
-                  <c:pt idx="5">
-                    <c:v>6</c:v>
-                  </c:pt>
-                  <c:pt idx="6">
-                    <c:v>7</c:v>
-                  </c:pt>
-                  <c:pt idx="7">
-                    <c:v>8</c:v>
-                  </c:pt>
-                  <c:pt idx="8">
-                    <c:v>9</c:v>
-                  </c:pt>
-                  <c:pt idx="9">
-                    <c:v>10</c:v>
-                  </c:pt>
-                  <c:pt idx="10">
-                    <c:v>11</c:v>
-                  </c:pt>
-                  <c:pt idx="11">
-                    <c:v>12</c:v>
-                  </c:pt>
-                  <c:pt idx="12">
-                    <c:v>13</c:v>
-                  </c:pt>
-                  <c:pt idx="13">
-                    <c:v>14</c:v>
-                  </c:pt>
-                  <c:pt idx="14">
-                    <c:v>15</c:v>
-                  </c:pt>
-                </c:lvl>
-              </c:multiLvlStrCache>
-            </c:multiLvlStrRef>
+                <c:pt idx="0">
+                  <c:v>1</c:v>
+                </c:pt>
+                <c:pt idx="1">
+                  <c:v>2</c:v>
+                </c:pt>
+                <c:pt idx="2">
+                  <c:v>3</c:v>
+                </c:pt>
+                <c:pt idx="3">
+                  <c:v>4</c:v>
+                </c:pt>
+                <c:pt idx="4">
+                  <c:v>5</c:v>
+                </c:pt>
+                <c:pt idx="5">
+                  <c:v>6</c:v>
+                </c:pt>
+                <c:pt idx="6">
+                  <c:v>7</c:v>
+                </c:pt>
+                <c:pt idx="7">
+                  <c:v>8</c:v>
+                </c:pt>
+                <c:pt idx="8">
+                  <c:v>9</c:v>
+                </c:pt>
+                <c:pt idx="9">
+                  <c:v>10</c:v>
+                </c:pt>
+                <c:pt idx="10">
+                  <c:v>11</c:v>
+                </c:pt>
+                <c:pt idx="11">
+                  <c:v>12</c:v>
+                </c:pt>
+                <c:pt idx="12">
+                  <c:v>13</c:v>
+                </c:pt>
+                <c:pt idx="13">
+                  <c:v>14</c:v>
+                </c:pt>
+                <c:pt idx="14">
+                  <c:v>15</c:v>
+                </c:pt>
+              </c:strCache>
+            </c:strRef>
           </c:cat>
           <c:val>
             <c:numRef>
@@ -876,7 +869,7 @@
                   <c:v>5.9</c:v>
                 </c:pt>
                 <c:pt idx="3">
-                  <c:v>8.7</c:v>
+                  <c:v>8.6999999999999993</c:v>
                 </c:pt>
                 <c:pt idx="4">
                   <c:v>11.6</c:v>
@@ -885,10 +878,10 @@
                   <c:v>14.2</c:v>
                 </c:pt>
                 <c:pt idx="6">
-                  <c:v>16.4</c:v>
+                  <c:v>16.399999999999999</c:v>
                 </c:pt>
                 <c:pt idx="7">
-                  <c:v>18.6</c:v>
+                  <c:v>18.600000000000001</c:v>
                 </c:pt>
                 <c:pt idx="8">
                   <c:v>20.6</c:v>
@@ -915,35 +908,24 @@
             </c:numRef>
           </c:val>
           <c:smooth val="1"/>
+          <c:extLst>
+            <c:ext xmlns:c16="http://schemas.microsoft.com/office/drawing/2014/chart" uri="{C3380CC4-5D6E-409C-BE32-E72D297353CC}">
+              <c16:uniqueId val="{00000002-3CCF-244C-81C8-9B0C522C3357}"/>
+            </c:ext>
+          </c:extLst>
         </c:ser>
         <c:dLbls>
-          <c:numFmt formatCode="#,##0" sourceLinked="0"/>
-          <c:txPr>
-            <a:bodyPr/>
-            <a:lstStyle/>
-            <a:p>
-              <a:pPr>
-                <a:defRPr b="0" i="0" strike="noStrike" sz="1200" u="none">
-                  <a:solidFill>
-                    <a:srgbClr val="000000"/>
-                  </a:solidFill>
-                  <a:latin typeface="Arial"/>
-                </a:defRPr>
-              </a:pPr>
-            </a:p>
-          </c:txPr>
           <c:showLegendKey val="0"/>
           <c:showVal val="0"/>
           <c:showCatName val="0"/>
           <c:showSerName val="0"/>
           <c:showPercent val="0"/>
           <c:showBubbleSize val="0"/>
-          <c:showLeaderLines val="0"/>
         </c:dLbls>
         <c:marker val="1"/>
+        <c:smooth val="0"/>
         <c:axId val="2094734554"/>
         <c:axId val="2094734552"/>
-        <c:axId val="2094734556"/>
       </c:lineChart>
       <c:catAx>
         <c:axId val="2094734554"/>
@@ -977,13 +959,14 @@
                 <a:latin typeface="Arial"/>
               </a:defRPr>
             </a:pPr>
-            <a:endParaRPr lang="en-US"/>
+            <a:endParaRPr lang="es-MX"/>
           </a:p>
         </c:txPr>
         <c:crossAx val="2094734552"/>
         <c:crosses val="autoZero"/>
         <c:auto val="1"/>
         <c:lblAlgn val="ctr"/>
+        <c:lblOffset val="100"/>
         <c:noMultiLvlLbl val="1"/>
       </c:catAx>
       <c:valAx>
@@ -1029,7 +1012,7 @@
                 <a:latin typeface="Arial"/>
               </a:defRPr>
             </a:pPr>
-            <a:endParaRPr lang="en-US"/>
+            <a:endParaRPr lang="es-MX"/>
           </a:p>
         </c:txPr>
         <c:crossAx val="2094734554"/>
@@ -1058,12 +1041,13 @@
               </a:solidFill>
             </a:defRPr>
           </a:pPr>
-          <a:endParaRPr lang="en-US"/>
+          <a:endParaRPr lang="es-MX"/>
         </a:p>
       </c:txPr>
     </c:legend>
     <c:plotVisOnly val="1"/>
     <c:dispBlanksAs val="span"/>
+    <c:showDLblsOverMax val="1"/>
   </c:chart>
   <c:spPr>
     <a:noFill/>
@@ -1079,9 +1063,11 @@
 </file>
 
 <file path=ppt/charts/chart3.xml><?xml version="1.0" encoding="utf-8"?>
-<c:chartSpace xmlns:c="http://schemas.openxmlformats.org/drawingml/2006/chart" xmlns:a="http://schemas.openxmlformats.org/drawingml/2006/main" xmlns:r="http://schemas.openxmlformats.org/officeDocument/2006/relationships">
+<c:chartSpace xmlns:c="http://schemas.openxmlformats.org/drawingml/2006/chart" xmlns:a="http://schemas.openxmlformats.org/drawingml/2006/main" xmlns:r="http://schemas.openxmlformats.org/officeDocument/2006/relationships" xmlns:c16r2="http://schemas.microsoft.com/office/drawing/2015/06/chart">
   <c:date1904 val="0"/>
+  <c:lang val="es-MX"/>
   <c:roundedCorners val="1"/>
+  <c:style val="2"/>
   <c:chart>
     <c:title>
       <c:tx>
@@ -1098,7 +1084,7 @@
               </a:defRPr>
             </a:pPr>
             <a:r>
-              <a:rPr sz="1000" b="0" i="0" u="none" strike="noStrike">
+              <a:rPr lang="es-MX" sz="1000" b="0" i="0" u="none" strike="noStrike">
                 <a:solidFill>
                   <a:srgbClr val="6B2D5B"/>
                 </a:solidFill>
@@ -1109,7 +1095,6 @@
           </a:p>
         </c:rich>
       </c:tx>
-      <c:layout/>
       <c:overlay val="0"/>
     </c:title>
     <c:autoTitleDeleted val="0"/>
@@ -1140,63 +1125,37 @@
             <a:effectLst/>
           </c:spPr>
           <c:invertIfNegative val="0"/>
-          <c:dLbls>
-            <c:numFmt formatCode="#,##0" sourceLinked="0"/>
-            <c:txPr>
-              <a:bodyPr/>
-              <a:lstStyle/>
-              <a:p>
-                <a:pPr>
-                  <a:defRPr b="0" i="0" strike="noStrike" sz="1200" u="none">
-                    <a:solidFill>
-                      <a:srgbClr val="000000"/>
-                    </a:solidFill>
-                    <a:latin typeface="Arial"/>
-                  </a:defRPr>
-                </a:pPr>
-              </a:p>
-            </c:txPr>
-            <c:showLegendKey val="0"/>
-            <c:showVal val="0"/>
-            <c:showCatName val="0"/>
-            <c:showSerName val="0"/>
-            <c:showPercent val="0"/>
-            <c:showBubbleSize val="0"/>
-            <c:showLeaderLines val="0"/>
-          </c:dLbls>
           <c:cat>
-            <c:multiLvlStrRef>
+            <c:strRef>
               <c:f>Sheet1!$A$2:$A$9</c:f>
-              <c:multiLvlStrCache>
+              <c:strCache>
                 <c:ptCount val="8"/>
-                <c:lvl>
-                  <c:pt idx="0">
-                    <c:v>1</c:v>
-                  </c:pt>
-                  <c:pt idx="1">
-                    <c:v>2</c:v>
-                  </c:pt>
-                  <c:pt idx="2">
-                    <c:v>3</c:v>
-                  </c:pt>
-                  <c:pt idx="3">
-                    <c:v>4</c:v>
-                  </c:pt>
-                  <c:pt idx="4">
-                    <c:v>5</c:v>
-                  </c:pt>
-                  <c:pt idx="5">
-                    <c:v>6</c:v>
-                  </c:pt>
-                  <c:pt idx="6">
-                    <c:v>7</c:v>
-                  </c:pt>
-                  <c:pt idx="7">
-                    <c:v>8</c:v>
-                  </c:pt>
-                </c:lvl>
-              </c:multiLvlStrCache>
-            </c:multiLvlStrRef>
+                <c:pt idx="0">
+                  <c:v>1</c:v>
+                </c:pt>
+                <c:pt idx="1">
+                  <c:v>2</c:v>
+                </c:pt>
+                <c:pt idx="2">
+                  <c:v>3</c:v>
+                </c:pt>
+                <c:pt idx="3">
+                  <c:v>4</c:v>
+                </c:pt>
+                <c:pt idx="4">
+                  <c:v>5</c:v>
+                </c:pt>
+                <c:pt idx="5">
+                  <c:v>6</c:v>
+                </c:pt>
+                <c:pt idx="6">
+                  <c:v>7</c:v>
+                </c:pt>
+                <c:pt idx="7">
+                  <c:v>8</c:v>
+                </c:pt>
+              </c:strCache>
+            </c:strRef>
           </c:cat>
           <c:val>
             <c:numRef>
@@ -1231,6 +1190,11 @@
               </c:numCache>
             </c:numRef>
           </c:val>
+          <c:extLst>
+            <c:ext xmlns:c16="http://schemas.microsoft.com/office/drawing/2014/chart" uri="{C3380CC4-5D6E-409C-BE32-E72D297353CC}">
+              <c16:uniqueId val="{00000000-978A-904D-9247-DA0965E2D618}"/>
+            </c:ext>
+          </c:extLst>
         </c:ser>
         <c:ser>
           <c:idx val="1"/>
@@ -1253,63 +1217,37 @@
             <a:effectLst/>
           </c:spPr>
           <c:invertIfNegative val="0"/>
-          <c:dLbls>
-            <c:numFmt formatCode="#,##0" sourceLinked="0"/>
-            <c:txPr>
-              <a:bodyPr/>
-              <a:lstStyle/>
-              <a:p>
-                <a:pPr>
-                  <a:defRPr b="0" i="0" strike="noStrike" sz="1200" u="none">
-                    <a:solidFill>
-                      <a:srgbClr val="000000"/>
-                    </a:solidFill>
-                    <a:latin typeface="Arial"/>
-                  </a:defRPr>
-                </a:pPr>
-              </a:p>
-            </c:txPr>
-            <c:showLegendKey val="0"/>
-            <c:showVal val="0"/>
-            <c:showCatName val="0"/>
-            <c:showSerName val="0"/>
-            <c:showPercent val="0"/>
-            <c:showBubbleSize val="0"/>
-            <c:showLeaderLines val="0"/>
-          </c:dLbls>
           <c:cat>
-            <c:multiLvlStrRef>
+            <c:strRef>
               <c:f>Sheet1!$A$2:$A$9</c:f>
-              <c:multiLvlStrCache>
+              <c:strCache>
                 <c:ptCount val="8"/>
-                <c:lvl>
-                  <c:pt idx="0">
-                    <c:v>1</c:v>
-                  </c:pt>
-                  <c:pt idx="1">
-                    <c:v>2</c:v>
-                  </c:pt>
-                  <c:pt idx="2">
-                    <c:v>3</c:v>
-                  </c:pt>
-                  <c:pt idx="3">
-                    <c:v>4</c:v>
-                  </c:pt>
-                  <c:pt idx="4">
-                    <c:v>5</c:v>
-                  </c:pt>
-                  <c:pt idx="5">
-                    <c:v>6</c:v>
-                  </c:pt>
-                  <c:pt idx="6">
-                    <c:v>7</c:v>
-                  </c:pt>
-                  <c:pt idx="7">
-                    <c:v>8</c:v>
-                  </c:pt>
-                </c:lvl>
-              </c:multiLvlStrCache>
-            </c:multiLvlStrRef>
+                <c:pt idx="0">
+                  <c:v>1</c:v>
+                </c:pt>
+                <c:pt idx="1">
+                  <c:v>2</c:v>
+                </c:pt>
+                <c:pt idx="2">
+                  <c:v>3</c:v>
+                </c:pt>
+                <c:pt idx="3">
+                  <c:v>4</c:v>
+                </c:pt>
+                <c:pt idx="4">
+                  <c:v>5</c:v>
+                </c:pt>
+                <c:pt idx="5">
+                  <c:v>6</c:v>
+                </c:pt>
+                <c:pt idx="6">
+                  <c:v>7</c:v>
+                </c:pt>
+                <c:pt idx="7">
+                  <c:v>8</c:v>
+                </c:pt>
+              </c:strCache>
+            </c:strRef>
           </c:cat>
           <c:val>
             <c:numRef>
@@ -1344,36 +1282,23 @@
               </c:numCache>
             </c:numRef>
           </c:val>
+          <c:extLst>
+            <c:ext xmlns:c16="http://schemas.microsoft.com/office/drawing/2014/chart" uri="{C3380CC4-5D6E-409C-BE32-E72D297353CC}">
+              <c16:uniqueId val="{00000001-978A-904D-9247-DA0965E2D618}"/>
+            </c:ext>
+          </c:extLst>
         </c:ser>
         <c:dLbls>
-          <c:numFmt formatCode="#,##0" sourceLinked="0"/>
-          <c:txPr>
-            <a:bodyPr/>
-            <a:lstStyle/>
-            <a:p>
-              <a:pPr>
-                <a:defRPr b="0" i="0" strike="noStrike" sz="1200" u="none">
-                  <a:solidFill>
-                    <a:srgbClr val="000000"/>
-                  </a:solidFill>
-                  <a:latin typeface="Arial"/>
-                </a:defRPr>
-              </a:pPr>
-            </a:p>
-          </c:txPr>
           <c:showLegendKey val="0"/>
           <c:showVal val="0"/>
           <c:showCatName val="0"/>
           <c:showSerName val="0"/>
           <c:showPercent val="0"/>
           <c:showBubbleSize val="0"/>
-          <c:showLeaderLines val="0"/>
         </c:dLbls>
         <c:gapWidth val="150"/>
-        <c:overlap val="0"/>
         <c:axId val="2094734554"/>
         <c:axId val="2094734552"/>
-        <c:axId val="2094734556"/>
       </c:barChart>
       <c:catAx>
         <c:axId val="2094734554"/>
@@ -1407,13 +1332,14 @@
                 <a:latin typeface="Arial"/>
               </a:defRPr>
             </a:pPr>
-            <a:endParaRPr lang="en-US"/>
+            <a:endParaRPr lang="es-MX"/>
           </a:p>
         </c:txPr>
         <c:crossAx val="2094734552"/>
         <c:crosses val="autoZero"/>
         <c:auto val="1"/>
         <c:lblAlgn val="ctr"/>
+        <c:lblOffset val="100"/>
         <c:noMultiLvlLbl val="1"/>
       </c:catAx>
       <c:valAx>
@@ -1459,7 +1385,7 @@
                 <a:latin typeface="Arial"/>
               </a:defRPr>
             </a:pPr>
-            <a:endParaRPr lang="en-US"/>
+            <a:endParaRPr lang="es-MX"/>
           </a:p>
         </c:txPr>
         <c:crossAx val="2094734554"/>
@@ -1488,12 +1414,13 @@
               </a:solidFill>
             </a:defRPr>
           </a:pPr>
-          <a:endParaRPr lang="en-US"/>
+          <a:endParaRPr lang="es-MX"/>
         </a:p>
       </c:txPr>
     </c:legend>
     <c:plotVisOnly val="1"/>
     <c:dispBlanksAs val="span"/>
+    <c:showDLblsOverMax val="1"/>
   </c:chart>
   <c:spPr>
     <a:solidFill>
@@ -1511,9 +1438,11 @@
 </file>
 
 <file path=ppt/charts/chart4.xml><?xml version="1.0" encoding="utf-8"?>
-<c:chartSpace xmlns:c="http://schemas.openxmlformats.org/drawingml/2006/chart" xmlns:a="http://schemas.openxmlformats.org/drawingml/2006/main" xmlns:r="http://schemas.openxmlformats.org/officeDocument/2006/relationships">
+<c:chartSpace xmlns:c="http://schemas.openxmlformats.org/drawingml/2006/chart" xmlns:a="http://schemas.openxmlformats.org/drawingml/2006/main" xmlns:r="http://schemas.openxmlformats.org/officeDocument/2006/relationships" xmlns:c16r2="http://schemas.microsoft.com/office/drawing/2015/06/chart">
   <c:date1904 val="0"/>
+  <c:lang val="es-MX"/>
   <c:roundedCorners val="1"/>
+  <c:style val="2"/>
   <c:chart>
     <c:title>
       <c:tx>
@@ -1530,7 +1459,7 @@
               </a:defRPr>
             </a:pPr>
             <a:r>
-              <a:rPr sz="1000" b="0" i="0" u="none" strike="noStrike">
+              <a:rPr lang="es-MX" sz="1000" b="0" i="0" u="none" strike="noStrike">
                 <a:solidFill>
                   <a:srgbClr val="2D6B6B"/>
                 </a:solidFill>
@@ -1541,7 +1470,6 @@
           </a:p>
         </c:rich>
       </c:tx>
-      <c:layout/>
       <c:overlay val="0"/>
     </c:title>
     <c:autoTitleDeleted val="0"/>
@@ -1572,63 +1500,37 @@
             <a:effectLst/>
           </c:spPr>
           <c:invertIfNegative val="0"/>
-          <c:dLbls>
-            <c:numFmt formatCode="#,##0" sourceLinked="0"/>
-            <c:txPr>
-              <a:bodyPr/>
-              <a:lstStyle/>
-              <a:p>
-                <a:pPr>
-                  <a:defRPr b="0" i="0" strike="noStrike" sz="1200" u="none">
-                    <a:solidFill>
-                      <a:srgbClr val="000000"/>
-                    </a:solidFill>
-                    <a:latin typeface="Arial"/>
-                  </a:defRPr>
-                </a:pPr>
-              </a:p>
-            </c:txPr>
-            <c:showLegendKey val="0"/>
-            <c:showVal val="0"/>
-            <c:showCatName val="0"/>
-            <c:showSerName val="0"/>
-            <c:showPercent val="0"/>
-            <c:showBubbleSize val="0"/>
-            <c:showLeaderLines val="0"/>
-          </c:dLbls>
           <c:cat>
-            <c:multiLvlStrRef>
+            <c:strRef>
               <c:f>Sheet1!$A$2:$A$9</c:f>
-              <c:multiLvlStrCache>
+              <c:strCache>
                 <c:ptCount val="8"/>
-                <c:lvl>
-                  <c:pt idx="0">
-                    <c:v>1</c:v>
-                  </c:pt>
-                  <c:pt idx="1">
-                    <c:v>2</c:v>
-                  </c:pt>
-                  <c:pt idx="2">
-                    <c:v>3</c:v>
-                  </c:pt>
-                  <c:pt idx="3">
-                    <c:v>4</c:v>
-                  </c:pt>
-                  <c:pt idx="4">
-                    <c:v>5</c:v>
-                  </c:pt>
-                  <c:pt idx="5">
-                    <c:v>6</c:v>
-                  </c:pt>
-                  <c:pt idx="6">
-                    <c:v>7</c:v>
-                  </c:pt>
-                  <c:pt idx="7">
-                    <c:v>8</c:v>
-                  </c:pt>
-                </c:lvl>
-              </c:multiLvlStrCache>
-            </c:multiLvlStrRef>
+                <c:pt idx="0">
+                  <c:v>1</c:v>
+                </c:pt>
+                <c:pt idx="1">
+                  <c:v>2</c:v>
+                </c:pt>
+                <c:pt idx="2">
+                  <c:v>3</c:v>
+                </c:pt>
+                <c:pt idx="3">
+                  <c:v>4</c:v>
+                </c:pt>
+                <c:pt idx="4">
+                  <c:v>5</c:v>
+                </c:pt>
+                <c:pt idx="5">
+                  <c:v>6</c:v>
+                </c:pt>
+                <c:pt idx="6">
+                  <c:v>7</c:v>
+                </c:pt>
+                <c:pt idx="7">
+                  <c:v>8</c:v>
+                </c:pt>
+              </c:strCache>
+            </c:strRef>
           </c:cat>
           <c:val>
             <c:numRef>
@@ -1663,6 +1565,11 @@
               </c:numCache>
             </c:numRef>
           </c:val>
+          <c:extLst>
+            <c:ext xmlns:c16="http://schemas.microsoft.com/office/drawing/2014/chart" uri="{C3380CC4-5D6E-409C-BE32-E72D297353CC}">
+              <c16:uniqueId val="{00000000-569B-2944-A9B0-787894A04F13}"/>
+            </c:ext>
+          </c:extLst>
         </c:ser>
         <c:ser>
           <c:idx val="1"/>
@@ -1685,63 +1592,37 @@
             <a:effectLst/>
           </c:spPr>
           <c:invertIfNegative val="0"/>
-          <c:dLbls>
-            <c:numFmt formatCode="#,##0" sourceLinked="0"/>
-            <c:txPr>
-              <a:bodyPr/>
-              <a:lstStyle/>
-              <a:p>
-                <a:pPr>
-                  <a:defRPr b="0" i="0" strike="noStrike" sz="1200" u="none">
-                    <a:solidFill>
-                      <a:srgbClr val="000000"/>
-                    </a:solidFill>
-                    <a:latin typeface="Arial"/>
-                  </a:defRPr>
-                </a:pPr>
-              </a:p>
-            </c:txPr>
-            <c:showLegendKey val="0"/>
-            <c:showVal val="0"/>
-            <c:showCatName val="0"/>
-            <c:showSerName val="0"/>
-            <c:showPercent val="0"/>
-            <c:showBubbleSize val="0"/>
-            <c:showLeaderLines val="0"/>
-          </c:dLbls>
           <c:cat>
-            <c:multiLvlStrRef>
+            <c:strRef>
               <c:f>Sheet1!$A$2:$A$9</c:f>
-              <c:multiLvlStrCache>
+              <c:strCache>
                 <c:ptCount val="8"/>
-                <c:lvl>
-                  <c:pt idx="0">
-                    <c:v>1</c:v>
-                  </c:pt>
-                  <c:pt idx="1">
-                    <c:v>2</c:v>
-                  </c:pt>
-                  <c:pt idx="2">
-                    <c:v>3</c:v>
-                  </c:pt>
-                  <c:pt idx="3">
-                    <c:v>4</c:v>
-                  </c:pt>
-                  <c:pt idx="4">
-                    <c:v>5</c:v>
-                  </c:pt>
-                  <c:pt idx="5">
-                    <c:v>6</c:v>
-                  </c:pt>
-                  <c:pt idx="6">
-                    <c:v>7</c:v>
-                  </c:pt>
-                  <c:pt idx="7">
-                    <c:v>8</c:v>
-                  </c:pt>
-                </c:lvl>
-              </c:multiLvlStrCache>
-            </c:multiLvlStrRef>
+                <c:pt idx="0">
+                  <c:v>1</c:v>
+                </c:pt>
+                <c:pt idx="1">
+                  <c:v>2</c:v>
+                </c:pt>
+                <c:pt idx="2">
+                  <c:v>3</c:v>
+                </c:pt>
+                <c:pt idx="3">
+                  <c:v>4</c:v>
+                </c:pt>
+                <c:pt idx="4">
+                  <c:v>5</c:v>
+                </c:pt>
+                <c:pt idx="5">
+                  <c:v>6</c:v>
+                </c:pt>
+                <c:pt idx="6">
+                  <c:v>7</c:v>
+                </c:pt>
+                <c:pt idx="7">
+                  <c:v>8</c:v>
+                </c:pt>
+              </c:strCache>
+            </c:strRef>
           </c:cat>
           <c:val>
             <c:numRef>
@@ -1776,36 +1657,23 @@
               </c:numCache>
             </c:numRef>
           </c:val>
+          <c:extLst>
+            <c:ext xmlns:c16="http://schemas.microsoft.com/office/drawing/2014/chart" uri="{C3380CC4-5D6E-409C-BE32-E72D297353CC}">
+              <c16:uniqueId val="{00000001-569B-2944-A9B0-787894A04F13}"/>
+            </c:ext>
+          </c:extLst>
         </c:ser>
         <c:dLbls>
-          <c:numFmt formatCode="#,##0" sourceLinked="0"/>
-          <c:txPr>
-            <a:bodyPr/>
-            <a:lstStyle/>
-            <a:p>
-              <a:pPr>
-                <a:defRPr b="0" i="0" strike="noStrike" sz="1200" u="none">
-                  <a:solidFill>
-                    <a:srgbClr val="000000"/>
-                  </a:solidFill>
-                  <a:latin typeface="Arial"/>
-                </a:defRPr>
-              </a:pPr>
-            </a:p>
-          </c:txPr>
           <c:showLegendKey val="0"/>
           <c:showVal val="0"/>
           <c:showCatName val="0"/>
           <c:showSerName val="0"/>
           <c:showPercent val="0"/>
           <c:showBubbleSize val="0"/>
-          <c:showLeaderLines val="0"/>
         </c:dLbls>
         <c:gapWidth val="150"/>
-        <c:overlap val="0"/>
         <c:axId val="2094734554"/>
         <c:axId val="2094734552"/>
-        <c:axId val="2094734556"/>
       </c:barChart>
       <c:catAx>
         <c:axId val="2094734554"/>
@@ -1839,13 +1707,14 @@
                 <a:latin typeface="Arial"/>
               </a:defRPr>
             </a:pPr>
-            <a:endParaRPr lang="en-US"/>
+            <a:endParaRPr lang="es-MX"/>
           </a:p>
         </c:txPr>
         <c:crossAx val="2094734552"/>
         <c:crosses val="autoZero"/>
         <c:auto val="1"/>
         <c:lblAlgn val="ctr"/>
+        <c:lblOffset val="100"/>
         <c:noMultiLvlLbl val="1"/>
       </c:catAx>
       <c:valAx>
@@ -1891,7 +1760,7 @@
                 <a:latin typeface="Arial"/>
               </a:defRPr>
             </a:pPr>
-            <a:endParaRPr lang="en-US"/>
+            <a:endParaRPr lang="es-MX"/>
           </a:p>
         </c:txPr>
         <c:crossAx val="2094734554"/>
@@ -1920,12 +1789,13 @@
               </a:solidFill>
             </a:defRPr>
           </a:pPr>
-          <a:endParaRPr lang="en-US"/>
+          <a:endParaRPr lang="es-MX"/>
         </a:p>
       </c:txPr>
     </c:legend>
     <c:plotVisOnly val="1"/>
     <c:dispBlanksAs val="span"/>
+    <c:showDLblsOverMax val="1"/>
   </c:chart>
   <c:spPr>
     <a:solidFill>
@@ -1943,14 +1813,17 @@
 </file>
 
 <file path=ppt/charts/chart5.xml><?xml version="1.0" encoding="utf-8"?>
-<c:chartSpace xmlns:c="http://schemas.openxmlformats.org/drawingml/2006/chart" xmlns:a="http://schemas.openxmlformats.org/drawingml/2006/main" xmlns:r="http://schemas.openxmlformats.org/officeDocument/2006/relationships">
+<c:chartSpace xmlns:c="http://schemas.openxmlformats.org/drawingml/2006/chart" xmlns:a="http://schemas.openxmlformats.org/drawingml/2006/main" xmlns:r="http://schemas.openxmlformats.org/officeDocument/2006/relationships" xmlns:c16r2="http://schemas.microsoft.com/office/drawing/2015/06/chart">
   <c:date1904 val="0"/>
+  <c:lang val="es-MX"/>
   <c:roundedCorners val="1"/>
+  <c:style val="2"/>
   <c:chart>
     <c:autoTitleDeleted val="1"/>
     <c:plotArea>
       <c:layout/>
       <c:lineChart>
+        <c:grouping val="standard"/>
         <c:varyColors val="0"/>
         <c:ser>
           <c:idx val="0"/>
@@ -1967,9 +1840,6 @@
             </c:strRef>
           </c:tx>
           <c:spPr>
-            <a:solidFill>
-              <a:srgbClr val="2D6B6B"/>
-            </a:solidFill>
             <a:ln w="31750" cap="flat">
               <a:solidFill>
                 <a:srgbClr val="2D6B6B"/>
@@ -1979,31 +1849,6 @@
             </a:ln>
             <a:effectLst/>
           </c:spPr>
-          <c:invertIfNegative val="0"/>
-          <c:dLbls>
-            <c:numFmt formatCode="#,##0" sourceLinked="0"/>
-            <c:txPr>
-              <a:bodyPr/>
-              <a:lstStyle/>
-              <a:p>
-                <a:pPr>
-                  <a:defRPr b="0" i="0" strike="noStrike" sz="1200" u="none">
-                    <a:solidFill>
-                      <a:srgbClr val="000000"/>
-                    </a:solidFill>
-                    <a:latin typeface="Arial"/>
-                  </a:defRPr>
-                </a:pPr>
-              </a:p>
-            </c:txPr>
-            <c:showLegendKey val="0"/>
-            <c:showVal val="0"/>
-            <c:showCatName val="0"/>
-            <c:showSerName val="0"/>
-            <c:showPercent val="0"/>
-            <c:showBubbleSize val="0"/>
-            <c:showLeaderLines val="0"/>
-          </c:dLbls>
           <c:marker>
             <c:symbol val="circle"/>
             <c:size val="6"/>
@@ -2022,35 +1867,33 @@
             </c:spPr>
           </c:marker>
           <c:cat>
-            <c:multiLvlStrRef>
+            <c:strRef>
               <c:f>Sheet1!$A$2:$A$8</c:f>
-              <c:multiLvlStrCache>
+              <c:strCache>
                 <c:ptCount val="7"/>
-                <c:lvl>
-                  <c:pt idx="0">
-                    <c:v>Mes 0</c:v>
-                  </c:pt>
-                  <c:pt idx="1">
-                    <c:v>Mes 1</c:v>
-                  </c:pt>
-                  <c:pt idx="2">
-                    <c:v>Mes 2</c:v>
-                  </c:pt>
-                  <c:pt idx="3">
-                    <c:v>Mes 3</c:v>
-                  </c:pt>
-                  <c:pt idx="4">
-                    <c:v>Mes 4</c:v>
-                  </c:pt>
-                  <c:pt idx="5">
-                    <c:v>Mes 5</c:v>
-                  </c:pt>
-                  <c:pt idx="6">
-                    <c:v>Mes 6</c:v>
-                  </c:pt>
-                </c:lvl>
-              </c:multiLvlStrCache>
-            </c:multiLvlStrRef>
+                <c:pt idx="0">
+                  <c:v>Mes 0</c:v>
+                </c:pt>
+                <c:pt idx="1">
+                  <c:v>Mes 1</c:v>
+                </c:pt>
+                <c:pt idx="2">
+                  <c:v>Mes 2</c:v>
+                </c:pt>
+                <c:pt idx="3">
+                  <c:v>Mes 3</c:v>
+                </c:pt>
+                <c:pt idx="4">
+                  <c:v>Mes 4</c:v>
+                </c:pt>
+                <c:pt idx="5">
+                  <c:v>Mes 5</c:v>
+                </c:pt>
+                <c:pt idx="6">
+                  <c:v>Mes 6</c:v>
+                </c:pt>
+              </c:strCache>
+            </c:strRef>
           </c:cat>
           <c:val>
             <c:numRef>
@@ -2083,6 +1926,11 @@
             </c:numRef>
           </c:val>
           <c:smooth val="1"/>
+          <c:extLst>
+            <c:ext xmlns:c16="http://schemas.microsoft.com/office/drawing/2014/chart" uri="{C3380CC4-5D6E-409C-BE32-E72D297353CC}">
+              <c16:uniqueId val="{00000000-7D8F-B943-A8C5-D4B16C155B81}"/>
+            </c:ext>
+          </c:extLst>
         </c:ser>
         <c:ser>
           <c:idx val="1"/>
@@ -2099,9 +1947,6 @@
             </c:strRef>
           </c:tx>
           <c:spPr>
-            <a:solidFill>
-              <a:srgbClr val="C4956A"/>
-            </a:solidFill>
             <a:ln w="31750" cap="flat">
               <a:solidFill>
                 <a:srgbClr val="C4956A"/>
@@ -2111,31 +1956,6 @@
             </a:ln>
             <a:effectLst/>
           </c:spPr>
-          <c:invertIfNegative val="0"/>
-          <c:dLbls>
-            <c:numFmt formatCode="#,##0" sourceLinked="0"/>
-            <c:txPr>
-              <a:bodyPr/>
-              <a:lstStyle/>
-              <a:p>
-                <a:pPr>
-                  <a:defRPr b="0" i="0" strike="noStrike" sz="1200" u="none">
-                    <a:solidFill>
-                      <a:srgbClr val="000000"/>
-                    </a:solidFill>
-                    <a:latin typeface="Arial"/>
-                  </a:defRPr>
-                </a:pPr>
-              </a:p>
-            </c:txPr>
-            <c:showLegendKey val="0"/>
-            <c:showVal val="0"/>
-            <c:showCatName val="0"/>
-            <c:showSerName val="0"/>
-            <c:showPercent val="0"/>
-            <c:showBubbleSize val="0"/>
-            <c:showLeaderLines val="0"/>
-          </c:dLbls>
           <c:marker>
             <c:symbol val="circle"/>
             <c:size val="6"/>
@@ -2154,35 +1974,33 @@
             </c:spPr>
           </c:marker>
           <c:cat>
-            <c:multiLvlStrRef>
+            <c:strRef>
               <c:f>Sheet1!$A$2:$A$8</c:f>
-              <c:multiLvlStrCache>
+              <c:strCache>
                 <c:ptCount val="7"/>
-                <c:lvl>
-                  <c:pt idx="0">
-                    <c:v>Mes 0</c:v>
-                  </c:pt>
-                  <c:pt idx="1">
-                    <c:v>Mes 1</c:v>
-                  </c:pt>
-                  <c:pt idx="2">
-                    <c:v>Mes 2</c:v>
-                  </c:pt>
-                  <c:pt idx="3">
-                    <c:v>Mes 3</c:v>
-                  </c:pt>
-                  <c:pt idx="4">
-                    <c:v>Mes 4</c:v>
-                  </c:pt>
-                  <c:pt idx="5">
-                    <c:v>Mes 5</c:v>
-                  </c:pt>
-                  <c:pt idx="6">
-                    <c:v>Mes 6</c:v>
-                  </c:pt>
-                </c:lvl>
-              </c:multiLvlStrCache>
-            </c:multiLvlStrRef>
+                <c:pt idx="0">
+                  <c:v>Mes 0</c:v>
+                </c:pt>
+                <c:pt idx="1">
+                  <c:v>Mes 1</c:v>
+                </c:pt>
+                <c:pt idx="2">
+                  <c:v>Mes 2</c:v>
+                </c:pt>
+                <c:pt idx="3">
+                  <c:v>Mes 3</c:v>
+                </c:pt>
+                <c:pt idx="4">
+                  <c:v>Mes 4</c:v>
+                </c:pt>
+                <c:pt idx="5">
+                  <c:v>Mes 5</c:v>
+                </c:pt>
+                <c:pt idx="6">
+                  <c:v>Mes 6</c:v>
+                </c:pt>
+              </c:strCache>
+            </c:strRef>
           </c:cat>
           <c:val>
             <c:numRef>
@@ -2215,6 +2033,11 @@
             </c:numRef>
           </c:val>
           <c:smooth val="1"/>
+          <c:extLst>
+            <c:ext xmlns:c16="http://schemas.microsoft.com/office/drawing/2014/chart" uri="{C3380CC4-5D6E-409C-BE32-E72D297353CC}">
+              <c16:uniqueId val="{00000001-7D8F-B943-A8C5-D4B16C155B81}"/>
+            </c:ext>
+          </c:extLst>
         </c:ser>
         <c:ser>
           <c:idx val="2"/>
@@ -2231,9 +2054,6 @@
             </c:strRef>
           </c:tx>
           <c:spPr>
-            <a:solidFill>
-              <a:srgbClr val="B8860B"/>
-            </a:solidFill>
             <a:ln w="31750" cap="flat">
               <a:solidFill>
                 <a:srgbClr val="B8860B"/>
@@ -2243,31 +2063,6 @@
             </a:ln>
             <a:effectLst/>
           </c:spPr>
-          <c:invertIfNegative val="0"/>
-          <c:dLbls>
-            <c:numFmt formatCode="#,##0" sourceLinked="0"/>
-            <c:txPr>
-              <a:bodyPr/>
-              <a:lstStyle/>
-              <a:p>
-                <a:pPr>
-                  <a:defRPr b="0" i="0" strike="noStrike" sz="1200" u="none">
-                    <a:solidFill>
-                      <a:srgbClr val="000000"/>
-                    </a:solidFill>
-                    <a:latin typeface="Arial"/>
-                  </a:defRPr>
-                </a:pPr>
-              </a:p>
-            </c:txPr>
-            <c:showLegendKey val="0"/>
-            <c:showVal val="0"/>
-            <c:showCatName val="0"/>
-            <c:showSerName val="0"/>
-            <c:showPercent val="0"/>
-            <c:showBubbleSize val="0"/>
-            <c:showLeaderLines val="0"/>
-          </c:dLbls>
           <c:marker>
             <c:symbol val="circle"/>
             <c:size val="6"/>
@@ -2286,35 +2081,33 @@
             </c:spPr>
           </c:marker>
           <c:cat>
-            <c:multiLvlStrRef>
+            <c:strRef>
               <c:f>Sheet1!$A$2:$A$8</c:f>
-              <c:multiLvlStrCache>
+              <c:strCache>
                 <c:ptCount val="7"/>
-                <c:lvl>
-                  <c:pt idx="0">
-                    <c:v>Mes 0</c:v>
-                  </c:pt>
-                  <c:pt idx="1">
-                    <c:v>Mes 1</c:v>
-                  </c:pt>
-                  <c:pt idx="2">
-                    <c:v>Mes 2</c:v>
-                  </c:pt>
-                  <c:pt idx="3">
-                    <c:v>Mes 3</c:v>
-                  </c:pt>
-                  <c:pt idx="4">
-                    <c:v>Mes 4</c:v>
-                  </c:pt>
-                  <c:pt idx="5">
-                    <c:v>Mes 5</c:v>
-                  </c:pt>
-                  <c:pt idx="6">
-                    <c:v>Mes 6</c:v>
-                  </c:pt>
-                </c:lvl>
-              </c:multiLvlStrCache>
-            </c:multiLvlStrRef>
+                <c:pt idx="0">
+                  <c:v>Mes 0</c:v>
+                </c:pt>
+                <c:pt idx="1">
+                  <c:v>Mes 1</c:v>
+                </c:pt>
+                <c:pt idx="2">
+                  <c:v>Mes 2</c:v>
+                </c:pt>
+                <c:pt idx="3">
+                  <c:v>Mes 3</c:v>
+                </c:pt>
+                <c:pt idx="4">
+                  <c:v>Mes 4</c:v>
+                </c:pt>
+                <c:pt idx="5">
+                  <c:v>Mes 5</c:v>
+                </c:pt>
+                <c:pt idx="6">
+                  <c:v>Mes 6</c:v>
+                </c:pt>
+              </c:strCache>
+            </c:strRef>
           </c:cat>
           <c:val>
             <c:numRef>
@@ -2347,35 +2140,24 @@
             </c:numRef>
           </c:val>
           <c:smooth val="1"/>
+          <c:extLst>
+            <c:ext xmlns:c16="http://schemas.microsoft.com/office/drawing/2014/chart" uri="{C3380CC4-5D6E-409C-BE32-E72D297353CC}">
+              <c16:uniqueId val="{00000002-7D8F-B943-A8C5-D4B16C155B81}"/>
+            </c:ext>
+          </c:extLst>
         </c:ser>
         <c:dLbls>
-          <c:numFmt formatCode="#,##0" sourceLinked="0"/>
-          <c:txPr>
-            <a:bodyPr/>
-            <a:lstStyle/>
-            <a:p>
-              <a:pPr>
-                <a:defRPr b="0" i="0" strike="noStrike" sz="1200" u="none">
-                  <a:solidFill>
-                    <a:srgbClr val="000000"/>
-                  </a:solidFill>
-                  <a:latin typeface="Arial"/>
-                </a:defRPr>
-              </a:pPr>
-            </a:p>
-          </c:txPr>
           <c:showLegendKey val="0"/>
           <c:showVal val="0"/>
           <c:showCatName val="0"/>
           <c:showSerName val="0"/>
           <c:showPercent val="0"/>
           <c:showBubbleSize val="0"/>
-          <c:showLeaderLines val="0"/>
         </c:dLbls>
         <c:marker val="1"/>
+        <c:smooth val="0"/>
         <c:axId val="2094734554"/>
         <c:axId val="2094734552"/>
-        <c:axId val="2094734556"/>
       </c:lineChart>
       <c:catAx>
         <c:axId val="2094734554"/>
@@ -2409,13 +2191,14 @@
                 <a:latin typeface="Arial"/>
               </a:defRPr>
             </a:pPr>
-            <a:endParaRPr lang="en-US"/>
+            <a:endParaRPr lang="es-MX"/>
           </a:p>
         </c:txPr>
         <c:crossAx val="2094734552"/>
         <c:crosses val="autoZero"/>
         <c:auto val="1"/>
         <c:lblAlgn val="ctr"/>
+        <c:lblOffset val="100"/>
         <c:noMultiLvlLbl val="1"/>
       </c:catAx>
       <c:valAx>
@@ -2461,7 +2244,7 @@
                 <a:latin typeface="Arial"/>
               </a:defRPr>
             </a:pPr>
-            <a:endParaRPr lang="en-US"/>
+            <a:endParaRPr lang="es-MX"/>
           </a:p>
         </c:txPr>
         <c:crossAx val="2094734554"/>
@@ -2490,12 +2273,13 @@
               </a:solidFill>
             </a:defRPr>
           </a:pPr>
-          <a:endParaRPr lang="en-US"/>
+          <a:endParaRPr lang="es-MX"/>
         </a:p>
       </c:txPr>
     </c:legend>
     <c:plotVisOnly val="1"/>
     <c:dispBlanksAs val="span"/>
+    <c:showDLblsOverMax val="1"/>
   </c:chart>
   <c:spPr>
     <a:solidFill>
@@ -2534,234 +2318,10 @@
           <a:chExt cx="0" cy="0"/>
         </a:xfrm>
       </p:grpSpPr>
-      <p:sp>
-        <p:nvSpPr>
-          <p:cNvPr id="2" name="Header Placeholder 1"/>
-          <p:cNvSpPr>
-            <a:spLocks noGrp="1"/>
-          </p:cNvSpPr>
-          <p:nvPr>
-            <p:ph type="hdr" sz="quarter"/>
-          </p:nvPr>
-        </p:nvSpPr>
-        <p:spPr>
-          <a:xfrm>
-            <a:off x="0" y="0"/>
-            <a:ext cx="2971800" cy="458788"/>
-          </a:xfrm>
-          <a:prstGeom prst="rect">
-            <a:avLst/>
-          </a:prstGeom>
-        </p:spPr>
-        <p:txBody>
-          <a:bodyPr vert="horz" lIns="91440" tIns="45720" rIns="91440" bIns="45720" rtlCol="0"/>
-          <a:lstStyle>
-            <a:lvl1pPr algn="l">
-              <a:defRPr sz="1200"/>
-            </a:lvl1pPr>
-          </a:lstStyle>
-          <a:p>
-            <a:endParaRPr lang="en-US"/>
-          </a:p>
-        </p:txBody>
-      </p:sp>
-      <p:sp>
-        <p:nvSpPr>
-          <p:cNvPr id="3" name="Date Placeholder 2"/>
-          <p:cNvSpPr>
-            <a:spLocks noGrp="1"/>
-          </p:cNvSpPr>
-          <p:nvPr>
-            <p:ph type="dt" idx="1"/>
-          </p:nvPr>
-        </p:nvSpPr>
-        <p:spPr>
-          <a:xfrm>
-            <a:off x="3884613" y="0"/>
-            <a:ext cx="2971800" cy="458788"/>
-          </a:xfrm>
-          <a:prstGeom prst="rect">
-            <a:avLst/>
-          </a:prstGeom>
-        </p:spPr>
-        <p:txBody>
-          <a:bodyPr vert="horz" lIns="91440" tIns="45720" rIns="91440" bIns="45720" rtlCol="0"/>
-          <a:lstStyle>
-            <a:lvl1pPr algn="r">
-              <a:defRPr sz="1200"/>
-            </a:lvl1pPr>
-          </a:lstStyle>
-          <a:p>
-            <a:fld id="{5282F153-3F37-0F45-9E97-73ACFA13230C}" type="datetimeFigureOut">
-              <a:rPr lang="en-US"/>
-              <a:t>7/23/19</a:t>
-            </a:fld>
-            <a:endParaRPr lang="en-US"/>
-          </a:p>
-        </p:txBody>
-      </p:sp>
-      <p:sp>
-        <p:nvSpPr>
-          <p:cNvPr id="4" name="Slide Image Placeholder 3"/>
-          <p:cNvSpPr>
-            <a:spLocks noGrp="1" noRot="1" noChangeAspect="1"/>
-          </p:cNvSpPr>
-          <p:nvPr>
-            <p:ph type="sldImg" idx="2"/>
-          </p:nvPr>
-        </p:nvSpPr>
-        <p:spPr>
-          <a:xfrm>
-            <a:off x="685800" y="1143000"/>
-            <a:ext cx="5486400" cy="3086100"/>
-          </a:xfrm>
-          <a:prstGeom prst="rect">
-            <a:avLst/>
-          </a:prstGeom>
-          <a:noFill/>
-          <a:ln w="12700">
-            <a:solidFill>
-              <a:prstClr val="black"/>
-            </a:solidFill>
-          </a:ln>
-        </p:spPr>
-        <p:txBody>
-          <a:bodyPr vert="horz" lIns="91440" tIns="45720" rIns="91440" bIns="45720" rtlCol="0" anchor="ctr"/>
-          <a:lstStyle/>
-          <a:p>
-            <a:endParaRPr lang="en-US"/>
-          </a:p>
-        </p:txBody>
-      </p:sp>
-      <p:sp>
-        <p:nvSpPr>
-          <p:cNvPr id="5" name="Notes Placeholder 4"/>
-          <p:cNvSpPr>
-            <a:spLocks noGrp="1"/>
-          </p:cNvSpPr>
-          <p:nvPr>
-            <p:ph type="body" sz="quarter" idx="3"/>
-          </p:nvPr>
-        </p:nvSpPr>
-        <p:spPr>
-          <a:xfrm>
-            <a:off x="685800" y="4400550"/>
-            <a:ext cx="5486400" cy="3600450"/>
-          </a:xfrm>
-          <a:prstGeom prst="rect">
-            <a:avLst/>
-          </a:prstGeom>
-        </p:spPr>
-        <p:txBody>
-          <a:bodyPr vert="horz" lIns="91440" tIns="45720" rIns="91440" bIns="45720" rtlCol="0"/>
-          <a:lstStyle/>
-          <a:p>
-            <a:pPr lvl="0"/>
-            <a:r>
-              <a:rPr lang="en-US"/>
-              <a:t>Click to edit Master text styles</a:t>
-            </a:r>
-          </a:p>
-          <a:p>
-            <a:pPr lvl="1"/>
-            <a:r>
-              <a:rPr lang="en-US"/>
-              <a:t>Second level</a:t>
-            </a:r>
-          </a:p>
-          <a:p>
-            <a:pPr lvl="2"/>
-            <a:r>
-              <a:rPr lang="en-US"/>
-              <a:t>Third level</a:t>
-            </a:r>
-          </a:p>
-          <a:p>
-            <a:pPr lvl="3"/>
-            <a:r>
-              <a:rPr lang="en-US"/>
-              <a:t>Fourth level</a:t>
-            </a:r>
-          </a:p>
-          <a:p>
-            <a:pPr lvl="4"/>
-            <a:r>
-              <a:rPr lang="en-US"/>
-              <a:t>Fifth level</a:t>
-            </a:r>
-          </a:p>
-        </p:txBody>
-      </p:sp>
-      <p:sp>
-        <p:nvSpPr>
-          <p:cNvPr id="6" name="Footer Placeholder 5"/>
-          <p:cNvSpPr>
-            <a:spLocks noGrp="1"/>
-          </p:cNvSpPr>
-          <p:nvPr>
-            <p:ph type="ftr" sz="quarter" idx="4"/>
-          </p:nvPr>
-        </p:nvSpPr>
-        <p:spPr>
-          <a:xfrm>
-            <a:off x="0" y="8685213"/>
-            <a:ext cx="2971800" cy="458787"/>
-          </a:xfrm>
-          <a:prstGeom prst="rect">
-            <a:avLst/>
-          </a:prstGeom>
-        </p:spPr>
-        <p:txBody>
-          <a:bodyPr vert="horz" lIns="91440" tIns="45720" rIns="91440" bIns="45720" rtlCol="0" anchor="b"/>
-          <a:lstStyle>
-            <a:lvl1pPr algn="l">
-              <a:defRPr sz="1200"/>
-            </a:lvl1pPr>
-          </a:lstStyle>
-          <a:p>
-            <a:endParaRPr lang="en-US"/>
-          </a:p>
-        </p:txBody>
-      </p:sp>
-      <p:sp>
-        <p:nvSpPr>
-          <p:cNvPr id="7" name="Slide Number Placeholder 6"/>
-          <p:cNvSpPr>
-            <a:spLocks noGrp="1"/>
-          </p:cNvSpPr>
-          <p:nvPr>
-            <p:ph type="sldNum" sz="quarter" idx="5"/>
-          </p:nvPr>
-        </p:nvSpPr>
-        <p:spPr>
-          <a:xfrm>
-            <a:off x="3884613" y="8685213"/>
-            <a:ext cx="2971800" cy="458787"/>
-          </a:xfrm>
-          <a:prstGeom prst="rect">
-            <a:avLst/>
-          </a:prstGeom>
-        </p:spPr>
-        <p:txBody>
-          <a:bodyPr vert="horz" lIns="91440" tIns="45720" rIns="91440" bIns="45720" rtlCol="0" anchor="b"/>
-          <a:lstStyle>
-            <a:lvl1pPr algn="r">
-              <a:defRPr sz="1200"/>
-            </a:lvl1pPr>
-          </a:lstStyle>
-          <a:p>
-            <a:fld id="{CE5E9CC1-C706-0F49-92D6-E571CC5EEA8F}" type="slidenum">
-              <a:rPr lang="en-US"/>
-              <a:t>‹#›</a:t>
-            </a:fld>
-            <a:endParaRPr lang="en-US"/>
-          </a:p>
-        </p:txBody>
-      </p:sp>
     </p:spTree>
     <p:extLst>
       <p:ext uri="{BB962C8B-B14F-4D97-AF65-F5344CB8AC3E}">
-        <p14:creationId xmlns:p14="http://schemas.microsoft.com/office/powerpoint/2010/main" val="1024086991"/>
+        <p14:creationId xmlns:p14="http://schemas.microsoft.com/office/powerpoint/2010/main" val="2850912902"/>
       </p:ext>
     </p:extLst>
   </p:cSld>
@@ -2909,7 +2469,6 @@
               <a:rPr lang="en-US" dirty="0"/>
               <a:t>Portada elegante con fondo oscuro. El logo es el unico elemento visual. Tipografia Georgia (serif) para transmitir sofisticacion. Linea dorada como separador. El tono es sobrio y ejecutivo, diferente a las versiones anteriores que eran mas gaming/tech.</a:t>
             </a:r>
-            <a:endParaRPr lang="en-US" dirty="0"/>
           </a:p>
         </p:txBody>
       </p:sp>
@@ -2997,7 +2556,6 @@
               <a:rPr lang="en-US" dirty="0"/>
               <a:t>Dos tarjetas blancas lado a lado con circulos de colores representando equipos. Wine para equipos fuertes, gris para nuevos. Texto elegante debajo explicando el impacto. La visualizacion es simple pero inmediatamente comprensible.</a:t>
             </a:r>
-            <a:endParaRPr lang="en-US" dirty="0"/>
           </a:p>
         </p:txBody>
       </p:sp>
@@ -3085,7 +2643,6 @@
               <a:rPr lang="en-US" dirty="0"/>
               <a:t>Barra de percentiles con tres zonas en colores sobrios (steel, teal, gold). Jugadores de ejemplo posicionados debajo con circulos y lineas conectoras. Reglas en italica al final. Todo en Georgia serif — se ve como un grafico de The Economist.</a:t>
             </a:r>
-            <a:endParaRPr lang="en-US" dirty="0"/>
           </a:p>
         </p:txBody>
       </p:sp>
@@ -3173,7 +2730,6 @@
               <a:rPr lang="en-US" dirty="0"/>
               <a:t>Cierre sobrio y memorable. Logo, linea dorada, frase en Georgia serif. Sin adornos. Solo el mensaje: rendimiento, no opinion. El estilo es completamente diferente a las versiones cyberpunk y tech. Se siente como el cierre de una presentacion de McKinsey o Goldman Sachs.</a:t>
             </a:r>
-            <a:endParaRPr lang="en-US" dirty="0"/>
           </a:p>
         </p:txBody>
       </p:sp>
@@ -3261,7 +2817,6 @@
               <a:rPr lang="en-US" dirty="0"/>
               <a:t>Cuatro modelos presentados como filas horizontales elegantes, no como cards separadas. Cada fila tiene: nombre en color del modelo, ano, ecuacion en monospace, descripcion en serif. Linea dorada a la izquierda de cada fila. Al final, una nota sutil que conecta todo con PSR. El diseno es limpio, tipo informe academico premium.</a:t>
             </a:r>
-            <a:endParaRPr lang="en-US" dirty="0"/>
           </a:p>
         </p:txBody>
       </p:sp>
@@ -3349,7 +2904,6 @@
               <a:rPr lang="en-US" dirty="0"/>
               <a:t>Dos columnas con cards blancas sobre fondo ivory. Izquierda: senales de entrada con acento cobre. Derecha: motor bayesiano con acento wine. Cada ecuacion tiene su label en serif bold y la formula en Consolas gris. Es sobrio, legible, profesional. No hay colores neon ni efectos — solo tipografia, espacio y jerarquia.</a:t>
             </a:r>
-            <a:endParaRPr lang="en-US" dirty="0"/>
           </a:p>
         </p:txBody>
       </p:sp>
@@ -3437,7 +2991,6 @@
               <a:rPr lang="en-US" dirty="0"/>
               <a:t>Seis tarjetas verticales blancas con numeros grandes (01-06) en el color del paso. Cada tarjeta tiene nombre, linea divisoria sutil, y detalle debajo. Conectores minimalistas entre tarjetas. Abajo, la capa de auditoria en texto monoespaciado sutil. Todo sobre fondo ivory calido.</a:t>
             </a:r>
-            <a:endParaRPr lang="en-US" dirty="0"/>
           </a:p>
         </p:txBody>
       </p:sp>
@@ -3525,7 +3078,6 @@
               <a:rPr lang="en-US" dirty="0"/>
               <a:t>Grafico de dona con paleta calida (cobre, teal, dorado). A la derecha, tres tarjetas blancas explicando cada componente con nombre, formula y descripcion. El diseno es limpio tipo revista de negocios premium.</a:t>
             </a:r>
-            <a:endParaRPr lang="en-US" dirty="0"/>
           </a:p>
         </p:txBody>
       </p:sp>
@@ -3613,7 +3165,6 @@
               <a:rPr lang="en-US" dirty="0"/>
               <a:t>Slide oscura para el grafico de evolucion. Tres lineas suaves (teal, cobre, dorado) sobre fondo charcoal. Panel lateral derecho con hitos clave. La tipografia serif le da un toque editorial, como una visualizacion del Financial Times.</a:t>
             </a:r>
-            <a:endParaRPr lang="en-US" dirty="0"/>
           </a:p>
         </p:txBody>
       </p:sp>
@@ -3701,7 +3252,6 @@
               <a:rPr lang="en-US" dirty="0"/>
               <a:t>Comparacion elegante lado a lado. Graficos de barras con paleta wine/steel sobre fondo blanco. Cards de resultado debajo con acento de color a la izquierda. El mensaje visual es claro: el Anchor gana en PSR por consistencia.</a:t>
             </a:r>
-            <a:endParaRPr lang="en-US" dirty="0"/>
           </a:p>
         </p:txBody>
       </p:sp>
@@ -3789,7 +3339,6 @@
               <a:rPr lang="en-US" dirty="0"/>
               <a:t>Tres columnas oscuras sobre fondo charcoal. Numeros grandes de PSR en el color del jugador. Barras de mu y sigma con estetica minimalista. La formula debajo. Es la misma informacion pero con un look editorial oscuro tipo Bloomberg/FT dark mode.</a:t>
             </a:r>
-            <a:endParaRPr lang="en-US" dirty="0"/>
           </a:p>
         </p:txBody>
       </p:sp>
@@ -3877,7 +3426,6 @@
               <a:rPr lang="en-US" dirty="0"/>
               <a:t>Grafico de lineas con paleta calida sobre fondo blanco. Panel lateral con interpretacion punto por punto. El estilo es tipo informe de consultoria — limpio, datos claros, sin ruido visual.</a:t>
             </a:r>
-            <a:endParaRPr lang="en-US" dirty="0"/>
           </a:p>
         </p:txBody>
       </p:sp>
@@ -3939,17 +3487,67 @@
           <a:chExt cx="0" cy="0"/>
         </a:xfrm>
       </p:grpSpPr>
+      <p:pic>
+        <p:nvPicPr>
+          <p:cNvPr id="2" name="Imagen 1">
+            <a:extLst>
+              <a:ext uri="{FF2B5EF4-FFF2-40B4-BE49-F238E27FC236}">
+                <a16:creationId xmlns:a16="http://schemas.microsoft.com/office/drawing/2014/main" id="{EAF92117-260A-524D-C3BA-A1B65715970A}"/>
+              </a:ext>
+            </a:extLst>
+          </p:cNvPr>
+          <p:cNvPicPr>
+            <a:picLocks noChangeAspect="1"/>
+          </p:cNvPicPr>
+          <p:nvPr userDrawn="1"/>
+        </p:nvPicPr>
+        <p:blipFill rotWithShape="1">
+          <a:blip r:embed="rId2"/>
+          <a:srcRect b="30984"/>
+          <a:stretch/>
+        </p:blipFill>
+        <p:spPr>
+          <a:xfrm>
+            <a:off x="7687339" y="4134820"/>
+            <a:ext cx="1714339" cy="905014"/>
+          </a:xfrm>
+          <a:prstGeom prst="rect">
+            <a:avLst/>
+          </a:prstGeom>
+        </p:spPr>
+      </p:pic>
     </p:spTree>
   </p:cSld>
   <p:clrMapOvr>
     <a:masterClrMapping/>
   </p:clrMapOvr>
+  <p:extLst>
+    <p:ext uri="{DCECCB84-F9BA-43D5-87BE-67443E8EF086}">
+      <p15:sldGuideLst xmlns:p15="http://schemas.microsoft.com/office/powerpoint/2012/main">
+        <p15:guide id="1" orient="horz" pos="1620" userDrawn="1">
+          <p15:clr>
+            <a:srgbClr val="FBAE40"/>
+          </p15:clr>
+        </p15:guide>
+        <p15:guide id="2" pos="2880" userDrawn="1">
+          <p15:clr>
+            <a:srgbClr val="FBAE40"/>
+          </p15:clr>
+        </p15:guide>
+      </p15:sldGuideLst>
+    </p:ext>
+  </p:extLst>
 </p:sldLayout>
 </file>
 
 <file path=ppt/slideMasters/slideMaster1.xml><?xml version="1.0" encoding="utf-8"?>
 <p:sldMaster xmlns:a="http://schemas.openxmlformats.org/drawingml/2006/main" xmlns:r="http://schemas.openxmlformats.org/officeDocument/2006/relationships" xmlns:p="http://schemas.openxmlformats.org/presentationml/2006/main">
   <p:cSld>
+    <p:bg>
+      <p:bgRef idx="1001">
+        <a:schemeClr val="bg1"/>
+      </p:bgRef>
+    </p:bg>
     <p:spTree>
       <p:nvGrpSpPr>
         <p:cNvPr id="1" name=""/>
@@ -4232,6 +3830,7 @@
         <a:solidFill>
           <a:srgbClr val="1A1A2E"/>
         </a:solidFill>
+        <a:effectLst/>
       </p:bgPr>
     </p:bg>
     <p:spTree>
@@ -4269,23 +3868,30 @@
           </a:solidFill>
           <a:ln/>
         </p:spPr>
+        <p:txBody>
+          <a:bodyPr/>
+          <a:lstStyle/>
+          <a:p>
+            <a:endParaRPr lang="es-MX"/>
+          </a:p>
+        </p:txBody>
       </p:sp>
       <p:pic>
         <p:nvPicPr>
-          <p:cNvPr id="3" name="Image 0" descr="/Users/drux/Documents/Drux/GAMERapp/phoenix-arena/public/logo-color.png">    </p:cNvPr>
+          <p:cNvPr id="3" name="Image 0" descr="/Users/drux/Documents/Drux/GAMERapp/phoenix-arena/public/logo-color.png"/>
           <p:cNvPicPr>
             <a:picLocks noChangeAspect="1"/>
           </p:cNvPicPr>
           <p:nvPr/>
         </p:nvPicPr>
         <p:blipFill>
-          <a:blip r:embed="rId1"/>
-          <a:srcRect l="0" r="0" t="0" b="0"/>
+          <a:blip r:embed="rId3"/>
+          <a:srcRect/>
           <a:stretch/>
         </p:blipFill>
         <p:spPr>
           <a:xfrm>
-            <a:off x="3429000" y="365760"/>
+            <a:off x="3429000" y="685800"/>
             <a:ext cx="2286000" cy="2286000"/>
           </a:xfrm>
           <a:prstGeom prst="rect">
@@ -4312,6 +3918,13 @@
           </a:solidFill>
           <a:ln/>
         </p:spPr>
+        <p:txBody>
+          <a:bodyPr/>
+          <a:lstStyle/>
+          <a:p>
+            <a:endParaRPr lang="es-MX"/>
+          </a:p>
+        </p:txBody>
       </p:sp>
       <p:sp>
         <p:nvSpPr>
@@ -4334,7 +3947,7 @@
           <a:bodyPr wrap="square" rtlCol="0" anchor="ctr"/>
           <a:lstStyle/>
           <a:p>
-            <a:pPr algn="ctr" indent="0" marL="0">
+            <a:pPr marL="0" indent="0" algn="ctr">
               <a:buNone/>
             </a:pPr>
             <a:r>
@@ -4373,7 +3986,7 @@
           <a:bodyPr wrap="square" rtlCol="0" anchor="ctr"/>
           <a:lstStyle/>
           <a:p>
-            <a:pPr algn="ctr" indent="0" marL="0">
+            <a:pPr marL="0" indent="0" algn="ctr">
               <a:buNone/>
             </a:pPr>
             <a:r>
@@ -4412,11 +4025,11 @@
           <a:bodyPr wrap="square" rtlCol="0" anchor="ctr"/>
           <a:lstStyle/>
           <a:p>
-            <a:pPr algn="ctr" indent="0" marL="0">
-              <a:buNone/>
-            </a:pPr>
-            <a:r>
-              <a:rPr lang="en-US" sz="900" spc="200" kern="0" dirty="0">
+            <a:pPr marL="0" indent="0" algn="ctr">
+              <a:buNone/>
+            </a:pPr>
+            <a:r>
+              <a:rPr lang="en-US" sz="900" kern="0" spc="200" dirty="0">
                 <a:solidFill>
                   <a:srgbClr val="666666"/>
                 </a:solidFill>
@@ -4446,6 +4059,7 @@
         <a:solidFill>
           <a:srgbClr val="F7F3EE"/>
         </a:solidFill>
+        <a:effectLst/>
       </p:bgPr>
     </p:bg>
     <p:spTree>
@@ -4483,7 +4097,7 @@
           <a:bodyPr wrap="square" lIns="0" tIns="0" rIns="0" bIns="0" rtlCol="0" anchor="ctr"/>
           <a:lstStyle/>
           <a:p>
-            <a:pPr indent="0" marL="0">
+            <a:pPr marL="0" indent="0">
               <a:buNone/>
             </a:pPr>
             <a:r>
@@ -4520,6 +4134,13 @@
           </a:solidFill>
           <a:ln/>
         </p:spPr>
+        <p:txBody>
+          <a:bodyPr/>
+          <a:lstStyle/>
+          <a:p>
+            <a:endParaRPr lang="es-MX"/>
+          </a:p>
+        </p:txBody>
       </p:sp>
       <p:sp>
         <p:nvSpPr>
@@ -4542,11 +4163,11 @@
           <a:bodyPr wrap="square" lIns="0" tIns="0" rIns="0" bIns="0" rtlCol="0" anchor="ctr"/>
           <a:lstStyle/>
           <a:p>
-            <a:pPr indent="0" marL="0">
-              <a:buNone/>
-            </a:pPr>
-            <a:r>
-              <a:rPr lang="en-US" sz="800" spc="300" kern="0" dirty="0">
+            <a:pPr marL="0" indent="0">
+              <a:buNone/>
+            </a:pPr>
+            <a:r>
+              <a:rPr lang="en-US" sz="800" kern="0" spc="300" dirty="0">
                 <a:solidFill>
                   <a:srgbClr val="7A7A8A"/>
                 </a:solidFill>
@@ -4579,13 +4200,20 @@
           </a:solidFill>
           <a:ln/>
           <a:effectLst>
-            <a:outerShdw sx="100000" sy="100000" kx="0" ky="0" algn="bl" rotWithShape="0" blurRad="101600" dist="25400" dir="8100000">
+            <a:outerShdw blurRad="101600" dist="25400" dir="8100000" algn="bl" rotWithShape="0">
               <a:srgbClr val="000000">
                 <a:alpha val="6000"/>
               </a:srgbClr>
             </a:outerShdw>
           </a:effectLst>
         </p:spPr>
+        <p:txBody>
+          <a:bodyPr/>
+          <a:lstStyle/>
+          <a:p>
+            <a:endParaRPr lang="es-MX"/>
+          </a:p>
+        </p:txBody>
       </p:sp>
       <p:sp>
         <p:nvSpPr>
@@ -4606,6 +4234,13 @@
           </a:solidFill>
           <a:ln/>
         </p:spPr>
+        <p:txBody>
+          <a:bodyPr/>
+          <a:lstStyle/>
+          <a:p>
+            <a:endParaRPr lang="es-MX"/>
+          </a:p>
+        </p:txBody>
       </p:sp>
       <p:sp>
         <p:nvSpPr>
@@ -4628,7 +4263,7 @@
           <a:bodyPr wrap="square" lIns="0" tIns="0" rIns="0" bIns="0" rtlCol="0" anchor="ctr"/>
           <a:lstStyle/>
           <a:p>
-            <a:pPr indent="0" marL="0">
+            <a:pPr marL="0" indent="0">
               <a:buNone/>
             </a:pPr>
             <a:r>
@@ -4667,7 +4302,7 @@
           <a:bodyPr wrap="square" lIns="0" tIns="0" rIns="0" bIns="0" rtlCol="0" anchor="ctr"/>
           <a:lstStyle/>
           <a:p>
-            <a:pPr indent="0" marL="0">
+            <a:pPr marL="0" indent="0">
               <a:buNone/>
             </a:pPr>
             <a:r>
@@ -4704,6 +4339,13 @@
           </a:solidFill>
           <a:ln/>
         </p:spPr>
+        <p:txBody>
+          <a:bodyPr/>
+          <a:lstStyle/>
+          <a:p>
+            <a:endParaRPr lang="es-MX"/>
+          </a:p>
+        </p:txBody>
       </p:sp>
       <p:sp>
         <p:nvSpPr>
@@ -4724,6 +4366,13 @@
           </a:solidFill>
           <a:ln/>
         </p:spPr>
+        <p:txBody>
+          <a:bodyPr/>
+          <a:lstStyle/>
+          <a:p>
+            <a:endParaRPr lang="es-MX"/>
+          </a:p>
+        </p:txBody>
       </p:sp>
       <p:sp>
         <p:nvSpPr>
@@ -4744,6 +4393,13 @@
           </a:solidFill>
           <a:ln/>
         </p:spPr>
+        <p:txBody>
+          <a:bodyPr/>
+          <a:lstStyle/>
+          <a:p>
+            <a:endParaRPr lang="es-MX"/>
+          </a:p>
+        </p:txBody>
       </p:sp>
       <p:sp>
         <p:nvSpPr>
@@ -4764,6 +4420,13 @@
           </a:solidFill>
           <a:ln/>
         </p:spPr>
+        <p:txBody>
+          <a:bodyPr/>
+          <a:lstStyle/>
+          <a:p>
+            <a:endParaRPr lang="es-MX"/>
+          </a:p>
+        </p:txBody>
       </p:sp>
       <p:sp>
         <p:nvSpPr>
@@ -4784,6 +4447,13 @@
           </a:solidFill>
           <a:ln/>
         </p:spPr>
+        <p:txBody>
+          <a:bodyPr/>
+          <a:lstStyle/>
+          <a:p>
+            <a:endParaRPr lang="es-MX"/>
+          </a:p>
+        </p:txBody>
       </p:sp>
       <p:sp>
         <p:nvSpPr>
@@ -4804,6 +4474,13 @@
           </a:solidFill>
           <a:ln/>
         </p:spPr>
+        <p:txBody>
+          <a:bodyPr/>
+          <a:lstStyle/>
+          <a:p>
+            <a:endParaRPr lang="es-MX"/>
+          </a:p>
+        </p:txBody>
       </p:sp>
       <p:sp>
         <p:nvSpPr>
@@ -4824,6 +4501,13 @@
           </a:solidFill>
           <a:ln/>
         </p:spPr>
+        <p:txBody>
+          <a:bodyPr/>
+          <a:lstStyle/>
+          <a:p>
+            <a:endParaRPr lang="es-MX"/>
+          </a:p>
+        </p:txBody>
       </p:sp>
       <p:sp>
         <p:nvSpPr>
@@ -4844,6 +4528,13 @@
           </a:solidFill>
           <a:ln/>
         </p:spPr>
+        <p:txBody>
+          <a:bodyPr/>
+          <a:lstStyle/>
+          <a:p>
+            <a:endParaRPr lang="es-MX"/>
+          </a:p>
+        </p:txBody>
       </p:sp>
       <p:sp>
         <p:nvSpPr>
@@ -4864,6 +4555,13 @@
           </a:solidFill>
           <a:ln/>
         </p:spPr>
+        <p:txBody>
+          <a:bodyPr/>
+          <a:lstStyle/>
+          <a:p>
+            <a:endParaRPr lang="es-MX"/>
+          </a:p>
+        </p:txBody>
       </p:sp>
       <p:sp>
         <p:nvSpPr>
@@ -4884,6 +4582,13 @@
           </a:solidFill>
           <a:ln/>
         </p:spPr>
+        <p:txBody>
+          <a:bodyPr/>
+          <a:lstStyle/>
+          <a:p>
+            <a:endParaRPr lang="es-MX"/>
+          </a:p>
+        </p:txBody>
       </p:sp>
       <p:sp>
         <p:nvSpPr>
@@ -4904,6 +4609,13 @@
           </a:solidFill>
           <a:ln/>
         </p:spPr>
+        <p:txBody>
+          <a:bodyPr/>
+          <a:lstStyle/>
+          <a:p>
+            <a:endParaRPr lang="es-MX"/>
+          </a:p>
+        </p:txBody>
       </p:sp>
       <p:sp>
         <p:nvSpPr>
@@ -4924,6 +4636,13 @@
           </a:solidFill>
           <a:ln/>
         </p:spPr>
+        <p:txBody>
+          <a:bodyPr/>
+          <a:lstStyle/>
+          <a:p>
+            <a:endParaRPr lang="es-MX"/>
+          </a:p>
+        </p:txBody>
       </p:sp>
       <p:sp>
         <p:nvSpPr>
@@ -4944,6 +4663,13 @@
           </a:solidFill>
           <a:ln/>
         </p:spPr>
+        <p:txBody>
+          <a:bodyPr/>
+          <a:lstStyle/>
+          <a:p>
+            <a:endParaRPr lang="es-MX"/>
+          </a:p>
+        </p:txBody>
       </p:sp>
       <p:sp>
         <p:nvSpPr>
@@ -4964,6 +4690,13 @@
           </a:solidFill>
           <a:ln/>
         </p:spPr>
+        <p:txBody>
+          <a:bodyPr/>
+          <a:lstStyle/>
+          <a:p>
+            <a:endParaRPr lang="es-MX"/>
+          </a:p>
+        </p:txBody>
       </p:sp>
       <p:sp>
         <p:nvSpPr>
@@ -4984,6 +4717,13 @@
           </a:solidFill>
           <a:ln/>
         </p:spPr>
+        <p:txBody>
+          <a:bodyPr/>
+          <a:lstStyle/>
+          <a:p>
+            <a:endParaRPr lang="es-MX"/>
+          </a:p>
+        </p:txBody>
       </p:sp>
       <p:sp>
         <p:nvSpPr>
@@ -5004,6 +4744,13 @@
           </a:solidFill>
           <a:ln/>
         </p:spPr>
+        <p:txBody>
+          <a:bodyPr/>
+          <a:lstStyle/>
+          <a:p>
+            <a:endParaRPr lang="es-MX"/>
+          </a:p>
+        </p:txBody>
       </p:sp>
       <p:sp>
         <p:nvSpPr>
@@ -5026,7 +4773,7 @@
           <a:bodyPr wrap="square" lIns="0" tIns="0" rIns="0" bIns="0" rtlCol="0" anchor="ctr"/>
           <a:lstStyle/>
           <a:p>
-            <a:pPr indent="0" marL="0">
+            <a:pPr marL="0" indent="0">
               <a:buNone/>
             </a:pPr>
             <a:r>
@@ -5065,7 +4812,7 @@
           <a:bodyPr wrap="square" lIns="0" tIns="0" rIns="0" bIns="0" rtlCol="0" anchor="ctr"/>
           <a:lstStyle/>
           <a:p>
-            <a:pPr indent="0" marL="0">
+            <a:pPr marL="0" indent="0">
               <a:buNone/>
             </a:pPr>
             <a:r>
@@ -5102,13 +4849,20 @@
           </a:solidFill>
           <a:ln/>
           <a:effectLst>
-            <a:outerShdw sx="100000" sy="100000" kx="0" ky="0" algn="bl" rotWithShape="0" blurRad="101600" dist="25400" dir="8100000">
+            <a:outerShdw blurRad="101600" dist="25400" dir="8100000" algn="bl" rotWithShape="0">
               <a:srgbClr val="000000">
                 <a:alpha val="6000"/>
               </a:srgbClr>
             </a:outerShdw>
           </a:effectLst>
         </p:spPr>
+        <p:txBody>
+          <a:bodyPr/>
+          <a:lstStyle/>
+          <a:p>
+            <a:endParaRPr lang="es-MX"/>
+          </a:p>
+        </p:txBody>
       </p:sp>
       <p:sp>
         <p:nvSpPr>
@@ -5129,6 +4883,13 @@
           </a:solidFill>
           <a:ln/>
         </p:spPr>
+        <p:txBody>
+          <a:bodyPr/>
+          <a:lstStyle/>
+          <a:p>
+            <a:endParaRPr lang="es-MX"/>
+          </a:p>
+        </p:txBody>
       </p:sp>
       <p:sp>
         <p:nvSpPr>
@@ -5151,7 +4912,7 @@
           <a:bodyPr wrap="square" lIns="0" tIns="0" rIns="0" bIns="0" rtlCol="0" anchor="ctr"/>
           <a:lstStyle/>
           <a:p>
-            <a:pPr indent="0" marL="0">
+            <a:pPr marL="0" indent="0">
               <a:buNone/>
             </a:pPr>
             <a:r>
@@ -5190,7 +4951,7 @@
           <a:bodyPr wrap="square" lIns="0" tIns="0" rIns="0" bIns="0" rtlCol="0" anchor="ctr"/>
           <a:lstStyle/>
           <a:p>
-            <a:pPr indent="0" marL="0">
+            <a:pPr marL="0" indent="0">
               <a:buNone/>
             </a:pPr>
             <a:r>
@@ -5227,6 +4988,13 @@
           </a:solidFill>
           <a:ln/>
         </p:spPr>
+        <p:txBody>
+          <a:bodyPr/>
+          <a:lstStyle/>
+          <a:p>
+            <a:endParaRPr lang="es-MX"/>
+          </a:p>
+        </p:txBody>
       </p:sp>
       <p:sp>
         <p:nvSpPr>
@@ -5247,6 +5015,13 @@
           </a:solidFill>
           <a:ln/>
         </p:spPr>
+        <p:txBody>
+          <a:bodyPr/>
+          <a:lstStyle/>
+          <a:p>
+            <a:endParaRPr lang="es-MX"/>
+          </a:p>
+        </p:txBody>
       </p:sp>
       <p:sp>
         <p:nvSpPr>
@@ -5267,6 +5042,13 @@
           </a:solidFill>
           <a:ln/>
         </p:spPr>
+        <p:txBody>
+          <a:bodyPr/>
+          <a:lstStyle/>
+          <a:p>
+            <a:endParaRPr lang="es-MX"/>
+          </a:p>
+        </p:txBody>
       </p:sp>
       <p:sp>
         <p:nvSpPr>
@@ -5287,6 +5069,13 @@
           </a:solidFill>
           <a:ln/>
         </p:spPr>
+        <p:txBody>
+          <a:bodyPr/>
+          <a:lstStyle/>
+          <a:p>
+            <a:endParaRPr lang="es-MX"/>
+          </a:p>
+        </p:txBody>
       </p:sp>
       <p:sp>
         <p:nvSpPr>
@@ -5307,6 +5096,13 @@
           </a:solidFill>
           <a:ln/>
         </p:spPr>
+        <p:txBody>
+          <a:bodyPr/>
+          <a:lstStyle/>
+          <a:p>
+            <a:endParaRPr lang="es-MX"/>
+          </a:p>
+        </p:txBody>
       </p:sp>
       <p:sp>
         <p:nvSpPr>
@@ -5327,6 +5123,13 @@
           </a:solidFill>
           <a:ln/>
         </p:spPr>
+        <p:txBody>
+          <a:bodyPr/>
+          <a:lstStyle/>
+          <a:p>
+            <a:endParaRPr lang="es-MX"/>
+          </a:p>
+        </p:txBody>
       </p:sp>
       <p:sp>
         <p:nvSpPr>
@@ -5347,6 +5150,13 @@
           </a:solidFill>
           <a:ln/>
         </p:spPr>
+        <p:txBody>
+          <a:bodyPr/>
+          <a:lstStyle/>
+          <a:p>
+            <a:endParaRPr lang="es-MX"/>
+          </a:p>
+        </p:txBody>
       </p:sp>
       <p:sp>
         <p:nvSpPr>
@@ -5367,6 +5177,13 @@
           </a:solidFill>
           <a:ln/>
         </p:spPr>
+        <p:txBody>
+          <a:bodyPr/>
+          <a:lstStyle/>
+          <a:p>
+            <a:endParaRPr lang="es-MX"/>
+          </a:p>
+        </p:txBody>
       </p:sp>
       <p:sp>
         <p:nvSpPr>
@@ -5387,6 +5204,13 @@
           </a:solidFill>
           <a:ln/>
         </p:spPr>
+        <p:txBody>
+          <a:bodyPr/>
+          <a:lstStyle/>
+          <a:p>
+            <a:endParaRPr lang="es-MX"/>
+          </a:p>
+        </p:txBody>
       </p:sp>
       <p:sp>
         <p:nvSpPr>
@@ -5407,6 +5231,13 @@
           </a:solidFill>
           <a:ln/>
         </p:spPr>
+        <p:txBody>
+          <a:bodyPr/>
+          <a:lstStyle/>
+          <a:p>
+            <a:endParaRPr lang="es-MX"/>
+          </a:p>
+        </p:txBody>
       </p:sp>
       <p:sp>
         <p:nvSpPr>
@@ -5429,7 +5260,7 @@
           <a:bodyPr wrap="square" lIns="0" tIns="0" rIns="0" bIns="0" rtlCol="0" anchor="ctr"/>
           <a:lstStyle/>
           <a:p>
-            <a:pPr indent="0" marL="0">
+            <a:pPr marL="0" indent="0">
               <a:buNone/>
             </a:pPr>
             <a:r>
@@ -5468,7 +5299,7 @@
           <a:bodyPr wrap="square" lIns="0" tIns="0" rIns="0" bIns="0" rtlCol="0" anchor="ctr"/>
           <a:lstStyle/>
           <a:p>
-            <a:pPr indent="0" marL="0">
+            <a:pPr marL="0" indent="0">
               <a:buNone/>
             </a:pPr>
             <a:r>
@@ -5483,65 +5314,6 @@
               <a:t>mu sube poco, sigma se reduce minimamente</a:t>
             </a:r>
             <a:endParaRPr lang="en-US" sz="900" dirty="0"/>
-          </a:p>
-        </p:txBody>
-      </p:sp>
-      <p:sp>
-        <p:nvSpPr>
-          <p:cNvPr id="43" name="Shape 41"/>
-          <p:cNvSpPr/>
-          <p:nvPr/>
-        </p:nvSpPr>
-        <p:spPr>
-          <a:xfrm>
-            <a:off x="0" y="4800600"/>
-            <a:ext cx="9144000" cy="342900"/>
-          </a:xfrm>
-          <a:prstGeom prst="rect">
-            <a:avLst/>
-          </a:prstGeom>
-          <a:solidFill>
-            <a:srgbClr val="1A1A2E"/>
-          </a:solidFill>
-          <a:ln/>
-        </p:spPr>
-      </p:sp>
-      <p:sp>
-        <p:nvSpPr>
-          <p:cNvPr id="44" name="Text 42"/>
-          <p:cNvSpPr/>
-          <p:nvPr/>
-        </p:nvSpPr>
-        <p:spPr>
-          <a:xfrm>
-            <a:off x="548640" y="4828032"/>
-            <a:ext cx="8046720" cy="274320"/>
-          </a:xfrm>
-          <a:prstGeom prst="rect">
-            <a:avLst/>
-          </a:prstGeom>
-          <a:noFill/>
-          <a:ln/>
-        </p:spPr>
-        <p:txBody>
-          <a:bodyPr wrap="square" rtlCol="0" anchor="ctr"/>
-          <a:lstStyle/>
-          <a:p>
-            <a:pPr indent="0" marL="0">
-              <a:buNone/>
-            </a:pPr>
-            <a:r>
-              <a:rPr lang="en-US" sz="700" i="1" dirty="0">
-                <a:solidFill>
-                  <a:srgbClr val="AAAAAA"/>
-                </a:solidFill>
-                <a:latin typeface="Georgia" pitchFamily="34" charset="0"/>
-                <a:ea typeface="Georgia" pitchFamily="34" charset="-122"/>
-                <a:cs typeface="Georgia" pitchFamily="34" charset="-120"/>
-              </a:rPr>
-              <a:t>docs/psr-audit/06-ejemplos-evolucion.md (Ejemplo 6)</a:t>
-            </a:r>
-            <a:endParaRPr lang="en-US" sz="700" dirty="0"/>
           </a:p>
         </p:txBody>
       </p:sp>
@@ -5561,6 +5333,7 @@
         <a:solidFill>
           <a:srgbClr val="F7F3EE"/>
         </a:solidFill>
+        <a:effectLst/>
       </p:bgPr>
     </p:bg>
     <p:spTree>
@@ -5598,7 +5371,7 @@
           <a:bodyPr wrap="square" lIns="0" tIns="0" rIns="0" bIns="0" rtlCol="0" anchor="ctr"/>
           <a:lstStyle/>
           <a:p>
-            <a:pPr indent="0" marL="0">
+            <a:pPr marL="0" indent="0">
               <a:buNone/>
             </a:pPr>
             <a:r>
@@ -5635,6 +5408,13 @@
           </a:solidFill>
           <a:ln/>
         </p:spPr>
+        <p:txBody>
+          <a:bodyPr/>
+          <a:lstStyle/>
+          <a:p>
+            <a:endParaRPr lang="es-MX"/>
+          </a:p>
+        </p:txBody>
       </p:sp>
       <p:sp>
         <p:nvSpPr>
@@ -5657,11 +5437,11 @@
           <a:bodyPr wrap="square" lIns="0" tIns="0" rIns="0" bIns="0" rtlCol="0" anchor="ctr"/>
           <a:lstStyle/>
           <a:p>
-            <a:pPr indent="0" marL="0">
-              <a:buNone/>
-            </a:pPr>
-            <a:r>
-              <a:rPr lang="en-US" sz="800" spc="300" kern="0" dirty="0">
+            <a:pPr marL="0" indent="0">
+              <a:buNone/>
+            </a:pPr>
+            <a:r>
+              <a:rPr lang="en-US" sz="800" kern="0" spc="300" dirty="0">
                 <a:solidFill>
                   <a:srgbClr val="7A7A8A"/>
                 </a:solidFill>
@@ -5694,6 +5474,13 @@
           </a:solidFill>
           <a:ln/>
         </p:spPr>
+        <p:txBody>
+          <a:bodyPr/>
+          <a:lstStyle/>
+          <a:p>
+            <a:endParaRPr lang="es-MX"/>
+          </a:p>
+        </p:txBody>
       </p:sp>
       <p:sp>
         <p:nvSpPr>
@@ -5714,6 +5501,13 @@
           </a:solidFill>
           <a:ln/>
         </p:spPr>
+        <p:txBody>
+          <a:bodyPr/>
+          <a:lstStyle/>
+          <a:p>
+            <a:endParaRPr lang="es-MX"/>
+          </a:p>
+        </p:txBody>
       </p:sp>
       <p:sp>
         <p:nvSpPr>
@@ -5734,6 +5528,13 @@
           </a:solidFill>
           <a:ln/>
         </p:spPr>
+        <p:txBody>
+          <a:bodyPr/>
+          <a:lstStyle/>
+          <a:p>
+            <a:endParaRPr lang="es-MX"/>
+          </a:p>
+        </p:txBody>
       </p:sp>
       <p:sp>
         <p:nvSpPr>
@@ -5756,7 +5557,7 @@
           <a:bodyPr wrap="square" rtlCol="0" anchor="ctr"/>
           <a:lstStyle/>
           <a:p>
-            <a:pPr algn="ctr" indent="0" marL="0">
+            <a:pPr marL="0" indent="0" algn="ctr">
               <a:buNone/>
             </a:pPr>
             <a:r>
@@ -5795,7 +5596,7 @@
           <a:bodyPr wrap="square" rtlCol="0" anchor="ctr"/>
           <a:lstStyle/>
           <a:p>
-            <a:pPr algn="ctr" indent="0" marL="0">
+            <a:pPr marL="0" indent="0" algn="ctr">
               <a:buNone/>
             </a:pPr>
             <a:r>
@@ -5834,7 +5635,7 @@
           <a:bodyPr wrap="square" rtlCol="0" anchor="ctr"/>
           <a:lstStyle/>
           <a:p>
-            <a:pPr algn="ctr" indent="0" marL="0">
+            <a:pPr marL="0" indent="0" algn="ctr">
               <a:buNone/>
             </a:pPr>
             <a:r>
@@ -5873,7 +5674,7 @@
           <a:bodyPr wrap="square" lIns="0" tIns="0" rIns="0" bIns="0" rtlCol="0" anchor="ctr"/>
           <a:lstStyle/>
           <a:p>
-            <a:pPr indent="0" marL="0">
+            <a:pPr marL="0" indent="0">
               <a:buNone/>
             </a:pPr>
             <a:r>
@@ -5912,7 +5713,7 @@
           <a:bodyPr wrap="square" lIns="0" tIns="0" rIns="0" bIns="0" rtlCol="0" anchor="ctr"/>
           <a:lstStyle/>
           <a:p>
-            <a:pPr algn="ctr" indent="0" marL="0">
+            <a:pPr marL="0" indent="0" algn="ctr">
               <a:buNone/>
             </a:pPr>
             <a:r>
@@ -5951,7 +5752,7 @@
           <a:bodyPr wrap="square" lIns="0" tIns="0" rIns="0" bIns="0" rtlCol="0" anchor="ctr"/>
           <a:lstStyle/>
           <a:p>
-            <a:pPr algn="ctr" indent="0" marL="0">
+            <a:pPr marL="0" indent="0" algn="ctr">
               <a:buNone/>
             </a:pPr>
             <a:r>
@@ -5990,7 +5791,7 @@
           <a:bodyPr wrap="square" lIns="0" tIns="0" rIns="0" bIns="0" rtlCol="0" anchor="ctr"/>
           <a:lstStyle/>
           <a:p>
-            <a:pPr indent="0" marL="0">
+            <a:pPr marL="0" indent="0">
               <a:buNone/>
             </a:pPr>
             <a:r>
@@ -6027,6 +5828,13 @@
           </a:solidFill>
           <a:ln/>
         </p:spPr>
+        <p:txBody>
+          <a:bodyPr/>
+          <a:lstStyle/>
+          <a:p>
+            <a:endParaRPr lang="es-MX"/>
+          </a:p>
+        </p:txBody>
       </p:sp>
       <p:sp>
         <p:nvSpPr>
@@ -6047,6 +5855,13 @@
           </a:solidFill>
           <a:ln/>
         </p:spPr>
+        <p:txBody>
+          <a:bodyPr/>
+          <a:lstStyle/>
+          <a:p>
+            <a:endParaRPr lang="es-MX"/>
+          </a:p>
+        </p:txBody>
       </p:sp>
       <p:sp>
         <p:nvSpPr>
@@ -6069,7 +5884,7 @@
           <a:bodyPr wrap="square" lIns="0" tIns="0" rIns="0" bIns="0" rtlCol="0" anchor="ctr"/>
           <a:lstStyle/>
           <a:p>
-            <a:pPr algn="ctr" indent="0" marL="0">
+            <a:pPr marL="0" indent="0" algn="ctr">
               <a:buNone/>
             </a:pPr>
             <a:r>
@@ -6108,7 +5923,7 @@
           <a:bodyPr wrap="square" lIns="0" tIns="0" rIns="0" bIns="0" rtlCol="0" anchor="ctr"/>
           <a:lstStyle/>
           <a:p>
-            <a:pPr algn="ctr" indent="0" marL="0">
+            <a:pPr marL="0" indent="0" algn="ctr">
               <a:buNone/>
             </a:pPr>
             <a:r>
@@ -6145,6 +5960,13 @@
           </a:solidFill>
           <a:ln/>
         </p:spPr>
+        <p:txBody>
+          <a:bodyPr/>
+          <a:lstStyle/>
+          <a:p>
+            <a:endParaRPr lang="es-MX"/>
+          </a:p>
+        </p:txBody>
       </p:sp>
       <p:sp>
         <p:nvSpPr>
@@ -6165,6 +5987,13 @@
           </a:solidFill>
           <a:ln/>
         </p:spPr>
+        <p:txBody>
+          <a:bodyPr/>
+          <a:lstStyle/>
+          <a:p>
+            <a:endParaRPr lang="es-MX"/>
+          </a:p>
+        </p:txBody>
       </p:sp>
       <p:sp>
         <p:nvSpPr>
@@ -6187,7 +6016,7 @@
           <a:bodyPr wrap="square" lIns="0" tIns="0" rIns="0" bIns="0" rtlCol="0" anchor="ctr"/>
           <a:lstStyle/>
           <a:p>
-            <a:pPr algn="ctr" indent="0" marL="0">
+            <a:pPr marL="0" indent="0" algn="ctr">
               <a:buNone/>
             </a:pPr>
             <a:r>
@@ -6226,7 +6055,7 @@
           <a:bodyPr wrap="square" lIns="0" tIns="0" rIns="0" bIns="0" rtlCol="0" anchor="ctr"/>
           <a:lstStyle/>
           <a:p>
-            <a:pPr algn="ctr" indent="0" marL="0">
+            <a:pPr marL="0" indent="0" algn="ctr">
               <a:buNone/>
             </a:pPr>
             <a:r>
@@ -6263,6 +6092,13 @@
           </a:solidFill>
           <a:ln/>
         </p:spPr>
+        <p:txBody>
+          <a:bodyPr/>
+          <a:lstStyle/>
+          <a:p>
+            <a:endParaRPr lang="es-MX"/>
+          </a:p>
+        </p:txBody>
       </p:sp>
       <p:sp>
         <p:nvSpPr>
@@ -6283,6 +6119,13 @@
           </a:solidFill>
           <a:ln/>
         </p:spPr>
+        <p:txBody>
+          <a:bodyPr/>
+          <a:lstStyle/>
+          <a:p>
+            <a:endParaRPr lang="es-MX"/>
+          </a:p>
+        </p:txBody>
       </p:sp>
       <p:sp>
         <p:nvSpPr>
@@ -6305,7 +6148,7 @@
           <a:bodyPr wrap="square" lIns="0" tIns="0" rIns="0" bIns="0" rtlCol="0" anchor="ctr"/>
           <a:lstStyle/>
           <a:p>
-            <a:pPr algn="ctr" indent="0" marL="0">
+            <a:pPr marL="0" indent="0" algn="ctr">
               <a:buNone/>
             </a:pPr>
             <a:r>
@@ -6344,7 +6187,7 @@
           <a:bodyPr wrap="square" lIns="0" tIns="0" rIns="0" bIns="0" rtlCol="0" anchor="ctr"/>
           <a:lstStyle/>
           <a:p>
-            <a:pPr algn="ctr" indent="0" marL="0">
+            <a:pPr marL="0" indent="0" algn="ctr">
               <a:buNone/>
             </a:pPr>
             <a:r>
@@ -6381,6 +6224,13 @@
           </a:solidFill>
           <a:ln/>
         </p:spPr>
+        <p:txBody>
+          <a:bodyPr/>
+          <a:lstStyle/>
+          <a:p>
+            <a:endParaRPr lang="es-MX"/>
+          </a:p>
+        </p:txBody>
       </p:sp>
       <p:sp>
         <p:nvSpPr>
@@ -6401,6 +6251,13 @@
           </a:solidFill>
           <a:ln/>
         </p:spPr>
+        <p:txBody>
+          <a:bodyPr/>
+          <a:lstStyle/>
+          <a:p>
+            <a:endParaRPr lang="es-MX"/>
+          </a:p>
+        </p:txBody>
       </p:sp>
       <p:sp>
         <p:nvSpPr>
@@ -6423,7 +6280,7 @@
           <a:bodyPr wrap="square" lIns="0" tIns="0" rIns="0" bIns="0" rtlCol="0" anchor="ctr"/>
           <a:lstStyle/>
           <a:p>
-            <a:pPr algn="ctr" indent="0" marL="0">
+            <a:pPr marL="0" indent="0" algn="ctr">
               <a:buNone/>
             </a:pPr>
             <a:r>
@@ -6462,7 +6319,7 @@
           <a:bodyPr wrap="square" lIns="0" tIns="0" rIns="0" bIns="0" rtlCol="0" anchor="ctr"/>
           <a:lstStyle/>
           <a:p>
-            <a:pPr algn="ctr" indent="0" marL="0">
+            <a:pPr marL="0" indent="0" algn="ctr">
               <a:buNone/>
             </a:pPr>
             <a:r>
@@ -6499,6 +6356,13 @@
           </a:solidFill>
           <a:ln/>
         </p:spPr>
+        <p:txBody>
+          <a:bodyPr/>
+          <a:lstStyle/>
+          <a:p>
+            <a:endParaRPr lang="es-MX"/>
+          </a:p>
+        </p:txBody>
       </p:sp>
       <p:sp>
         <p:nvSpPr>
@@ -6519,6 +6383,13 @@
           </a:solidFill>
           <a:ln/>
         </p:spPr>
+        <p:txBody>
+          <a:bodyPr/>
+          <a:lstStyle/>
+          <a:p>
+            <a:endParaRPr lang="es-MX"/>
+          </a:p>
+        </p:txBody>
       </p:sp>
       <p:sp>
         <p:nvSpPr>
@@ -6541,7 +6412,7 @@
           <a:bodyPr wrap="square" lIns="0" tIns="0" rIns="0" bIns="0" rtlCol="0" anchor="ctr"/>
           <a:lstStyle/>
           <a:p>
-            <a:pPr algn="ctr" indent="0" marL="0">
+            <a:pPr marL="0" indent="0" algn="ctr">
               <a:buNone/>
             </a:pPr>
             <a:r>
@@ -6580,7 +6451,7 @@
           <a:bodyPr wrap="square" lIns="0" tIns="0" rIns="0" bIns="0" rtlCol="0" anchor="ctr"/>
           <a:lstStyle/>
           <a:p>
-            <a:pPr algn="ctr" indent="0" marL="0">
+            <a:pPr marL="0" indent="0" algn="ctr">
               <a:buNone/>
             </a:pPr>
             <a:r>
@@ -6617,6 +6488,13 @@
           </a:solidFill>
           <a:ln/>
         </p:spPr>
+        <p:txBody>
+          <a:bodyPr/>
+          <a:lstStyle/>
+          <a:p>
+            <a:endParaRPr lang="es-MX"/>
+          </a:p>
+        </p:txBody>
       </p:sp>
       <p:sp>
         <p:nvSpPr>
@@ -6639,7 +6517,7 @@
           <a:bodyPr wrap="square" lIns="0" tIns="0" rIns="0" bIns="0" rtlCol="0" anchor="ctr"/>
           <a:lstStyle/>
           <a:p>
-            <a:pPr indent="0" marL="0">
+            <a:pPr marL="0" indent="0">
               <a:buNone/>
             </a:pPr>
             <a:r>
@@ -6654,65 +6532,6 @@
               <a:t>Minimo 4 participaciones para calificar. Torneos Novice excluidos. Percentiles adaptativos.</a:t>
             </a:r>
             <a:endParaRPr lang="en-US" sz="900" dirty="0"/>
-          </a:p>
-        </p:txBody>
-      </p:sp>
-      <p:sp>
-        <p:nvSpPr>
-          <p:cNvPr id="37" name="Shape 35"/>
-          <p:cNvSpPr/>
-          <p:nvPr/>
-        </p:nvSpPr>
-        <p:spPr>
-          <a:xfrm>
-            <a:off x="0" y="4800600"/>
-            <a:ext cx="9144000" cy="342900"/>
-          </a:xfrm>
-          <a:prstGeom prst="rect">
-            <a:avLst/>
-          </a:prstGeom>
-          <a:solidFill>
-            <a:srgbClr val="1A1A2E"/>
-          </a:solidFill>
-          <a:ln/>
-        </p:spPr>
-      </p:sp>
-      <p:sp>
-        <p:nvSpPr>
-          <p:cNvPr id="38" name="Text 36"/>
-          <p:cNvSpPr/>
-          <p:nvPr/>
-        </p:nvSpPr>
-        <p:spPr>
-          <a:xfrm>
-            <a:off x="548640" y="4828032"/>
-            <a:ext cx="8046720" cy="274320"/>
-          </a:xfrm>
-          <a:prstGeom prst="rect">
-            <a:avLst/>
-          </a:prstGeom>
-          <a:noFill/>
-          <a:ln/>
-        </p:spPr>
-        <p:txBody>
-          <a:bodyPr wrap="square" rtlCol="0" anchor="ctr"/>
-          <a:lstStyle/>
-          <a:p>
-            <a:pPr indent="0" marL="0">
-              <a:buNone/>
-            </a:pPr>
-            <a:r>
-              <a:rPr lang="en-US" sz="700" i="1" dirty="0">
-                <a:solidFill>
-                  <a:srgbClr val="AAAAAA"/>
-                </a:solidFill>
-                <a:latin typeface="Georgia" pitchFamily="34" charset="0"/>
-                <a:ea typeface="Georgia" pitchFamily="34" charset="-122"/>
-                <a:cs typeface="Georgia" pitchFamily="34" charset="-120"/>
-              </a:rPr>
-              <a:t>docs/psr-audit/00-resumen-ejecutivo.md</a:t>
-            </a:r>
-            <a:endParaRPr lang="en-US" sz="700" dirty="0"/>
           </a:p>
         </p:txBody>
       </p:sp>
@@ -6732,6 +6551,7 @@
         <a:solidFill>
           <a:srgbClr val="1A1A2E"/>
         </a:solidFill>
+        <a:effectLst/>
       </p:bgPr>
     </p:bg>
     <p:spTree>
@@ -6769,18 +6589,25 @@
           </a:solidFill>
           <a:ln/>
         </p:spPr>
+        <p:txBody>
+          <a:bodyPr/>
+          <a:lstStyle/>
+          <a:p>
+            <a:endParaRPr lang="es-MX"/>
+          </a:p>
+        </p:txBody>
       </p:sp>
       <p:pic>
         <p:nvPicPr>
-          <p:cNvPr id="3" name="Image 0" descr="/Users/drux/Documents/Drux/GAMERapp/phoenix-arena/public/logo-color.png">    </p:cNvPr>
+          <p:cNvPr id="3" name="Image 0" descr="/Users/drux/Documents/Drux/GAMERapp/phoenix-arena/public/logo-color.png"/>
           <p:cNvPicPr>
             <a:picLocks noChangeAspect="1"/>
           </p:cNvPicPr>
           <p:nvPr/>
         </p:nvPicPr>
         <p:blipFill>
-          <a:blip r:embed="rId1"/>
-          <a:srcRect l="0" r="0" t="0" b="0"/>
+          <a:blip r:embed="rId3"/>
+          <a:srcRect/>
           <a:stretch/>
         </p:blipFill>
         <p:spPr>
@@ -6812,6 +6639,13 @@
           </a:solidFill>
           <a:ln/>
         </p:spPr>
+        <p:txBody>
+          <a:bodyPr/>
+          <a:lstStyle/>
+          <a:p>
+            <a:endParaRPr lang="es-MX"/>
+          </a:p>
+        </p:txBody>
       </p:sp>
       <p:sp>
         <p:nvSpPr>
@@ -6834,7 +6668,7 @@
           <a:bodyPr wrap="square" rtlCol="0" anchor="ctr"/>
           <a:lstStyle/>
           <a:p>
-            <a:pPr algn="ctr" indent="0" marL="0">
+            <a:pPr marL="0" indent="0" algn="ctr">
               <a:buNone/>
             </a:pPr>
             <a:r>
@@ -6873,7 +6707,7 @@
           <a:bodyPr wrap="square" rtlCol="0" anchor="ctr"/>
           <a:lstStyle/>
           <a:p>
-            <a:pPr algn="ctr" indent="0" marL="0">
+            <a:pPr marL="0" indent="0" algn="ctr">
               <a:buNone/>
             </a:pPr>
             <a:r>
@@ -6912,11 +6746,11 @@
           <a:bodyPr wrap="square" rtlCol="0" anchor="ctr"/>
           <a:lstStyle/>
           <a:p>
-            <a:pPr algn="ctr" indent="0" marL="0">
-              <a:buNone/>
-            </a:pPr>
-            <a:r>
-              <a:rPr lang="en-US" sz="900" spc="200" kern="0" dirty="0">
+            <a:pPr marL="0" indent="0" algn="ctr">
+              <a:buNone/>
+            </a:pPr>
+            <a:r>
+              <a:rPr lang="en-US" sz="900" kern="0" spc="200" dirty="0">
                 <a:solidFill>
                   <a:srgbClr val="555555"/>
                 </a:solidFill>
@@ -6946,6 +6780,7 @@
         <a:solidFill>
           <a:srgbClr val="F7F3EE"/>
         </a:solidFill>
+        <a:effectLst/>
       </p:bgPr>
     </p:bg>
     <p:spTree>
@@ -6983,7 +6818,7 @@
           <a:bodyPr wrap="square" lIns="0" tIns="0" rIns="0" bIns="0" rtlCol="0" anchor="ctr"/>
           <a:lstStyle/>
           <a:p>
-            <a:pPr indent="0" marL="0">
+            <a:pPr marL="0" indent="0">
               <a:buNone/>
             </a:pPr>
             <a:r>
@@ -7020,6 +6855,13 @@
           </a:solidFill>
           <a:ln/>
         </p:spPr>
+        <p:txBody>
+          <a:bodyPr/>
+          <a:lstStyle/>
+          <a:p>
+            <a:endParaRPr lang="es-MX"/>
+          </a:p>
+        </p:txBody>
       </p:sp>
       <p:sp>
         <p:nvSpPr>
@@ -7029,7 +6871,7 @@
         </p:nvSpPr>
         <p:spPr>
           <a:xfrm>
-            <a:off x="731520" y="1188720"/>
+            <a:off x="731520" y="1107440"/>
             <a:ext cx="3657600" cy="228600"/>
           </a:xfrm>
           <a:prstGeom prst="rect">
@@ -7042,11 +6884,11 @@
           <a:bodyPr wrap="square" lIns="0" tIns="0" rIns="0" bIns="0" rtlCol="0" anchor="ctr"/>
           <a:lstStyle/>
           <a:p>
-            <a:pPr indent="0" marL="0">
-              <a:buNone/>
-            </a:pPr>
-            <a:r>
-              <a:rPr lang="en-US" sz="800" spc="300" kern="0" dirty="0">
+            <a:pPr marL="0" indent="0">
+              <a:buNone/>
+            </a:pPr>
+            <a:r>
+              <a:rPr lang="en-US" sz="800" kern="0" spc="300" dirty="0">
                 <a:solidFill>
                   <a:srgbClr val="7A7A8A"/>
                 </a:solidFill>
@@ -7068,7 +6910,7 @@
         </p:nvSpPr>
         <p:spPr>
           <a:xfrm>
-            <a:off x="731520" y="1554480"/>
+            <a:off x="731520" y="1473200"/>
             <a:ext cx="7680960" cy="685800"/>
           </a:xfrm>
           <a:prstGeom prst="rect">
@@ -7079,13 +6921,20 @@
           </a:solidFill>
           <a:ln/>
           <a:effectLst>
-            <a:outerShdw sx="100000" sy="100000" kx="0" ky="0" algn="bl" rotWithShape="0" blurRad="101600" dist="25400" dir="8100000">
+            <a:outerShdw blurRad="101600" dist="25400" dir="8100000" algn="bl" rotWithShape="0">
               <a:srgbClr val="000000">
                 <a:alpha val="6000"/>
               </a:srgbClr>
             </a:outerShdw>
           </a:effectLst>
         </p:spPr>
+        <p:txBody>
+          <a:bodyPr/>
+          <a:lstStyle/>
+          <a:p>
+            <a:endParaRPr lang="es-MX"/>
+          </a:p>
+        </p:txBody>
       </p:sp>
       <p:sp>
         <p:nvSpPr>
@@ -7095,7 +6944,7 @@
         </p:nvSpPr>
         <p:spPr>
           <a:xfrm>
-            <a:off x="731520" y="1554480"/>
+            <a:off x="731520" y="1473200"/>
             <a:ext cx="32004" cy="685800"/>
           </a:xfrm>
           <a:prstGeom prst="rect">
@@ -7106,6 +6955,13 @@
           </a:solidFill>
           <a:ln/>
         </p:spPr>
+        <p:txBody>
+          <a:bodyPr/>
+          <a:lstStyle/>
+          <a:p>
+            <a:endParaRPr lang="es-MX"/>
+          </a:p>
+        </p:txBody>
       </p:sp>
       <p:sp>
         <p:nvSpPr>
@@ -7115,7 +6971,7 @@
         </p:nvSpPr>
         <p:spPr>
           <a:xfrm>
-            <a:off x="914400" y="1554480"/>
+            <a:off x="914400" y="1473200"/>
             <a:ext cx="1097280" cy="685800"/>
           </a:xfrm>
           <a:prstGeom prst="rect">
@@ -7128,7 +6984,7 @@
           <a:bodyPr wrap="square" lIns="0" tIns="0" rIns="0" bIns="0" rtlCol="0" anchor="ctr"/>
           <a:lstStyle/>
           <a:p>
-            <a:pPr indent="0" marL="0">
+            <a:pPr marL="0" indent="0">
               <a:buNone/>
             </a:pPr>
             <a:r>
@@ -7154,7 +7010,7 @@
         </p:nvSpPr>
         <p:spPr>
           <a:xfrm>
-            <a:off x="2011680" y="1554480"/>
+            <a:off x="2011680" y="1473200"/>
             <a:ext cx="548640" cy="685800"/>
           </a:xfrm>
           <a:prstGeom prst="rect">
@@ -7167,7 +7023,7 @@
           <a:bodyPr wrap="square" lIns="0" tIns="0" rIns="0" bIns="0" rtlCol="0" anchor="ctr"/>
           <a:lstStyle/>
           <a:p>
-            <a:pPr indent="0" marL="0">
+            <a:pPr marL="0" indent="0">
               <a:buNone/>
             </a:pPr>
             <a:r>
@@ -7193,7 +7049,7 @@
         </p:nvSpPr>
         <p:spPr>
           <a:xfrm>
-            <a:off x="2651760" y="1554480"/>
+            <a:off x="2651760" y="1473200"/>
             <a:ext cx="2560320" cy="685800"/>
           </a:xfrm>
           <a:prstGeom prst="rect">
@@ -7206,7 +7062,7 @@
           <a:bodyPr wrap="square" lIns="0" tIns="0" rIns="0" bIns="0" rtlCol="0" anchor="ctr"/>
           <a:lstStyle/>
           <a:p>
-            <a:pPr indent="0" marL="0">
+            <a:pPr marL="0" indent="0">
               <a:buNone/>
             </a:pPr>
             <a:r>
@@ -7232,7 +7088,7 @@
         </p:nvSpPr>
         <p:spPr>
           <a:xfrm>
-            <a:off x="5303520" y="1554480"/>
+            <a:off x="5303520" y="1473200"/>
             <a:ext cx="2926080" cy="685800"/>
           </a:xfrm>
           <a:prstGeom prst="rect">
@@ -7245,7 +7101,7 @@
           <a:bodyPr wrap="square" lIns="0" tIns="0" rIns="0" bIns="0" rtlCol="0" anchor="ctr"/>
           <a:lstStyle/>
           <a:p>
-            <a:pPr indent="0" marL="0">
+            <a:pPr marL="0" indent="0">
               <a:buNone/>
             </a:pPr>
             <a:r>
@@ -7271,7 +7127,7 @@
         </p:nvSpPr>
         <p:spPr>
           <a:xfrm>
-            <a:off x="731520" y="2377440"/>
+            <a:off x="731520" y="2296160"/>
             <a:ext cx="7680960" cy="685800"/>
           </a:xfrm>
           <a:prstGeom prst="rect">
@@ -7282,13 +7138,20 @@
           </a:solidFill>
           <a:ln/>
           <a:effectLst>
-            <a:outerShdw sx="100000" sy="100000" kx="0" ky="0" algn="bl" rotWithShape="0" blurRad="101600" dist="25400" dir="8100000">
+            <a:outerShdw blurRad="101600" dist="25400" dir="8100000" algn="bl" rotWithShape="0">
               <a:srgbClr val="000000">
                 <a:alpha val="6000"/>
               </a:srgbClr>
             </a:outerShdw>
           </a:effectLst>
         </p:spPr>
+        <p:txBody>
+          <a:bodyPr/>
+          <a:lstStyle/>
+          <a:p>
+            <a:endParaRPr lang="es-MX"/>
+          </a:p>
+        </p:txBody>
       </p:sp>
       <p:sp>
         <p:nvSpPr>
@@ -7298,7 +7161,7 @@
         </p:nvSpPr>
         <p:spPr>
           <a:xfrm>
-            <a:off x="731520" y="2377440"/>
+            <a:off x="731520" y="2296160"/>
             <a:ext cx="32004" cy="685800"/>
           </a:xfrm>
           <a:prstGeom prst="rect">
@@ -7309,6 +7172,13 @@
           </a:solidFill>
           <a:ln/>
         </p:spPr>
+        <p:txBody>
+          <a:bodyPr/>
+          <a:lstStyle/>
+          <a:p>
+            <a:endParaRPr lang="es-MX"/>
+          </a:p>
+        </p:txBody>
       </p:sp>
       <p:sp>
         <p:nvSpPr>
@@ -7318,7 +7188,7 @@
         </p:nvSpPr>
         <p:spPr>
           <a:xfrm>
-            <a:off x="914400" y="2377440"/>
+            <a:off x="914400" y="2296160"/>
             <a:ext cx="1097280" cy="685800"/>
           </a:xfrm>
           <a:prstGeom prst="rect">
@@ -7331,7 +7201,7 @@
           <a:bodyPr wrap="square" lIns="0" tIns="0" rIns="0" bIns="0" rtlCol="0" anchor="ctr"/>
           <a:lstStyle/>
           <a:p>
-            <a:pPr indent="0" marL="0">
+            <a:pPr marL="0" indent="0">
               <a:buNone/>
             </a:pPr>
             <a:r>
@@ -7357,7 +7227,7 @@
         </p:nvSpPr>
         <p:spPr>
           <a:xfrm>
-            <a:off x="2011680" y="2377440"/>
+            <a:off x="2011680" y="2296160"/>
             <a:ext cx="548640" cy="685800"/>
           </a:xfrm>
           <a:prstGeom prst="rect">
@@ -7370,7 +7240,7 @@
           <a:bodyPr wrap="square" lIns="0" tIns="0" rIns="0" bIns="0" rtlCol="0" anchor="ctr"/>
           <a:lstStyle/>
           <a:p>
-            <a:pPr indent="0" marL="0">
+            <a:pPr marL="0" indent="0">
               <a:buNone/>
             </a:pPr>
             <a:r>
@@ -7396,7 +7266,7 @@
         </p:nvSpPr>
         <p:spPr>
           <a:xfrm>
-            <a:off x="2651760" y="2377440"/>
+            <a:off x="2651760" y="2296160"/>
             <a:ext cx="2560320" cy="685800"/>
           </a:xfrm>
           <a:prstGeom prst="rect">
@@ -7409,7 +7279,7 @@
           <a:bodyPr wrap="square" lIns="0" tIns="0" rIns="0" bIns="0" rtlCol="0" anchor="ctr"/>
           <a:lstStyle/>
           <a:p>
-            <a:pPr indent="0" marL="0">
+            <a:pPr marL="0" indent="0">
               <a:buNone/>
             </a:pPr>
             <a:r>
@@ -7435,7 +7305,7 @@
         </p:nvSpPr>
         <p:spPr>
           <a:xfrm>
-            <a:off x="5303520" y="2377440"/>
+            <a:off x="5303520" y="2296160"/>
             <a:ext cx="2926080" cy="685800"/>
           </a:xfrm>
           <a:prstGeom prst="rect">
@@ -7448,7 +7318,7 @@
           <a:bodyPr wrap="square" lIns="0" tIns="0" rIns="0" bIns="0" rtlCol="0" anchor="ctr"/>
           <a:lstStyle/>
           <a:p>
-            <a:pPr indent="0" marL="0">
+            <a:pPr marL="0" indent="0">
               <a:buNone/>
             </a:pPr>
             <a:r>
@@ -7474,7 +7344,7 @@
         </p:nvSpPr>
         <p:spPr>
           <a:xfrm>
-            <a:off x="731520" y="3200400"/>
+            <a:off x="731520" y="3119120"/>
             <a:ext cx="7680960" cy="685800"/>
           </a:xfrm>
           <a:prstGeom prst="rect">
@@ -7485,13 +7355,20 @@
           </a:solidFill>
           <a:ln/>
           <a:effectLst>
-            <a:outerShdw sx="100000" sy="100000" kx="0" ky="0" algn="bl" rotWithShape="0" blurRad="101600" dist="25400" dir="8100000">
+            <a:outerShdw blurRad="101600" dist="25400" dir="8100000" algn="bl" rotWithShape="0">
               <a:srgbClr val="000000">
                 <a:alpha val="6000"/>
               </a:srgbClr>
             </a:outerShdw>
           </a:effectLst>
         </p:spPr>
+        <p:txBody>
+          <a:bodyPr/>
+          <a:lstStyle/>
+          <a:p>
+            <a:endParaRPr lang="es-MX"/>
+          </a:p>
+        </p:txBody>
       </p:sp>
       <p:sp>
         <p:nvSpPr>
@@ -7501,7 +7378,7 @@
         </p:nvSpPr>
         <p:spPr>
           <a:xfrm>
-            <a:off x="731520" y="3200400"/>
+            <a:off x="731520" y="3119120"/>
             <a:ext cx="32004" cy="685800"/>
           </a:xfrm>
           <a:prstGeom prst="rect">
@@ -7512,6 +7389,13 @@
           </a:solidFill>
           <a:ln/>
         </p:spPr>
+        <p:txBody>
+          <a:bodyPr/>
+          <a:lstStyle/>
+          <a:p>
+            <a:endParaRPr lang="es-MX"/>
+          </a:p>
+        </p:txBody>
       </p:sp>
       <p:sp>
         <p:nvSpPr>
@@ -7521,7 +7405,7 @@
         </p:nvSpPr>
         <p:spPr>
           <a:xfrm>
-            <a:off x="914400" y="3200400"/>
+            <a:off x="914400" y="3119120"/>
             <a:ext cx="1097280" cy="685800"/>
           </a:xfrm>
           <a:prstGeom prst="rect">
@@ -7534,7 +7418,7 @@
           <a:bodyPr wrap="square" lIns="0" tIns="0" rIns="0" bIns="0" rtlCol="0" anchor="ctr"/>
           <a:lstStyle/>
           <a:p>
-            <a:pPr indent="0" marL="0">
+            <a:pPr marL="0" indent="0">
               <a:buNone/>
             </a:pPr>
             <a:r>
@@ -7560,7 +7444,7 @@
         </p:nvSpPr>
         <p:spPr>
           <a:xfrm>
-            <a:off x="2011680" y="3200400"/>
+            <a:off x="2011680" y="3119120"/>
             <a:ext cx="548640" cy="685800"/>
           </a:xfrm>
           <a:prstGeom prst="rect">
@@ -7573,7 +7457,7 @@
           <a:bodyPr wrap="square" lIns="0" tIns="0" rIns="0" bIns="0" rtlCol="0" anchor="ctr"/>
           <a:lstStyle/>
           <a:p>
-            <a:pPr indent="0" marL="0">
+            <a:pPr marL="0" indent="0">
               <a:buNone/>
             </a:pPr>
             <a:r>
@@ -7599,7 +7483,7 @@
         </p:nvSpPr>
         <p:spPr>
           <a:xfrm>
-            <a:off x="2651760" y="3200400"/>
+            <a:off x="2651760" y="3119120"/>
             <a:ext cx="2560320" cy="685800"/>
           </a:xfrm>
           <a:prstGeom prst="rect">
@@ -7612,7 +7496,7 @@
           <a:bodyPr wrap="square" lIns="0" tIns="0" rIns="0" bIns="0" rtlCol="0" anchor="ctr"/>
           <a:lstStyle/>
           <a:p>
-            <a:pPr indent="0" marL="0">
+            <a:pPr marL="0" indent="0">
               <a:buNone/>
             </a:pPr>
             <a:r>
@@ -7638,7 +7522,7 @@
         </p:nvSpPr>
         <p:spPr>
           <a:xfrm>
-            <a:off x="5303520" y="3200400"/>
+            <a:off x="5303520" y="3119120"/>
             <a:ext cx="2926080" cy="685800"/>
           </a:xfrm>
           <a:prstGeom prst="rect">
@@ -7651,7 +7535,7 @@
           <a:bodyPr wrap="square" lIns="0" tIns="0" rIns="0" bIns="0" rtlCol="0" anchor="ctr"/>
           <a:lstStyle/>
           <a:p>
-            <a:pPr indent="0" marL="0">
+            <a:pPr marL="0" indent="0">
               <a:buNone/>
             </a:pPr>
             <a:r>
@@ -7677,7 +7561,7 @@
         </p:nvSpPr>
         <p:spPr>
           <a:xfrm>
-            <a:off x="731520" y="4023360"/>
+            <a:off x="731520" y="3942080"/>
             <a:ext cx="7680960" cy="685800"/>
           </a:xfrm>
           <a:prstGeom prst="rect">
@@ -7688,13 +7572,20 @@
           </a:solidFill>
           <a:ln/>
           <a:effectLst>
-            <a:outerShdw sx="100000" sy="100000" kx="0" ky="0" algn="bl" rotWithShape="0" blurRad="101600" dist="25400" dir="8100000">
+            <a:outerShdw blurRad="101600" dist="25400" dir="8100000" algn="bl" rotWithShape="0">
               <a:srgbClr val="000000">
                 <a:alpha val="6000"/>
               </a:srgbClr>
             </a:outerShdw>
           </a:effectLst>
         </p:spPr>
+        <p:txBody>
+          <a:bodyPr/>
+          <a:lstStyle/>
+          <a:p>
+            <a:endParaRPr lang="es-MX"/>
+          </a:p>
+        </p:txBody>
       </p:sp>
       <p:sp>
         <p:nvSpPr>
@@ -7704,7 +7595,7 @@
         </p:nvSpPr>
         <p:spPr>
           <a:xfrm>
-            <a:off x="731520" y="4023360"/>
+            <a:off x="731520" y="3942080"/>
             <a:ext cx="32004" cy="685800"/>
           </a:xfrm>
           <a:prstGeom prst="rect">
@@ -7715,6 +7606,13 @@
           </a:solidFill>
           <a:ln/>
         </p:spPr>
+        <p:txBody>
+          <a:bodyPr/>
+          <a:lstStyle/>
+          <a:p>
+            <a:endParaRPr lang="es-MX"/>
+          </a:p>
+        </p:txBody>
       </p:sp>
       <p:sp>
         <p:nvSpPr>
@@ -7724,7 +7622,7 @@
         </p:nvSpPr>
         <p:spPr>
           <a:xfrm>
-            <a:off x="914400" y="4023360"/>
+            <a:off x="914400" y="3942080"/>
             <a:ext cx="1097280" cy="685800"/>
           </a:xfrm>
           <a:prstGeom prst="rect">
@@ -7737,7 +7635,7 @@
           <a:bodyPr wrap="square" lIns="0" tIns="0" rIns="0" bIns="0" rtlCol="0" anchor="ctr"/>
           <a:lstStyle/>
           <a:p>
-            <a:pPr indent="0" marL="0">
+            <a:pPr marL="0" indent="0">
               <a:buNone/>
             </a:pPr>
             <a:r>
@@ -7763,7 +7661,7 @@
         </p:nvSpPr>
         <p:spPr>
           <a:xfrm>
-            <a:off x="2011680" y="4023360"/>
+            <a:off x="2011680" y="3942080"/>
             <a:ext cx="548640" cy="685800"/>
           </a:xfrm>
           <a:prstGeom prst="rect">
@@ -7776,7 +7674,7 @@
           <a:bodyPr wrap="square" lIns="0" tIns="0" rIns="0" bIns="0" rtlCol="0" anchor="ctr"/>
           <a:lstStyle/>
           <a:p>
-            <a:pPr indent="0" marL="0">
+            <a:pPr marL="0" indent="0">
               <a:buNone/>
             </a:pPr>
             <a:r>
@@ -7802,7 +7700,7 @@
         </p:nvSpPr>
         <p:spPr>
           <a:xfrm>
-            <a:off x="2651760" y="4023360"/>
+            <a:off x="2651760" y="3942080"/>
             <a:ext cx="2560320" cy="685800"/>
           </a:xfrm>
           <a:prstGeom prst="rect">
@@ -7815,7 +7713,7 @@
           <a:bodyPr wrap="square" lIns="0" tIns="0" rIns="0" bIns="0" rtlCol="0" anchor="ctr"/>
           <a:lstStyle/>
           <a:p>
-            <a:pPr indent="0" marL="0">
+            <a:pPr marL="0" indent="0">
               <a:buNone/>
             </a:pPr>
             <a:r>
@@ -7841,7 +7739,7 @@
         </p:nvSpPr>
         <p:spPr>
           <a:xfrm>
-            <a:off x="5303520" y="4023360"/>
+            <a:off x="5303520" y="3942080"/>
             <a:ext cx="2926080" cy="685800"/>
           </a:xfrm>
           <a:prstGeom prst="rect">
@@ -7854,7 +7752,7 @@
           <a:bodyPr wrap="square" lIns="0" tIns="0" rIns="0" bIns="0" rtlCol="0" anchor="ctr"/>
           <a:lstStyle/>
           <a:p>
-            <a:pPr indent="0" marL="0">
+            <a:pPr marL="0" indent="0">
               <a:buNone/>
             </a:pPr>
             <a:r>
@@ -7880,7 +7778,7 @@
         </p:nvSpPr>
         <p:spPr>
           <a:xfrm>
-            <a:off x="731520" y="4572000"/>
+            <a:off x="731520" y="4490720"/>
             <a:ext cx="7680960" cy="13716"/>
           </a:xfrm>
           <a:prstGeom prst="rect">
@@ -7891,6 +7789,13 @@
           </a:solidFill>
           <a:ln/>
         </p:spPr>
+        <p:txBody>
+          <a:bodyPr/>
+          <a:lstStyle/>
+          <a:p>
+            <a:endParaRPr lang="es-MX"/>
+          </a:p>
+        </p:txBody>
       </p:sp>
       <p:sp>
         <p:nvSpPr>
@@ -7900,7 +7805,7 @@
         </p:nvSpPr>
         <p:spPr>
           <a:xfrm>
-            <a:off x="731520" y="4617720"/>
+            <a:off x="731520" y="4726940"/>
             <a:ext cx="7680960" cy="182880"/>
           </a:xfrm>
           <a:prstGeom prst="rect">
@@ -7913,7 +7818,7 @@
           <a:bodyPr wrap="square" lIns="0" tIns="0" rIns="0" bIns="0" rtlCol="0" anchor="ctr"/>
           <a:lstStyle/>
           <a:p>
-            <a:pPr indent="0" marL="0">
+            <a:pPr marL="0" indent="0">
               <a:buNone/>
             </a:pPr>
             <a:r>
@@ -7933,33 +7838,13 @@
       </p:sp>
       <p:sp>
         <p:nvSpPr>
-          <p:cNvPr id="31" name="Shape 29"/>
-          <p:cNvSpPr/>
-          <p:nvPr/>
-        </p:nvSpPr>
-        <p:spPr>
-          <a:xfrm>
-            <a:off x="0" y="4800600"/>
-            <a:ext cx="9144000" cy="342900"/>
-          </a:xfrm>
-          <a:prstGeom prst="rect">
-            <a:avLst/>
-          </a:prstGeom>
-          <a:solidFill>
-            <a:srgbClr val="1A1A2E"/>
-          </a:solidFill>
-          <a:ln/>
-        </p:spPr>
-      </p:sp>
-      <p:sp>
-        <p:nvSpPr>
           <p:cNvPr id="32" name="Text 30"/>
           <p:cNvSpPr/>
           <p:nvPr/>
         </p:nvSpPr>
         <p:spPr>
           <a:xfrm>
-            <a:off x="548640" y="4828032"/>
+            <a:off x="-40640" y="4927600"/>
             <a:ext cx="8046720" cy="274320"/>
           </a:xfrm>
           <a:prstGeom prst="rect">
@@ -7972,7 +7857,7 @@
           <a:bodyPr wrap="square" rtlCol="0" anchor="ctr"/>
           <a:lstStyle/>
           <a:p>
-            <a:pPr indent="0" marL="0">
+            <a:pPr marL="0" indent="0">
               <a:buNone/>
             </a:pPr>
             <a:r>
@@ -7984,7 +7869,29 @@
                 <a:ea typeface="Georgia" pitchFamily="34" charset="-122"/>
                 <a:cs typeface="Georgia" pitchFamily="34" charset="-120"/>
               </a:rPr>
-              <a:t>Herbrich et al. 2006; Glickman 2000; Weng &amp; Lin 2011; Joshy 2024  —  docs/psr-audit/09-referencias-vancouver.md</a:t>
+              <a:t>Herbrich et al. 2006; Glickman 2000; Weng &amp; Lin 2011; </a:t>
+            </a:r>
+            <a:r>
+              <a:rPr lang="en-US" sz="700" i="1" dirty="0" err="1">
+                <a:solidFill>
+                  <a:srgbClr val="AAAAAA"/>
+                </a:solidFill>
+                <a:latin typeface="Georgia" pitchFamily="34" charset="0"/>
+                <a:ea typeface="Georgia" pitchFamily="34" charset="-122"/>
+                <a:cs typeface="Georgia" pitchFamily="34" charset="-120"/>
+              </a:rPr>
+              <a:t>Joshy</a:t>
+            </a:r>
+            <a:r>
+              <a:rPr lang="en-US" sz="700" i="1" dirty="0">
+                <a:solidFill>
+                  <a:srgbClr val="AAAAAA"/>
+                </a:solidFill>
+                <a:latin typeface="Georgia" pitchFamily="34" charset="0"/>
+                <a:ea typeface="Georgia" pitchFamily="34" charset="-122"/>
+                <a:cs typeface="Georgia" pitchFamily="34" charset="-120"/>
+              </a:rPr>
+              <a:t> 2024</a:t>
             </a:r>
             <a:endParaRPr lang="en-US" sz="700" dirty="0"/>
           </a:p>
@@ -8006,6 +7913,7 @@
         <a:solidFill>
           <a:srgbClr val="F7F3EE"/>
         </a:solidFill>
+        <a:effectLst/>
       </p:bgPr>
     </p:bg>
     <p:spTree>
@@ -8043,7 +7951,7 @@
           <a:bodyPr wrap="square" lIns="0" tIns="0" rIns="0" bIns="0" rtlCol="0" anchor="ctr"/>
           <a:lstStyle/>
           <a:p>
-            <a:pPr indent="0" marL="0">
+            <a:pPr marL="0" indent="0">
               <a:buNone/>
             </a:pPr>
             <a:r>
@@ -8080,6 +7988,13 @@
           </a:solidFill>
           <a:ln/>
         </p:spPr>
+        <p:txBody>
+          <a:bodyPr/>
+          <a:lstStyle/>
+          <a:p>
+            <a:endParaRPr lang="es-MX"/>
+          </a:p>
+        </p:txBody>
       </p:sp>
       <p:sp>
         <p:nvSpPr>
@@ -8102,11 +8017,11 @@
           <a:bodyPr wrap="square" lIns="0" tIns="0" rIns="0" bIns="0" rtlCol="0" anchor="ctr"/>
           <a:lstStyle/>
           <a:p>
-            <a:pPr indent="0" marL="0">
-              <a:buNone/>
-            </a:pPr>
-            <a:r>
-              <a:rPr lang="en-US" sz="800" spc="300" kern="0" dirty="0">
+            <a:pPr marL="0" indent="0">
+              <a:buNone/>
+            </a:pPr>
+            <a:r>
+              <a:rPr lang="en-US" sz="800" kern="0" spc="300" dirty="0">
                 <a:solidFill>
                   <a:srgbClr val="7A7A8A"/>
                 </a:solidFill>
@@ -8139,13 +8054,20 @@
           </a:solidFill>
           <a:ln/>
           <a:effectLst>
-            <a:outerShdw sx="100000" sy="100000" kx="0" ky="0" algn="bl" rotWithShape="0" blurRad="101600" dist="25400" dir="8100000">
+            <a:outerShdw blurRad="101600" dist="25400" dir="8100000" algn="bl" rotWithShape="0">
               <a:srgbClr val="000000">
                 <a:alpha val="6000"/>
               </a:srgbClr>
             </a:outerShdw>
           </a:effectLst>
         </p:spPr>
+        <p:txBody>
+          <a:bodyPr/>
+          <a:lstStyle/>
+          <a:p>
+            <a:endParaRPr lang="es-MX"/>
+          </a:p>
+        </p:txBody>
       </p:sp>
       <p:sp>
         <p:nvSpPr>
@@ -8166,6 +8088,13 @@
           </a:solidFill>
           <a:ln/>
         </p:spPr>
+        <p:txBody>
+          <a:bodyPr/>
+          <a:lstStyle/>
+          <a:p>
+            <a:endParaRPr lang="es-MX"/>
+          </a:p>
+        </p:txBody>
       </p:sp>
       <p:sp>
         <p:nvSpPr>
@@ -8188,7 +8117,7 @@
           <a:bodyPr wrap="square" lIns="0" tIns="0" rIns="0" bIns="0" rtlCol="0" anchor="ctr"/>
           <a:lstStyle/>
           <a:p>
-            <a:pPr indent="0" marL="0">
+            <a:pPr marL="0" indent="0">
               <a:buNone/>
             </a:pPr>
             <a:r>
@@ -8227,7 +8156,7 @@
           <a:bodyPr wrap="square" lIns="0" tIns="0" rIns="0" bIns="0" rtlCol="0" anchor="ctr"/>
           <a:lstStyle/>
           <a:p>
-            <a:pPr indent="0" marL="0">
+            <a:pPr marL="0" indent="0">
               <a:buNone/>
             </a:pPr>
             <a:r>
@@ -8266,7 +8195,7 @@
           <a:bodyPr wrap="square" lIns="0" tIns="0" rIns="0" bIns="0" rtlCol="0" anchor="ctr"/>
           <a:lstStyle/>
           <a:p>
-            <a:pPr indent="0" marL="0">
+            <a:pPr marL="0" indent="0">
               <a:buNone/>
             </a:pPr>
             <a:r>
@@ -8305,7 +8234,7 @@
           <a:bodyPr wrap="square" lIns="0" tIns="0" rIns="0" bIns="0" rtlCol="0" anchor="ctr"/>
           <a:lstStyle/>
           <a:p>
-            <a:pPr indent="0" marL="0">
+            <a:pPr marL="0" indent="0">
               <a:buNone/>
             </a:pPr>
             <a:r>
@@ -8344,7 +8273,7 @@
           <a:bodyPr wrap="square" lIns="0" tIns="0" rIns="0" bIns="0" rtlCol="0" anchor="ctr"/>
           <a:lstStyle/>
           <a:p>
-            <a:pPr indent="0" marL="0">
+            <a:pPr marL="0" indent="0">
               <a:buNone/>
             </a:pPr>
             <a:r>
@@ -8383,7 +8312,7 @@
           <a:bodyPr wrap="square" lIns="0" tIns="0" rIns="0" bIns="0" rtlCol="0" anchor="ctr"/>
           <a:lstStyle/>
           <a:p>
-            <a:pPr indent="0" marL="0">
+            <a:pPr marL="0" indent="0">
               <a:buNone/>
             </a:pPr>
             <a:r>
@@ -8422,7 +8351,7 @@
           <a:bodyPr wrap="square" lIns="0" tIns="0" rIns="0" bIns="0" rtlCol="0" anchor="ctr"/>
           <a:lstStyle/>
           <a:p>
-            <a:pPr indent="0" marL="0">
+            <a:pPr marL="0" indent="0">
               <a:buNone/>
             </a:pPr>
             <a:r>
@@ -8461,7 +8390,7 @@
           <a:bodyPr wrap="square" lIns="0" tIns="0" rIns="0" bIns="0" rtlCol="0" anchor="ctr"/>
           <a:lstStyle/>
           <a:p>
-            <a:pPr indent="0" marL="0">
+            <a:pPr marL="0" indent="0">
               <a:buNone/>
             </a:pPr>
             <a:r>
@@ -8500,7 +8429,7 @@
           <a:bodyPr wrap="square" lIns="0" tIns="0" rIns="0" bIns="0" rtlCol="0" anchor="ctr"/>
           <a:lstStyle/>
           <a:p>
-            <a:pPr indent="0" marL="0">
+            <a:pPr marL="0" indent="0">
               <a:buNone/>
             </a:pPr>
             <a:r>
@@ -8539,7 +8468,7 @@
           <a:bodyPr wrap="square" lIns="0" tIns="0" rIns="0" bIns="0" rtlCol="0" anchor="ctr"/>
           <a:lstStyle/>
           <a:p>
-            <a:pPr indent="0" marL="0">
+            <a:pPr marL="0" indent="0">
               <a:buNone/>
             </a:pPr>
             <a:r>
@@ -8578,7 +8507,7 @@
           <a:bodyPr wrap="square" lIns="0" tIns="0" rIns="0" bIns="0" rtlCol="0" anchor="ctr"/>
           <a:lstStyle/>
           <a:p>
-            <a:pPr indent="0" marL="0">
+            <a:pPr marL="0" indent="0">
               <a:buNone/>
             </a:pPr>
             <a:r>
@@ -8615,13 +8544,20 @@
           </a:solidFill>
           <a:ln/>
           <a:effectLst>
-            <a:outerShdw sx="100000" sy="100000" kx="0" ky="0" algn="bl" rotWithShape="0" blurRad="101600" dist="25400" dir="8100000">
+            <a:outerShdw blurRad="101600" dist="25400" dir="8100000" algn="bl" rotWithShape="0">
               <a:srgbClr val="000000">
                 <a:alpha val="6000"/>
               </a:srgbClr>
             </a:outerShdw>
           </a:effectLst>
         </p:spPr>
+        <p:txBody>
+          <a:bodyPr/>
+          <a:lstStyle/>
+          <a:p>
+            <a:endParaRPr lang="es-MX"/>
+          </a:p>
+        </p:txBody>
       </p:sp>
       <p:sp>
         <p:nvSpPr>
@@ -8642,6 +8578,13 @@
           </a:solidFill>
           <a:ln/>
         </p:spPr>
+        <p:txBody>
+          <a:bodyPr/>
+          <a:lstStyle/>
+          <a:p>
+            <a:endParaRPr lang="es-MX"/>
+          </a:p>
+        </p:txBody>
       </p:sp>
       <p:sp>
         <p:nvSpPr>
@@ -8664,7 +8607,7 @@
           <a:bodyPr wrap="square" lIns="0" tIns="0" rIns="0" bIns="0" rtlCol="0" anchor="ctr"/>
           <a:lstStyle/>
           <a:p>
-            <a:pPr indent="0" marL="0">
+            <a:pPr marL="0" indent="0">
               <a:buNone/>
             </a:pPr>
             <a:r>
@@ -8703,7 +8646,7 @@
           <a:bodyPr wrap="square" lIns="0" tIns="0" rIns="0" bIns="0" rtlCol="0" anchor="ctr"/>
           <a:lstStyle/>
           <a:p>
-            <a:pPr indent="0" marL="0">
+            <a:pPr marL="0" indent="0">
               <a:buNone/>
             </a:pPr>
             <a:r>
@@ -8742,7 +8685,7 @@
           <a:bodyPr wrap="square" lIns="0" tIns="0" rIns="0" bIns="0" rtlCol="0" anchor="ctr"/>
           <a:lstStyle/>
           <a:p>
-            <a:pPr indent="0" marL="0">
+            <a:pPr marL="0" indent="0">
               <a:buNone/>
             </a:pPr>
             <a:r>
@@ -8781,7 +8724,7 @@
           <a:bodyPr wrap="square" lIns="0" tIns="0" rIns="0" bIns="0" rtlCol="0" anchor="ctr"/>
           <a:lstStyle/>
           <a:p>
-            <a:pPr indent="0" marL="0">
+            <a:pPr marL="0" indent="0">
               <a:buNone/>
             </a:pPr>
             <a:r>
@@ -8820,7 +8763,7 @@
           <a:bodyPr wrap="square" lIns="0" tIns="0" rIns="0" bIns="0" rtlCol="0" anchor="ctr"/>
           <a:lstStyle/>
           <a:p>
-            <a:pPr indent="0" marL="0">
+            <a:pPr marL="0" indent="0">
               <a:buNone/>
             </a:pPr>
             <a:r>
@@ -8859,7 +8802,7 @@
           <a:bodyPr wrap="square" lIns="0" tIns="0" rIns="0" bIns="0" rtlCol="0" anchor="ctr"/>
           <a:lstStyle/>
           <a:p>
-            <a:pPr indent="0" marL="0">
+            <a:pPr marL="0" indent="0">
               <a:buNone/>
             </a:pPr>
             <a:r>
@@ -8898,7 +8841,7 @@
           <a:bodyPr wrap="square" lIns="0" tIns="0" rIns="0" bIns="0" rtlCol="0" anchor="ctr"/>
           <a:lstStyle/>
           <a:p>
-            <a:pPr indent="0" marL="0">
+            <a:pPr marL="0" indent="0">
               <a:buNone/>
             </a:pPr>
             <a:r>
@@ -8937,7 +8880,7 @@
           <a:bodyPr wrap="square" lIns="0" tIns="0" rIns="0" bIns="0" rtlCol="0" anchor="ctr"/>
           <a:lstStyle/>
           <a:p>
-            <a:pPr indent="0" marL="0">
+            <a:pPr marL="0" indent="0">
               <a:buNone/>
             </a:pPr>
             <a:r>
@@ -8976,7 +8919,7 @@
           <a:bodyPr wrap="square" lIns="0" tIns="0" rIns="0" bIns="0" rtlCol="0" anchor="ctr"/>
           <a:lstStyle/>
           <a:p>
-            <a:pPr indent="0" marL="0">
+            <a:pPr marL="0" indent="0">
               <a:buNone/>
             </a:pPr>
             <a:r>
@@ -9015,7 +8958,7 @@
           <a:bodyPr wrap="square" lIns="0" tIns="0" rIns="0" bIns="0" rtlCol="0" anchor="ctr"/>
           <a:lstStyle/>
           <a:p>
-            <a:pPr indent="0" marL="0">
+            <a:pPr marL="0" indent="0">
               <a:buNone/>
             </a:pPr>
             <a:r>
@@ -9054,7 +8997,7 @@
           <a:bodyPr wrap="square" lIns="0" tIns="0" rIns="0" bIns="0" rtlCol="0" anchor="ctr"/>
           <a:lstStyle/>
           <a:p>
-            <a:pPr indent="0" marL="0">
+            <a:pPr marL="0" indent="0">
               <a:buNone/>
             </a:pPr>
             <a:r>
@@ -9069,65 +9012,6 @@
               <a:t>PSR = mu - 3 · sigma</a:t>
             </a:r>
             <a:endParaRPr lang="en-US" sz="900" dirty="0"/>
-          </a:p>
-        </p:txBody>
-      </p:sp>
-      <p:sp>
-        <p:nvSpPr>
-          <p:cNvPr id="31" name="Shape 29"/>
-          <p:cNvSpPr/>
-          <p:nvPr/>
-        </p:nvSpPr>
-        <p:spPr>
-          <a:xfrm>
-            <a:off x="0" y="4800600"/>
-            <a:ext cx="9144000" cy="342900"/>
-          </a:xfrm>
-          <a:prstGeom prst="rect">
-            <a:avLst/>
-          </a:prstGeom>
-          <a:solidFill>
-            <a:srgbClr val="1A1A2E"/>
-          </a:solidFill>
-          <a:ln/>
-        </p:spPr>
-      </p:sp>
-      <p:sp>
-        <p:nvSpPr>
-          <p:cNvPr id="32" name="Text 30"/>
-          <p:cNvSpPr/>
-          <p:nvPr/>
-        </p:nvSpPr>
-        <p:spPr>
-          <a:xfrm>
-            <a:off x="548640" y="4828032"/>
-            <a:ext cx="8046720" cy="274320"/>
-          </a:xfrm>
-          <a:prstGeom prst="rect">
-            <a:avLst/>
-          </a:prstGeom>
-          <a:noFill/>
-          <a:ln/>
-        </p:spPr>
-        <p:txBody>
-          <a:bodyPr wrap="square" rtlCol="0" anchor="ctr"/>
-          <a:lstStyle/>
-          <a:p>
-            <a:pPr indent="0" marL="0">
-              <a:buNone/>
-            </a:pPr>
-            <a:r>
-              <a:rPr lang="en-US" sz="700" i="1" dirty="0">
-                <a:solidFill>
-                  <a:srgbClr val="AAAAAA"/>
-                </a:solidFill>
-                <a:latin typeface="Georgia" pitchFamily="34" charset="0"/>
-                <a:ea typeface="Georgia" pitchFamily="34" charset="-122"/>
-                <a:cs typeface="Georgia" pitchFamily="34" charset="-120"/>
-              </a:rPr>
-              <a:t>docs/psr-audit/02-metodologia-matematica.md</a:t>
-            </a:r>
-            <a:endParaRPr lang="en-US" sz="700" dirty="0"/>
           </a:p>
         </p:txBody>
       </p:sp>
@@ -9147,6 +9031,7 @@
         <a:solidFill>
           <a:srgbClr val="F7F3EE"/>
         </a:solidFill>
+        <a:effectLst/>
       </p:bgPr>
     </p:bg>
     <p:spTree>
@@ -9184,7 +9069,7 @@
           <a:bodyPr wrap="square" lIns="0" tIns="0" rIns="0" bIns="0" rtlCol="0" anchor="ctr"/>
           <a:lstStyle/>
           <a:p>
-            <a:pPr indent="0" marL="0">
+            <a:pPr marL="0" indent="0">
               <a:buNone/>
             </a:pPr>
             <a:r>
@@ -9221,6 +9106,13 @@
           </a:solidFill>
           <a:ln/>
         </p:spPr>
+        <p:txBody>
+          <a:bodyPr/>
+          <a:lstStyle/>
+          <a:p>
+            <a:endParaRPr lang="es-MX"/>
+          </a:p>
+        </p:txBody>
       </p:sp>
       <p:sp>
         <p:nvSpPr>
@@ -9243,11 +9135,11 @@
           <a:bodyPr wrap="square" lIns="0" tIns="0" rIns="0" bIns="0" rtlCol="0" anchor="ctr"/>
           <a:lstStyle/>
           <a:p>
-            <a:pPr indent="0" marL="0">
-              <a:buNone/>
-            </a:pPr>
-            <a:r>
-              <a:rPr lang="en-US" sz="800" spc="300" kern="0" dirty="0">
+            <a:pPr marL="0" indent="0">
+              <a:buNone/>
+            </a:pPr>
+            <a:r>
+              <a:rPr lang="en-US" sz="800" kern="0" spc="300" dirty="0">
                 <a:solidFill>
                   <a:srgbClr val="7A7A8A"/>
                 </a:solidFill>
@@ -9280,13 +9172,20 @@
           </a:solidFill>
           <a:ln/>
           <a:effectLst>
-            <a:outerShdw sx="100000" sy="100000" kx="0" ky="0" algn="bl" rotWithShape="0" blurRad="101600" dist="25400" dir="8100000">
+            <a:outerShdw blurRad="101600" dist="25400" dir="8100000" algn="bl" rotWithShape="0">
               <a:srgbClr val="000000">
                 <a:alpha val="6000"/>
               </a:srgbClr>
             </a:outerShdw>
           </a:effectLst>
         </p:spPr>
+        <p:txBody>
+          <a:bodyPr/>
+          <a:lstStyle/>
+          <a:p>
+            <a:endParaRPr lang="es-MX"/>
+          </a:p>
+        </p:txBody>
       </p:sp>
       <p:sp>
         <p:nvSpPr>
@@ -9307,6 +9206,13 @@
           </a:solidFill>
           <a:ln/>
         </p:spPr>
+        <p:txBody>
+          <a:bodyPr/>
+          <a:lstStyle/>
+          <a:p>
+            <a:endParaRPr lang="es-MX"/>
+          </a:p>
+        </p:txBody>
       </p:sp>
       <p:sp>
         <p:nvSpPr>
@@ -9329,7 +9235,7 @@
           <a:bodyPr wrap="square" lIns="0" tIns="0" rIns="0" bIns="0" rtlCol="0" anchor="ctr"/>
           <a:lstStyle/>
           <a:p>
-            <a:pPr algn="ctr" indent="0" marL="0">
+            <a:pPr marL="0" indent="0" algn="ctr">
               <a:buNone/>
             </a:pPr>
             <a:r>
@@ -9368,7 +9274,7 @@
           <a:bodyPr wrap="square" lIns="0" tIns="0" rIns="0" bIns="0" rtlCol="0" anchor="ctr"/>
           <a:lstStyle/>
           <a:p>
-            <a:pPr algn="ctr" indent="0" marL="0">
+            <a:pPr marL="0" indent="0" algn="ctr">
               <a:buNone/>
             </a:pPr>
             <a:r>
@@ -9405,6 +9311,13 @@
           </a:solidFill>
           <a:ln/>
         </p:spPr>
+        <p:txBody>
+          <a:bodyPr/>
+          <a:lstStyle/>
+          <a:p>
+            <a:endParaRPr lang="es-MX"/>
+          </a:p>
+        </p:txBody>
       </p:sp>
       <p:sp>
         <p:nvSpPr>
@@ -9427,7 +9340,7 @@
           <a:bodyPr wrap="square" lIns="0" tIns="0" rIns="0" bIns="0" rtlCol="0" anchor="t"/>
           <a:lstStyle/>
           <a:p>
-            <a:pPr algn="ctr" indent="0" marL="0">
+            <a:pPr marL="0" indent="0" algn="ctr">
               <a:buNone/>
             </a:pPr>
             <a:r>
@@ -9444,7 +9357,7 @@
             <a:endParaRPr lang="en-US" sz="800" dirty="0"/>
           </a:p>
           <a:p>
-            <a:pPr algn="ctr" indent="0" marL="0">
+            <a:pPr marL="0" indent="0" algn="ctr">
               <a:buNone/>
             </a:pPr>
             <a:r>
@@ -9481,6 +9394,13 @@
           </a:solidFill>
           <a:ln/>
         </p:spPr>
+        <p:txBody>
+          <a:bodyPr/>
+          <a:lstStyle/>
+          <a:p>
+            <a:endParaRPr lang="es-MX"/>
+          </a:p>
+        </p:txBody>
       </p:sp>
       <p:sp>
         <p:nvSpPr>
@@ -9501,13 +9421,20 @@
           </a:solidFill>
           <a:ln/>
           <a:effectLst>
-            <a:outerShdw sx="100000" sy="100000" kx="0" ky="0" algn="bl" rotWithShape="0" blurRad="101600" dist="25400" dir="8100000">
+            <a:outerShdw blurRad="101600" dist="25400" dir="8100000" algn="bl" rotWithShape="0">
               <a:srgbClr val="000000">
                 <a:alpha val="6000"/>
               </a:srgbClr>
             </a:outerShdw>
           </a:effectLst>
         </p:spPr>
+        <p:txBody>
+          <a:bodyPr/>
+          <a:lstStyle/>
+          <a:p>
+            <a:endParaRPr lang="es-MX"/>
+          </a:p>
+        </p:txBody>
       </p:sp>
       <p:sp>
         <p:nvSpPr>
@@ -9528,6 +9455,13 @@
           </a:solidFill>
           <a:ln/>
         </p:spPr>
+        <p:txBody>
+          <a:bodyPr/>
+          <a:lstStyle/>
+          <a:p>
+            <a:endParaRPr lang="es-MX"/>
+          </a:p>
+        </p:txBody>
       </p:sp>
       <p:sp>
         <p:nvSpPr>
@@ -9550,7 +9484,7 @@
           <a:bodyPr wrap="square" lIns="0" tIns="0" rIns="0" bIns="0" rtlCol="0" anchor="ctr"/>
           <a:lstStyle/>
           <a:p>
-            <a:pPr algn="ctr" indent="0" marL="0">
+            <a:pPr marL="0" indent="0" algn="ctr">
               <a:buNone/>
             </a:pPr>
             <a:r>
@@ -9589,11 +9523,11 @@
           <a:bodyPr wrap="square" lIns="0" tIns="0" rIns="0" bIns="0" rtlCol="0" anchor="ctr"/>
           <a:lstStyle/>
           <a:p>
-            <a:pPr algn="ctr" indent="0" marL="0">
-              <a:buNone/>
-            </a:pPr>
-            <a:r>
-              <a:rPr lang="en-US" sz="1100" b="1" dirty="0">
+            <a:pPr marL="0" indent="0" algn="ctr">
+              <a:buNone/>
+            </a:pPr>
+            <a:r>
+              <a:rPr lang="en-US" sz="1100" b="1" dirty="0" err="1">
                 <a:solidFill>
                   <a:srgbClr val="2D2D3A"/>
                 </a:solidFill>
@@ -9601,7 +9535,7 @@
                 <a:ea typeface="Georgia" pitchFamily="34" charset="-122"/>
                 <a:cs typeface="Georgia" pitchFamily="34" charset="-120"/>
               </a:rPr>
-              <a:t>Normalizar</a:t>
+              <a:t>Normaliza</a:t>
             </a:r>
             <a:endParaRPr lang="en-US" sz="1100" dirty="0"/>
           </a:p>
@@ -9626,6 +9560,13 @@
           </a:solidFill>
           <a:ln/>
         </p:spPr>
+        <p:txBody>
+          <a:bodyPr/>
+          <a:lstStyle/>
+          <a:p>
+            <a:endParaRPr lang="es-MX"/>
+          </a:p>
+        </p:txBody>
       </p:sp>
       <p:sp>
         <p:nvSpPr>
@@ -9648,7 +9589,7 @@
           <a:bodyPr wrap="square" lIns="0" tIns="0" rIns="0" bIns="0" rtlCol="0" anchor="t"/>
           <a:lstStyle/>
           <a:p>
-            <a:pPr algn="ctr" indent="0" marL="0">
+            <a:pPr marL="0" indent="0" algn="ctr">
               <a:buNone/>
             </a:pPr>
             <a:r>
@@ -9665,7 +9606,7 @@
             <a:endParaRPr lang="en-US" sz="800" dirty="0"/>
           </a:p>
           <a:p>
-            <a:pPr algn="ctr" indent="0" marL="0">
+            <a:pPr marL="0" indent="0" algn="ctr">
               <a:buNone/>
             </a:pPr>
             <a:r>
@@ -9702,6 +9643,13 @@
           </a:solidFill>
           <a:ln/>
         </p:spPr>
+        <p:txBody>
+          <a:bodyPr/>
+          <a:lstStyle/>
+          <a:p>
+            <a:endParaRPr lang="es-MX"/>
+          </a:p>
+        </p:txBody>
       </p:sp>
       <p:sp>
         <p:nvSpPr>
@@ -9722,13 +9670,20 @@
           </a:solidFill>
           <a:ln/>
           <a:effectLst>
-            <a:outerShdw sx="100000" sy="100000" kx="0" ky="0" algn="bl" rotWithShape="0" blurRad="101600" dist="25400" dir="8100000">
+            <a:outerShdw blurRad="101600" dist="25400" dir="8100000" algn="bl" rotWithShape="0">
               <a:srgbClr val="000000">
                 <a:alpha val="6000"/>
               </a:srgbClr>
             </a:outerShdw>
           </a:effectLst>
         </p:spPr>
+        <p:txBody>
+          <a:bodyPr/>
+          <a:lstStyle/>
+          <a:p>
+            <a:endParaRPr lang="es-MX"/>
+          </a:p>
+        </p:txBody>
       </p:sp>
       <p:sp>
         <p:nvSpPr>
@@ -9749,6 +9704,13 @@
           </a:solidFill>
           <a:ln/>
         </p:spPr>
+        <p:txBody>
+          <a:bodyPr/>
+          <a:lstStyle/>
+          <a:p>
+            <a:endParaRPr lang="es-MX"/>
+          </a:p>
+        </p:txBody>
       </p:sp>
       <p:sp>
         <p:nvSpPr>
@@ -9771,7 +9733,7 @@
           <a:bodyPr wrap="square" lIns="0" tIns="0" rIns="0" bIns="0" rtlCol="0" anchor="ctr"/>
           <a:lstStyle/>
           <a:p>
-            <a:pPr algn="ctr" indent="0" marL="0">
+            <a:pPr marL="0" indent="0" algn="ctr">
               <a:buNone/>
             </a:pPr>
             <a:r>
@@ -9810,11 +9772,11 @@
           <a:bodyPr wrap="square" lIns="0" tIns="0" rIns="0" bIns="0" rtlCol="0" anchor="ctr"/>
           <a:lstStyle/>
           <a:p>
-            <a:pPr algn="ctr" indent="0" marL="0">
-              <a:buNone/>
-            </a:pPr>
-            <a:r>
-              <a:rPr lang="en-US" sz="1100" b="1" dirty="0">
+            <a:pPr marL="0" indent="0" algn="ctr">
+              <a:buNone/>
+            </a:pPr>
+            <a:r>
+              <a:rPr lang="en-US" sz="1100" b="1" dirty="0" err="1">
                 <a:solidFill>
                   <a:srgbClr val="2D2D3A"/>
                 </a:solidFill>
@@ -9822,7 +9784,7 @@
                 <a:ea typeface="Georgia" pitchFamily="34" charset="-122"/>
                 <a:cs typeface="Georgia" pitchFamily="34" charset="-120"/>
               </a:rPr>
-              <a:t>Senal</a:t>
+              <a:t>Distribuye</a:t>
             </a:r>
             <a:endParaRPr lang="en-US" sz="1100" dirty="0"/>
           </a:p>
@@ -9847,6 +9809,13 @@
           </a:solidFill>
           <a:ln/>
         </p:spPr>
+        <p:txBody>
+          <a:bodyPr/>
+          <a:lstStyle/>
+          <a:p>
+            <a:endParaRPr lang="es-MX"/>
+          </a:p>
+        </p:txBody>
       </p:sp>
       <p:sp>
         <p:nvSpPr>
@@ -9869,7 +9838,7 @@
           <a:bodyPr wrap="square" lIns="0" tIns="0" rIns="0" bIns="0" rtlCol="0" anchor="t"/>
           <a:lstStyle/>
           <a:p>
-            <a:pPr algn="ctr" indent="0" marL="0">
+            <a:pPr marL="0" indent="0" algn="ctr">
               <a:buNone/>
             </a:pPr>
             <a:r>
@@ -9886,7 +9855,7 @@
             <a:endParaRPr lang="en-US" sz="800" dirty="0"/>
           </a:p>
           <a:p>
-            <a:pPr algn="ctr" indent="0" marL="0">
+            <a:pPr marL="0" indent="0" algn="ctr">
               <a:buNone/>
             </a:pPr>
             <a:r>
@@ -9923,6 +9892,13 @@
           </a:solidFill>
           <a:ln/>
         </p:spPr>
+        <p:txBody>
+          <a:bodyPr/>
+          <a:lstStyle/>
+          <a:p>
+            <a:endParaRPr lang="es-MX"/>
+          </a:p>
+        </p:txBody>
       </p:sp>
       <p:sp>
         <p:nvSpPr>
@@ -9943,13 +9919,20 @@
           </a:solidFill>
           <a:ln/>
           <a:effectLst>
-            <a:outerShdw sx="100000" sy="100000" kx="0" ky="0" algn="bl" rotWithShape="0" blurRad="101600" dist="25400" dir="8100000">
+            <a:outerShdw blurRad="101600" dist="25400" dir="8100000" algn="bl" rotWithShape="0">
               <a:srgbClr val="000000">
                 <a:alpha val="6000"/>
               </a:srgbClr>
             </a:outerShdw>
           </a:effectLst>
         </p:spPr>
+        <p:txBody>
+          <a:bodyPr/>
+          <a:lstStyle/>
+          <a:p>
+            <a:endParaRPr lang="es-MX"/>
+          </a:p>
+        </p:txBody>
       </p:sp>
       <p:sp>
         <p:nvSpPr>
@@ -9970,6 +9953,13 @@
           </a:solidFill>
           <a:ln/>
         </p:spPr>
+        <p:txBody>
+          <a:bodyPr/>
+          <a:lstStyle/>
+          <a:p>
+            <a:endParaRPr lang="es-MX"/>
+          </a:p>
+        </p:txBody>
       </p:sp>
       <p:sp>
         <p:nvSpPr>
@@ -9992,7 +9982,7 @@
           <a:bodyPr wrap="square" lIns="0" tIns="0" rIns="0" bIns="0" rtlCol="0" anchor="ctr"/>
           <a:lstStyle/>
           <a:p>
-            <a:pPr algn="ctr" indent="0" marL="0">
+            <a:pPr marL="0" indent="0" algn="ctr">
               <a:buNone/>
             </a:pPr>
             <a:r>
@@ -10031,11 +10021,11 @@
           <a:bodyPr wrap="square" lIns="0" tIns="0" rIns="0" bIns="0" rtlCol="0" anchor="ctr"/>
           <a:lstStyle/>
           <a:p>
-            <a:pPr algn="ctr" indent="0" marL="0">
-              <a:buNone/>
-            </a:pPr>
-            <a:r>
-              <a:rPr lang="en-US" sz="1100" b="1" dirty="0">
+            <a:pPr marL="0" indent="0" algn="ctr">
+              <a:buNone/>
+            </a:pPr>
+            <a:r>
+              <a:rPr lang="en-US" sz="1100" b="1" dirty="0" err="1">
                 <a:solidFill>
                   <a:srgbClr val="2D2D3A"/>
                 </a:solidFill>
@@ -10043,7 +10033,7 @@
                 <a:ea typeface="Georgia" pitchFamily="34" charset="-122"/>
                 <a:cs typeface="Georgia" pitchFamily="34" charset="-120"/>
               </a:rPr>
-              <a:t>Pairwise</a:t>
+              <a:t>Parea</a:t>
             </a:r>
             <a:endParaRPr lang="en-US" sz="1100" dirty="0"/>
           </a:p>
@@ -10068,6 +10058,13 @@
           </a:solidFill>
           <a:ln/>
         </p:spPr>
+        <p:txBody>
+          <a:bodyPr/>
+          <a:lstStyle/>
+          <a:p>
+            <a:endParaRPr lang="es-MX"/>
+          </a:p>
+        </p:txBody>
       </p:sp>
       <p:sp>
         <p:nvSpPr>
@@ -10090,7 +10087,7 @@
           <a:bodyPr wrap="square" lIns="0" tIns="0" rIns="0" bIns="0" rtlCol="0" anchor="t"/>
           <a:lstStyle/>
           <a:p>
-            <a:pPr algn="ctr" indent="0" marL="0">
+            <a:pPr marL="0" indent="0" algn="ctr">
               <a:buNone/>
             </a:pPr>
             <a:r>
@@ -10107,7 +10104,7 @@
             <a:endParaRPr lang="en-US" sz="800" dirty="0"/>
           </a:p>
           <a:p>
-            <a:pPr algn="ctr" indent="0" marL="0">
+            <a:pPr marL="0" indent="0" algn="ctr">
               <a:buNone/>
             </a:pPr>
             <a:r>
@@ -10144,6 +10141,13 @@
           </a:solidFill>
           <a:ln/>
         </p:spPr>
+        <p:txBody>
+          <a:bodyPr/>
+          <a:lstStyle/>
+          <a:p>
+            <a:endParaRPr lang="es-MX"/>
+          </a:p>
+        </p:txBody>
       </p:sp>
       <p:sp>
         <p:nvSpPr>
@@ -10164,13 +10168,20 @@
           </a:solidFill>
           <a:ln/>
           <a:effectLst>
-            <a:outerShdw sx="100000" sy="100000" kx="0" ky="0" algn="bl" rotWithShape="0" blurRad="101600" dist="25400" dir="8100000">
+            <a:outerShdw blurRad="101600" dist="25400" dir="8100000" algn="bl" rotWithShape="0">
               <a:srgbClr val="000000">
                 <a:alpha val="6000"/>
               </a:srgbClr>
             </a:outerShdw>
           </a:effectLst>
         </p:spPr>
+        <p:txBody>
+          <a:bodyPr/>
+          <a:lstStyle/>
+          <a:p>
+            <a:endParaRPr lang="es-MX"/>
+          </a:p>
+        </p:txBody>
       </p:sp>
       <p:sp>
         <p:nvSpPr>
@@ -10191,6 +10202,13 @@
           </a:solidFill>
           <a:ln/>
         </p:spPr>
+        <p:txBody>
+          <a:bodyPr/>
+          <a:lstStyle/>
+          <a:p>
+            <a:endParaRPr lang="es-MX"/>
+          </a:p>
+        </p:txBody>
       </p:sp>
       <p:sp>
         <p:nvSpPr>
@@ -10213,7 +10231,7 @@
           <a:bodyPr wrap="square" lIns="0" tIns="0" rIns="0" bIns="0" rtlCol="0" anchor="ctr"/>
           <a:lstStyle/>
           <a:p>
-            <a:pPr algn="ctr" indent="0" marL="0">
+            <a:pPr marL="0" indent="0" algn="ctr">
               <a:buNone/>
             </a:pPr>
             <a:r>
@@ -10252,11 +10270,11 @@
           <a:bodyPr wrap="square" lIns="0" tIns="0" rIns="0" bIns="0" rtlCol="0" anchor="ctr"/>
           <a:lstStyle/>
           <a:p>
-            <a:pPr algn="ctr" indent="0" marL="0">
-              <a:buNone/>
-            </a:pPr>
-            <a:r>
-              <a:rPr lang="en-US" sz="1100" b="1" dirty="0">
+            <a:pPr marL="0" indent="0" algn="ctr">
+              <a:buNone/>
+            </a:pPr>
+            <a:r>
+              <a:rPr lang="en-US" sz="1100" b="1" dirty="0" err="1">
                 <a:solidFill>
                   <a:srgbClr val="2D2D3A"/>
                 </a:solidFill>
@@ -10264,7 +10282,7 @@
                 <a:ea typeface="Georgia" pitchFamily="34" charset="-122"/>
                 <a:cs typeface="Georgia" pitchFamily="34" charset="-120"/>
               </a:rPr>
-              <a:t>Bayesian</a:t>
+              <a:t>Bayesiano</a:t>
             </a:r>
             <a:endParaRPr lang="en-US" sz="1100" dirty="0"/>
           </a:p>
@@ -10289,6 +10307,13 @@
           </a:solidFill>
           <a:ln/>
         </p:spPr>
+        <p:txBody>
+          <a:bodyPr/>
+          <a:lstStyle/>
+          <a:p>
+            <a:endParaRPr lang="es-MX"/>
+          </a:p>
+        </p:txBody>
       </p:sp>
       <p:sp>
         <p:nvSpPr>
@@ -10311,7 +10336,7 @@
           <a:bodyPr wrap="square" lIns="0" tIns="0" rIns="0" bIns="0" rtlCol="0" anchor="t"/>
           <a:lstStyle/>
           <a:p>
-            <a:pPr algn="ctr" indent="0" marL="0">
+            <a:pPr marL="0" indent="0" algn="ctr">
               <a:buNone/>
             </a:pPr>
             <a:r>
@@ -10328,7 +10353,7 @@
             <a:endParaRPr lang="en-US" sz="800" dirty="0"/>
           </a:p>
           <a:p>
-            <a:pPr algn="ctr" indent="0" marL="0">
+            <a:pPr marL="0" indent="0" algn="ctr">
               <a:buNone/>
             </a:pPr>
             <a:r>
@@ -10365,6 +10390,13 @@
           </a:solidFill>
           <a:ln/>
         </p:spPr>
+        <p:txBody>
+          <a:bodyPr/>
+          <a:lstStyle/>
+          <a:p>
+            <a:endParaRPr lang="es-MX"/>
+          </a:p>
+        </p:txBody>
       </p:sp>
       <p:sp>
         <p:nvSpPr>
@@ -10385,13 +10417,20 @@
           </a:solidFill>
           <a:ln/>
           <a:effectLst>
-            <a:outerShdw sx="100000" sy="100000" kx="0" ky="0" algn="bl" rotWithShape="0" blurRad="101600" dist="25400" dir="8100000">
+            <a:outerShdw blurRad="101600" dist="25400" dir="8100000" algn="bl" rotWithShape="0">
               <a:srgbClr val="000000">
                 <a:alpha val="6000"/>
               </a:srgbClr>
             </a:outerShdw>
           </a:effectLst>
         </p:spPr>
+        <p:txBody>
+          <a:bodyPr/>
+          <a:lstStyle/>
+          <a:p>
+            <a:endParaRPr lang="es-MX"/>
+          </a:p>
+        </p:txBody>
       </p:sp>
       <p:sp>
         <p:nvSpPr>
@@ -10412,6 +10451,13 @@
           </a:solidFill>
           <a:ln/>
         </p:spPr>
+        <p:txBody>
+          <a:bodyPr/>
+          <a:lstStyle/>
+          <a:p>
+            <a:endParaRPr lang="es-MX"/>
+          </a:p>
+        </p:txBody>
       </p:sp>
       <p:sp>
         <p:nvSpPr>
@@ -10434,7 +10480,7 @@
           <a:bodyPr wrap="square" lIns="0" tIns="0" rIns="0" bIns="0" rtlCol="0" anchor="ctr"/>
           <a:lstStyle/>
           <a:p>
-            <a:pPr algn="ctr" indent="0" marL="0">
+            <a:pPr marL="0" indent="0" algn="ctr">
               <a:buNone/>
             </a:pPr>
             <a:r>
@@ -10473,7 +10519,7 @@
           <a:bodyPr wrap="square" lIns="0" tIns="0" rIns="0" bIns="0" rtlCol="0" anchor="ctr"/>
           <a:lstStyle/>
           <a:p>
-            <a:pPr algn="ctr" indent="0" marL="0">
+            <a:pPr marL="0" indent="0" algn="ctr">
               <a:buNone/>
             </a:pPr>
             <a:r>
@@ -10510,6 +10556,13 @@
           </a:solidFill>
           <a:ln/>
         </p:spPr>
+        <p:txBody>
+          <a:bodyPr/>
+          <a:lstStyle/>
+          <a:p>
+            <a:endParaRPr lang="es-MX"/>
+          </a:p>
+        </p:txBody>
       </p:sp>
       <p:sp>
         <p:nvSpPr>
@@ -10532,7 +10585,7 @@
           <a:bodyPr wrap="square" lIns="0" tIns="0" rIns="0" bIns="0" rtlCol="0" anchor="t"/>
           <a:lstStyle/>
           <a:p>
-            <a:pPr algn="ctr" indent="0" marL="0">
+            <a:pPr marL="0" indent="0" algn="ctr">
               <a:buNone/>
             </a:pPr>
             <a:r>
@@ -10549,7 +10602,7 @@
             <a:endParaRPr lang="en-US" sz="800" dirty="0"/>
           </a:p>
           <a:p>
-            <a:pPr algn="ctr" indent="0" marL="0">
+            <a:pPr marL="0" indent="0" algn="ctr">
               <a:buNone/>
             </a:pPr>
             <a:r>
@@ -10586,6 +10639,13 @@
           </a:solidFill>
           <a:ln/>
         </p:spPr>
+        <p:txBody>
+          <a:bodyPr/>
+          <a:lstStyle/>
+          <a:p>
+            <a:endParaRPr lang="es-MX"/>
+          </a:p>
+        </p:txBody>
       </p:sp>
       <p:sp>
         <p:nvSpPr>
@@ -10608,11 +10668,11 @@
           <a:bodyPr wrap="square" lIns="0" tIns="0" rIns="0" bIns="0" rtlCol="0" anchor="ctr"/>
           <a:lstStyle/>
           <a:p>
-            <a:pPr indent="0" marL="0">
-              <a:buNone/>
-            </a:pPr>
-            <a:r>
-              <a:rPr lang="en-US" sz="800" spc="300" kern="0" dirty="0">
+            <a:pPr marL="0" indent="0">
+              <a:buNone/>
+            </a:pPr>
+            <a:r>
+              <a:rPr lang="en-US" sz="800" kern="0" spc="300" dirty="0">
                 <a:solidFill>
                   <a:srgbClr val="7A7A8A"/>
                 </a:solidFill>
@@ -10647,7 +10707,7 @@
           <a:bodyPr wrap="square" lIns="0" tIns="0" rIns="0" bIns="0" rtlCol="0" anchor="ctr"/>
           <a:lstStyle/>
           <a:p>
-            <a:pPr algn="ctr" indent="0" marL="0">
+            <a:pPr marL="0" indent="0" algn="ctr">
               <a:buNone/>
             </a:pPr>
             <a:r>
@@ -10686,7 +10746,7 @@
           <a:bodyPr wrap="square" lIns="0" tIns="0" rIns="0" bIns="0" rtlCol="0" anchor="ctr"/>
           <a:lstStyle/>
           <a:p>
-            <a:pPr algn="ctr" indent="0" marL="0">
+            <a:pPr marL="0" indent="0" algn="ctr">
               <a:buNone/>
             </a:pPr>
             <a:r>
@@ -10725,7 +10785,7 @@
           <a:bodyPr wrap="square" lIns="0" tIns="0" rIns="0" bIns="0" rtlCol="0" anchor="ctr"/>
           <a:lstStyle/>
           <a:p>
-            <a:pPr algn="ctr" indent="0" marL="0">
+            <a:pPr marL="0" indent="0" algn="ctr">
               <a:buNone/>
             </a:pPr>
             <a:r>
@@ -10764,7 +10824,7 @@
           <a:bodyPr wrap="square" lIns="0" tIns="0" rIns="0" bIns="0" rtlCol="0" anchor="ctr"/>
           <a:lstStyle/>
           <a:p>
-            <a:pPr algn="ctr" indent="0" marL="0">
+            <a:pPr marL="0" indent="0" algn="ctr">
               <a:buNone/>
             </a:pPr>
             <a:r>
@@ -10803,7 +10863,7 @@
           <a:bodyPr wrap="square" lIns="0" tIns="0" rIns="0" bIns="0" rtlCol="0" anchor="ctr"/>
           <a:lstStyle/>
           <a:p>
-            <a:pPr algn="ctr" indent="0" marL="0">
+            <a:pPr marL="0" indent="0" algn="ctr">
               <a:buNone/>
             </a:pPr>
             <a:r>
@@ -10818,65 +10878,6 @@
               <a:t>ModelVersion</a:t>
             </a:r>
             <a:endParaRPr lang="en-US" sz="800" dirty="0"/>
-          </a:p>
-        </p:txBody>
-      </p:sp>
-      <p:sp>
-        <p:nvSpPr>
-          <p:cNvPr id="53" name="Shape 51"/>
-          <p:cNvSpPr/>
-          <p:nvPr/>
-        </p:nvSpPr>
-        <p:spPr>
-          <a:xfrm>
-            <a:off x="0" y="4800600"/>
-            <a:ext cx="9144000" cy="342900"/>
-          </a:xfrm>
-          <a:prstGeom prst="rect">
-            <a:avLst/>
-          </a:prstGeom>
-          <a:solidFill>
-            <a:srgbClr val="1A1A2E"/>
-          </a:solidFill>
-          <a:ln/>
-        </p:spPr>
-      </p:sp>
-      <p:sp>
-        <p:nvSpPr>
-          <p:cNvPr id="54" name="Text 52"/>
-          <p:cNvSpPr/>
-          <p:nvPr/>
-        </p:nvSpPr>
-        <p:spPr>
-          <a:xfrm>
-            <a:off x="548640" y="4828032"/>
-            <a:ext cx="8046720" cy="274320"/>
-          </a:xfrm>
-          <a:prstGeom prst="rect">
-            <a:avLst/>
-          </a:prstGeom>
-          <a:noFill/>
-          <a:ln/>
-        </p:spPr>
-        <p:txBody>
-          <a:bodyPr wrap="square" rtlCol="0" anchor="ctr"/>
-          <a:lstStyle/>
-          <a:p>
-            <a:pPr indent="0" marL="0">
-              <a:buNone/>
-            </a:pPr>
-            <a:r>
-              <a:rPr lang="en-US" sz="700" i="1" dirty="0">
-                <a:solidFill>
-                  <a:srgbClr val="AAAAAA"/>
-                </a:solidFill>
-                <a:latin typeface="Georgia" pitchFamily="34" charset="0"/>
-                <a:ea typeface="Georgia" pitchFamily="34" charset="-122"/>
-                <a:cs typeface="Georgia" pitchFamily="34" charset="-120"/>
-              </a:rPr>
-              <a:t>docs/psr-audit/04-arquitectura-web-app.md</a:t>
-            </a:r>
-            <a:endParaRPr lang="en-US" sz="700" dirty="0"/>
           </a:p>
         </p:txBody>
       </p:sp>
@@ -10896,6 +10897,7 @@
         <a:solidFill>
           <a:srgbClr val="F7F3EE"/>
         </a:solidFill>
+        <a:effectLst/>
       </p:bgPr>
     </p:bg>
     <p:spTree>
@@ -10933,7 +10935,7 @@
           <a:bodyPr wrap="square" lIns="0" tIns="0" rIns="0" bIns="0" rtlCol="0" anchor="ctr"/>
           <a:lstStyle/>
           <a:p>
-            <a:pPr indent="0" marL="0">
+            <a:pPr marL="0" indent="0">
               <a:buNone/>
             </a:pPr>
             <a:r>
@@ -10970,6 +10972,13 @@
           </a:solidFill>
           <a:ln/>
         </p:spPr>
+        <p:txBody>
+          <a:bodyPr/>
+          <a:lstStyle/>
+          <a:p>
+            <a:endParaRPr lang="es-MX"/>
+          </a:p>
+        </p:txBody>
       </p:sp>
       <p:sp>
         <p:nvSpPr>
@@ -10992,11 +11001,11 @@
           <a:bodyPr wrap="square" lIns="0" tIns="0" rIns="0" bIns="0" rtlCol="0" anchor="ctr"/>
           <a:lstStyle/>
           <a:p>
-            <a:pPr indent="0" marL="0">
-              <a:buNone/>
-            </a:pPr>
-            <a:r>
-              <a:rPr lang="en-US" sz="800" spc="300" kern="0" dirty="0">
+            <a:pPr marL="0" indent="0">
+              <a:buNone/>
+            </a:pPr>
+            <a:r>
+              <a:rPr lang="en-US" sz="800" kern="0" spc="300" dirty="0">
                 <a:solidFill>
                   <a:srgbClr val="7A7A8A"/>
                 </a:solidFill>
@@ -11012,7 +11021,7 @@
       </p:sp>
       <p:graphicFrame>
         <p:nvGraphicFramePr>
-          <p:cNvPr id="5" name="Chart 0" descr=""/>
+          <p:cNvPr id="5" name="Chart 0"/>
           <p:cNvGraphicFramePr/>
           <p:nvPr/>
         </p:nvGraphicFramePr>
@@ -11020,9 +11029,9 @@
           <a:off x="457200" y="1371600"/>
           <a:ext cx="3840480" cy="3200400"/>
         </p:xfrm>
-        <a:graphic xmlns:a="http://schemas.openxmlformats.org/drawingml/2006/main">
+        <a:graphic>
           <a:graphicData uri="http://schemas.openxmlformats.org/drawingml/2006/chart">
-            <c:chart xmlns:c="http://schemas.openxmlformats.org/drawingml/2006/chart" r:id="rId1"/>
+            <c:chart xmlns:c="http://schemas.openxmlformats.org/drawingml/2006/chart" xmlns:r="http://schemas.openxmlformats.org/officeDocument/2006/relationships" r:id="rId3"/>
           </a:graphicData>
         </a:graphic>
       </p:graphicFrame>
@@ -11045,13 +11054,20 @@
           </a:solidFill>
           <a:ln/>
           <a:effectLst>
-            <a:outerShdw sx="100000" sy="100000" kx="0" ky="0" algn="bl" rotWithShape="0" blurRad="101600" dist="25400" dir="8100000">
+            <a:outerShdw blurRad="101600" dist="25400" dir="8100000" algn="bl" rotWithShape="0">
               <a:srgbClr val="000000">
                 <a:alpha val="6000"/>
               </a:srgbClr>
             </a:outerShdw>
           </a:effectLst>
         </p:spPr>
+        <p:txBody>
+          <a:bodyPr/>
+          <a:lstStyle/>
+          <a:p>
+            <a:endParaRPr lang="es-MX"/>
+          </a:p>
+        </p:txBody>
       </p:sp>
       <p:sp>
         <p:nvSpPr>
@@ -11072,6 +11088,13 @@
           </a:solidFill>
           <a:ln/>
         </p:spPr>
+        <p:txBody>
+          <a:bodyPr/>
+          <a:lstStyle/>
+          <a:p>
+            <a:endParaRPr lang="es-MX"/>
+          </a:p>
+        </p:txBody>
       </p:sp>
       <p:sp>
         <p:nvSpPr>
@@ -11094,7 +11117,7 @@
           <a:bodyPr wrap="square" lIns="0" tIns="0" rIns="0" bIns="0" rtlCol="0" anchor="ctr"/>
           <a:lstStyle/>
           <a:p>
-            <a:pPr indent="0" marL="0">
+            <a:pPr marL="0" indent="0">
               <a:buNone/>
             </a:pPr>
             <a:r>
@@ -11133,7 +11156,7 @@
           <a:bodyPr wrap="square" lIns="0" tIns="0" rIns="0" bIns="0" rtlCol="0" anchor="ctr"/>
           <a:lstStyle/>
           <a:p>
-            <a:pPr indent="0" marL="0">
+            <a:pPr marL="0" indent="0">
               <a:buNone/>
             </a:pPr>
             <a:r>
@@ -11172,7 +11195,7 @@
           <a:bodyPr wrap="square" lIns="0" tIns="0" rIns="0" bIns="0" rtlCol="0" anchor="ctr"/>
           <a:lstStyle/>
           <a:p>
-            <a:pPr indent="0" marL="0">
+            <a:pPr marL="0" indent="0">
               <a:buNone/>
             </a:pPr>
             <a:r>
@@ -11209,13 +11232,20 @@
           </a:solidFill>
           <a:ln/>
           <a:effectLst>
-            <a:outerShdw sx="100000" sy="100000" kx="0" ky="0" algn="bl" rotWithShape="0" blurRad="101600" dist="25400" dir="8100000">
+            <a:outerShdw blurRad="101600" dist="25400" dir="8100000" algn="bl" rotWithShape="0">
               <a:srgbClr val="000000">
                 <a:alpha val="6000"/>
               </a:srgbClr>
             </a:outerShdw>
           </a:effectLst>
         </p:spPr>
+        <p:txBody>
+          <a:bodyPr/>
+          <a:lstStyle/>
+          <a:p>
+            <a:endParaRPr lang="es-MX"/>
+          </a:p>
+        </p:txBody>
       </p:sp>
       <p:sp>
         <p:nvSpPr>
@@ -11236,6 +11266,13 @@
           </a:solidFill>
           <a:ln/>
         </p:spPr>
+        <p:txBody>
+          <a:bodyPr/>
+          <a:lstStyle/>
+          <a:p>
+            <a:endParaRPr lang="es-MX"/>
+          </a:p>
+        </p:txBody>
       </p:sp>
       <p:sp>
         <p:nvSpPr>
@@ -11258,7 +11295,7 @@
           <a:bodyPr wrap="square" lIns="0" tIns="0" rIns="0" bIns="0" rtlCol="0" anchor="ctr"/>
           <a:lstStyle/>
           <a:p>
-            <a:pPr indent="0" marL="0">
+            <a:pPr marL="0" indent="0">
               <a:buNone/>
             </a:pPr>
             <a:r>
@@ -11297,7 +11334,7 @@
           <a:bodyPr wrap="square" lIns="0" tIns="0" rIns="0" bIns="0" rtlCol="0" anchor="ctr"/>
           <a:lstStyle/>
           <a:p>
-            <a:pPr indent="0" marL="0">
+            <a:pPr marL="0" indent="0">
               <a:buNone/>
             </a:pPr>
             <a:r>
@@ -11336,7 +11373,7 @@
           <a:bodyPr wrap="square" lIns="0" tIns="0" rIns="0" bIns="0" rtlCol="0" anchor="ctr"/>
           <a:lstStyle/>
           <a:p>
-            <a:pPr indent="0" marL="0">
+            <a:pPr marL="0" indent="0">
               <a:buNone/>
             </a:pPr>
             <a:r>
@@ -11373,13 +11410,20 @@
           </a:solidFill>
           <a:ln/>
           <a:effectLst>
-            <a:outerShdw sx="100000" sy="100000" kx="0" ky="0" algn="bl" rotWithShape="0" blurRad="101600" dist="25400" dir="8100000">
+            <a:outerShdw blurRad="101600" dist="25400" dir="8100000" algn="bl" rotWithShape="0">
               <a:srgbClr val="000000">
                 <a:alpha val="6000"/>
               </a:srgbClr>
             </a:outerShdw>
           </a:effectLst>
         </p:spPr>
+        <p:txBody>
+          <a:bodyPr/>
+          <a:lstStyle/>
+          <a:p>
+            <a:endParaRPr lang="es-MX"/>
+          </a:p>
+        </p:txBody>
       </p:sp>
       <p:sp>
         <p:nvSpPr>
@@ -11400,6 +11444,13 @@
           </a:solidFill>
           <a:ln/>
         </p:spPr>
+        <p:txBody>
+          <a:bodyPr/>
+          <a:lstStyle/>
+          <a:p>
+            <a:endParaRPr lang="es-MX"/>
+          </a:p>
+        </p:txBody>
       </p:sp>
       <p:sp>
         <p:nvSpPr>
@@ -11422,7 +11473,7 @@
           <a:bodyPr wrap="square" lIns="0" tIns="0" rIns="0" bIns="0" rtlCol="0" anchor="ctr"/>
           <a:lstStyle/>
           <a:p>
-            <a:pPr indent="0" marL="0">
+            <a:pPr marL="0" indent="0">
               <a:buNone/>
             </a:pPr>
             <a:r>
@@ -11461,7 +11512,7 @@
           <a:bodyPr wrap="square" lIns="0" tIns="0" rIns="0" bIns="0" rtlCol="0" anchor="ctr"/>
           <a:lstStyle/>
           <a:p>
-            <a:pPr indent="0" marL="0">
+            <a:pPr marL="0" indent="0">
               <a:buNone/>
             </a:pPr>
             <a:r>
@@ -11500,7 +11551,7 @@
           <a:bodyPr wrap="square" lIns="0" tIns="0" rIns="0" bIns="0" rtlCol="0" anchor="ctr"/>
           <a:lstStyle/>
           <a:p>
-            <a:pPr indent="0" marL="0">
+            <a:pPr marL="0" indent="0">
               <a:buNone/>
             </a:pPr>
             <a:r>
@@ -11515,65 +11566,6 @@
               <a:t>Puntos colectivos. Normalizado contra el mejor del evento.</a:t>
             </a:r>
             <a:endParaRPr lang="en-US" sz="900" dirty="0"/>
-          </a:p>
-        </p:txBody>
-      </p:sp>
-      <p:sp>
-        <p:nvSpPr>
-          <p:cNvPr id="21" name="Shape 18"/>
-          <p:cNvSpPr/>
-          <p:nvPr/>
-        </p:nvSpPr>
-        <p:spPr>
-          <a:xfrm>
-            <a:off x="0" y="4800600"/>
-            <a:ext cx="9144000" cy="342900"/>
-          </a:xfrm>
-          <a:prstGeom prst="rect">
-            <a:avLst/>
-          </a:prstGeom>
-          <a:solidFill>
-            <a:srgbClr val="1A1A2E"/>
-          </a:solidFill>
-          <a:ln/>
-        </p:spPr>
-      </p:sp>
-      <p:sp>
-        <p:nvSpPr>
-          <p:cNvPr id="22" name="Text 19"/>
-          <p:cNvSpPr/>
-          <p:nvPr/>
-        </p:nvSpPr>
-        <p:spPr>
-          <a:xfrm>
-            <a:off x="548640" y="4828032"/>
-            <a:ext cx="8046720" cy="274320"/>
-          </a:xfrm>
-          <a:prstGeom prst="rect">
-            <a:avLst/>
-          </a:prstGeom>
-          <a:noFill/>
-          <a:ln/>
-        </p:spPr>
-        <p:txBody>
-          <a:bodyPr wrap="square" rtlCol="0" anchor="ctr"/>
-          <a:lstStyle/>
-          <a:p>
-            <a:pPr indent="0" marL="0">
-              <a:buNone/>
-            </a:pPr>
-            <a:r>
-              <a:rPr lang="en-US" sz="700" i="1" dirty="0">
-                <a:solidFill>
-                  <a:srgbClr val="AAAAAA"/>
-                </a:solidFill>
-                <a:latin typeface="Georgia" pitchFamily="34" charset="0"/>
-                <a:ea typeface="Georgia" pitchFamily="34" charset="-122"/>
-                <a:cs typeface="Georgia" pitchFamily="34" charset="-120"/>
-              </a:rPr>
-              <a:t>docs/psr-audit/02-metodologia-matematica.md</a:t>
-            </a:r>
-            <a:endParaRPr lang="en-US" sz="700" dirty="0"/>
           </a:p>
         </p:txBody>
       </p:sp>
@@ -11593,6 +11585,7 @@
         <a:solidFill>
           <a:srgbClr val="1A1A2E"/>
         </a:solidFill>
+        <a:effectLst/>
       </p:bgPr>
     </p:bg>
     <p:spTree>
@@ -11630,7 +11623,7 @@
           <a:bodyPr wrap="square" lIns="0" tIns="0" rIns="0" bIns="0" rtlCol="0" anchor="ctr"/>
           <a:lstStyle/>
           <a:p>
-            <a:pPr indent="0" marL="0">
+            <a:pPr marL="0" indent="0">
               <a:buNone/>
             </a:pPr>
             <a:r>
@@ -11667,6 +11660,13 @@
           </a:solidFill>
           <a:ln/>
         </p:spPr>
+        <p:txBody>
+          <a:bodyPr/>
+          <a:lstStyle/>
+          <a:p>
+            <a:endParaRPr lang="es-MX"/>
+          </a:p>
+        </p:txBody>
       </p:sp>
       <p:sp>
         <p:nvSpPr>
@@ -11689,11 +11689,11 @@
           <a:bodyPr wrap="square" lIns="0" tIns="0" rIns="0" bIns="0" rtlCol="0" anchor="ctr"/>
           <a:lstStyle/>
           <a:p>
-            <a:pPr indent="0" marL="0">
-              <a:buNone/>
-            </a:pPr>
-            <a:r>
-              <a:rPr lang="en-US" sz="800" spc="300" kern="0" dirty="0">
+            <a:pPr marL="0" indent="0">
+              <a:buNone/>
+            </a:pPr>
+            <a:r>
+              <a:rPr lang="en-US" sz="800" kern="0" spc="300" dirty="0">
                 <a:solidFill>
                   <a:srgbClr val="888888"/>
                 </a:solidFill>
@@ -11709,7 +11709,7 @@
       </p:sp>
       <p:graphicFrame>
         <p:nvGraphicFramePr>
-          <p:cNvPr id="5" name="Chart 0" descr=""/>
+          <p:cNvPr id="5" name="Chart 0"/>
           <p:cNvGraphicFramePr/>
           <p:nvPr/>
         </p:nvGraphicFramePr>
@@ -11717,9 +11717,9 @@
           <a:off x="274320" y="1371600"/>
           <a:ext cx="5669280" cy="3200400"/>
         </p:xfrm>
-        <a:graphic xmlns:a="http://schemas.openxmlformats.org/drawingml/2006/main">
+        <a:graphic>
           <a:graphicData uri="http://schemas.openxmlformats.org/drawingml/2006/chart">
-            <c:chart xmlns:c="http://schemas.openxmlformats.org/drawingml/2006/chart" r:id="rId1"/>
+            <c:chart xmlns:c="http://schemas.openxmlformats.org/drawingml/2006/chart" xmlns:r="http://schemas.openxmlformats.org/officeDocument/2006/relationships" r:id="rId3"/>
           </a:graphicData>
         </a:graphic>
       </p:graphicFrame>
@@ -11742,6 +11742,13 @@
           </a:solidFill>
           <a:ln/>
         </p:spPr>
+        <p:txBody>
+          <a:bodyPr/>
+          <a:lstStyle/>
+          <a:p>
+            <a:endParaRPr lang="es-MX"/>
+          </a:p>
+        </p:txBody>
       </p:sp>
       <p:sp>
         <p:nvSpPr>
@@ -11764,7 +11771,7 @@
           <a:bodyPr wrap="square" lIns="0" tIns="0" rIns="0" bIns="0" rtlCol="0" anchor="ctr"/>
           <a:lstStyle/>
           <a:p>
-            <a:pPr indent="0" marL="0">
+            <a:pPr marL="0" indent="0">
               <a:buNone/>
             </a:pPr>
             <a:r>
@@ -11803,7 +11810,7 @@
           <a:bodyPr wrap="square" lIns="0" tIns="0" rIns="0" bIns="0" rtlCol="0" anchor="ctr"/>
           <a:lstStyle/>
           <a:p>
-            <a:pPr indent="0" marL="0">
+            <a:pPr marL="0" indent="0">
               <a:buNone/>
             </a:pPr>
             <a:r>
@@ -11842,7 +11849,7 @@
           <a:bodyPr wrap="square" lIns="0" tIns="0" rIns="0" bIns="0" rtlCol="0" anchor="ctr"/>
           <a:lstStyle/>
           <a:p>
-            <a:pPr indent="0" marL="0">
+            <a:pPr marL="0" indent="0">
               <a:buNone/>
             </a:pPr>
             <a:r>
@@ -11881,7 +11888,7 @@
           <a:bodyPr wrap="square" lIns="0" tIns="0" rIns="0" bIns="0" rtlCol="0" anchor="ctr"/>
           <a:lstStyle/>
           <a:p>
-            <a:pPr indent="0" marL="0">
+            <a:pPr marL="0" indent="0">
               <a:buNone/>
             </a:pPr>
             <a:r>
@@ -11920,7 +11927,7 @@
           <a:bodyPr wrap="square" lIns="0" tIns="0" rIns="0" bIns="0" rtlCol="0" anchor="ctr"/>
           <a:lstStyle/>
           <a:p>
-            <a:pPr indent="0" marL="0">
+            <a:pPr marL="0" indent="0">
               <a:buNone/>
             </a:pPr>
             <a:r>
@@ -11959,7 +11966,7 @@
           <a:bodyPr wrap="square" lIns="0" tIns="0" rIns="0" bIns="0" rtlCol="0" anchor="ctr"/>
           <a:lstStyle/>
           <a:p>
-            <a:pPr indent="0" marL="0">
+            <a:pPr marL="0" indent="0">
               <a:buNone/>
             </a:pPr>
             <a:r>
@@ -11998,7 +12005,7 @@
           <a:bodyPr wrap="square" lIns="0" tIns="0" rIns="0" bIns="0" rtlCol="0" anchor="ctr"/>
           <a:lstStyle/>
           <a:p>
-            <a:pPr indent="0" marL="0">
+            <a:pPr marL="0" indent="0">
               <a:buNone/>
             </a:pPr>
             <a:r>
@@ -12037,7 +12044,7 @@
           <a:bodyPr wrap="square" lIns="0" tIns="0" rIns="0" bIns="0" rtlCol="0" anchor="ctr"/>
           <a:lstStyle/>
           <a:p>
-            <a:pPr indent="0" marL="0">
+            <a:pPr marL="0" indent="0">
               <a:buNone/>
             </a:pPr>
             <a:r>
@@ -12076,7 +12083,7 @@
           <a:bodyPr wrap="square" lIns="0" tIns="0" rIns="0" bIns="0" rtlCol="0" anchor="ctr"/>
           <a:lstStyle/>
           <a:p>
-            <a:pPr indent="0" marL="0">
+            <a:pPr marL="0" indent="0">
               <a:buNone/>
             </a:pPr>
             <a:r>
@@ -12115,7 +12122,7 @@
           <a:bodyPr wrap="square" lIns="0" tIns="0" rIns="0" bIns="0" rtlCol="0" anchor="ctr"/>
           <a:lstStyle/>
           <a:p>
-            <a:pPr indent="0" marL="0">
+            <a:pPr marL="0" indent="0">
               <a:buNone/>
             </a:pPr>
             <a:r>
@@ -12154,7 +12161,7 @@
           <a:bodyPr wrap="square" lIns="0" tIns="0" rIns="0" bIns="0" rtlCol="0" anchor="ctr"/>
           <a:lstStyle/>
           <a:p>
-            <a:pPr indent="0" marL="0">
+            <a:pPr marL="0" indent="0">
               <a:buNone/>
             </a:pPr>
             <a:r>
@@ -12193,7 +12200,7 @@
           <a:bodyPr wrap="square" lIns="0" tIns="0" rIns="0" bIns="0" rtlCol="0" anchor="ctr"/>
           <a:lstStyle/>
           <a:p>
-            <a:pPr indent="0" marL="0">
+            <a:pPr marL="0" indent="0">
               <a:buNone/>
             </a:pPr>
             <a:r>
@@ -12232,7 +12239,7 @@
           <a:bodyPr wrap="square" lIns="0" tIns="0" rIns="0" bIns="0" rtlCol="0" anchor="ctr"/>
           <a:lstStyle/>
           <a:p>
-            <a:pPr indent="0" marL="0">
+            <a:pPr marL="0" indent="0">
               <a:buNone/>
             </a:pPr>
             <a:r>
@@ -12271,7 +12278,7 @@
           <a:bodyPr wrap="square" lIns="0" tIns="0" rIns="0" bIns="0" rtlCol="0" anchor="ctr"/>
           <a:lstStyle/>
           <a:p>
-            <a:pPr indent="0" marL="0">
+            <a:pPr marL="0" indent="0">
               <a:buNone/>
             </a:pPr>
             <a:r>
@@ -12310,7 +12317,7 @@
           <a:bodyPr wrap="square" lIns="0" tIns="0" rIns="0" bIns="0" rtlCol="0" anchor="ctr"/>
           <a:lstStyle/>
           <a:p>
-            <a:pPr indent="0" marL="0">
+            <a:pPr marL="0" indent="0">
               <a:buNone/>
             </a:pPr>
             <a:r>
@@ -12347,6 +12354,13 @@
           </a:solidFill>
           <a:ln/>
         </p:spPr>
+        <p:txBody>
+          <a:bodyPr/>
+          <a:lstStyle/>
+          <a:p>
+            <a:endParaRPr lang="es-MX"/>
+          </a:p>
+        </p:txBody>
       </p:sp>
       <p:sp>
         <p:nvSpPr>
@@ -12356,7 +12370,7 @@
         </p:nvSpPr>
         <p:spPr>
           <a:xfrm>
-            <a:off x="548640" y="4828032"/>
+            <a:off x="0" y="4869180"/>
             <a:ext cx="8046720" cy="274320"/>
           </a:xfrm>
           <a:prstGeom prst="rect">
@@ -12369,7 +12383,7 @@
           <a:bodyPr wrap="square" rtlCol="0" anchor="ctr"/>
           <a:lstStyle/>
           <a:p>
-            <a:pPr indent="0" marL="0">
+            <a:pPr marL="0" indent="0">
               <a:buNone/>
             </a:pPr>
             <a:r>
@@ -12381,7 +12395,18 @@
                 <a:ea typeface="Georgia" pitchFamily="34" charset="-122"/>
                 <a:cs typeface="Georgia" pitchFamily="34" charset="-120"/>
               </a:rPr>
-              <a:t>Datos pedagogicos  —  docs/psr-audit/06-ejemplos-evolucion.md</a:t>
+              <a:t>Datos </a:t>
+            </a:r>
+            <a:r>
+              <a:rPr lang="en-US" sz="700" i="1" dirty="0" err="1">
+                <a:solidFill>
+                  <a:srgbClr val="AAAAAA"/>
+                </a:solidFill>
+                <a:latin typeface="Georgia" pitchFamily="34" charset="0"/>
+                <a:ea typeface="Georgia" pitchFamily="34" charset="-122"/>
+                <a:cs typeface="Georgia" pitchFamily="34" charset="-120"/>
+              </a:rPr>
+              <a:t>pedagogicos</a:t>
             </a:r>
             <a:endParaRPr lang="en-US" sz="700" dirty="0"/>
           </a:p>
@@ -12403,6 +12428,7 @@
         <a:solidFill>
           <a:srgbClr val="F7F3EE"/>
         </a:solidFill>
+        <a:effectLst/>
       </p:bgPr>
     </p:bg>
     <p:spTree>
@@ -12440,7 +12466,7 @@
           <a:bodyPr wrap="square" lIns="0" tIns="0" rIns="0" bIns="0" rtlCol="0" anchor="ctr"/>
           <a:lstStyle/>
           <a:p>
-            <a:pPr indent="0" marL="0">
+            <a:pPr marL="0" indent="0">
               <a:buNone/>
             </a:pPr>
             <a:r>
@@ -12477,6 +12503,13 @@
           </a:solidFill>
           <a:ln/>
         </p:spPr>
+        <p:txBody>
+          <a:bodyPr/>
+          <a:lstStyle/>
+          <a:p>
+            <a:endParaRPr lang="es-MX"/>
+          </a:p>
+        </p:txBody>
       </p:sp>
       <p:sp>
         <p:nvSpPr>
@@ -12487,23 +12520,23 @@
         <p:spPr>
           <a:xfrm>
             <a:off x="731520" y="1188720"/>
-            <a:ext cx="3657600" cy="228600"/>
-          </a:xfrm>
-          <a:prstGeom prst="rect">
-            <a:avLst/>
-          </a:prstGeom>
-          <a:noFill/>
-          <a:ln/>
-        </p:spPr>
-        <p:txBody>
-          <a:bodyPr wrap="square" lIns="0" tIns="0" rIns="0" bIns="0" rtlCol="0" anchor="ctr"/>
-          <a:lstStyle/>
-          <a:p>
-            <a:pPr indent="0" marL="0">
-              <a:buNone/>
-            </a:pPr>
-            <a:r>
-              <a:rPr lang="en-US" sz="800" spc="300" kern="0" dirty="0">
+            <a:ext cx="4378960" cy="205740"/>
+          </a:xfrm>
+          <a:prstGeom prst="rect">
+            <a:avLst/>
+          </a:prstGeom>
+          <a:noFill/>
+          <a:ln/>
+        </p:spPr>
+        <p:txBody>
+          <a:bodyPr wrap="square" lIns="0" tIns="0" rIns="0" bIns="0" rtlCol="0" anchor="ctr"/>
+          <a:lstStyle/>
+          <a:p>
+            <a:pPr marL="0" indent="0">
+              <a:buNone/>
+            </a:pPr>
+            <a:r>
+              <a:rPr lang="en-US" sz="800" kern="0" spc="300" dirty="0">
                 <a:solidFill>
                   <a:srgbClr val="7A7A8A"/>
                 </a:solidFill>
@@ -12519,7 +12552,7 @@
       </p:sp>
       <p:graphicFrame>
         <p:nvGraphicFramePr>
-          <p:cNvPr id="5" name="Chart 0" descr=""/>
+          <p:cNvPr id="5" name="Chart 0"/>
           <p:cNvGraphicFramePr/>
           <p:nvPr/>
         </p:nvGraphicFramePr>
@@ -12527,15 +12560,15 @@
           <a:off x="274320" y="1417320"/>
           <a:ext cx="4114800" cy="2103120"/>
         </p:xfrm>
-        <a:graphic xmlns:a="http://schemas.openxmlformats.org/drawingml/2006/main">
+        <a:graphic>
           <a:graphicData uri="http://schemas.openxmlformats.org/drawingml/2006/chart">
-            <c:chart xmlns:c="http://schemas.openxmlformats.org/drawingml/2006/chart" r:id="rId1"/>
+            <c:chart xmlns:c="http://schemas.openxmlformats.org/drawingml/2006/chart" xmlns:r="http://schemas.openxmlformats.org/officeDocument/2006/relationships" r:id="rId3"/>
           </a:graphicData>
         </a:graphic>
       </p:graphicFrame>
       <p:graphicFrame>
         <p:nvGraphicFramePr>
-          <p:cNvPr id="6" name="Chart 1" descr=""/>
+          <p:cNvPr id="6" name="Chart 1"/>
           <p:cNvGraphicFramePr/>
           <p:nvPr/>
         </p:nvGraphicFramePr>
@@ -12543,9 +12576,9 @@
           <a:off x="4754880" y="1417320"/>
           <a:ext cx="4114800" cy="2103120"/>
         </p:xfrm>
-        <a:graphic xmlns:a="http://schemas.openxmlformats.org/drawingml/2006/main">
+        <a:graphic>
           <a:graphicData uri="http://schemas.openxmlformats.org/drawingml/2006/chart">
-            <c:chart xmlns:c="http://schemas.openxmlformats.org/drawingml/2006/chart" r:id="rId2"/>
+            <c:chart xmlns:c="http://schemas.openxmlformats.org/drawingml/2006/chart" xmlns:r="http://schemas.openxmlformats.org/officeDocument/2006/relationships" r:id="rId4"/>
           </a:graphicData>
         </a:graphic>
       </p:graphicFrame>
@@ -12568,13 +12601,20 @@
           </a:solidFill>
           <a:ln/>
           <a:effectLst>
-            <a:outerShdw sx="100000" sy="100000" kx="0" ky="0" algn="bl" rotWithShape="0" blurRad="101600" dist="25400" dir="8100000">
+            <a:outerShdw blurRad="101600" dist="25400" dir="8100000" algn="bl" rotWithShape="0">
               <a:srgbClr val="000000">
                 <a:alpha val="6000"/>
               </a:srgbClr>
             </a:outerShdw>
           </a:effectLst>
         </p:spPr>
+        <p:txBody>
+          <a:bodyPr/>
+          <a:lstStyle/>
+          <a:p>
+            <a:endParaRPr lang="es-MX"/>
+          </a:p>
+        </p:txBody>
       </p:sp>
       <p:sp>
         <p:nvSpPr>
@@ -12595,6 +12635,13 @@
           </a:solidFill>
           <a:ln/>
         </p:spPr>
+        <p:txBody>
+          <a:bodyPr/>
+          <a:lstStyle/>
+          <a:p>
+            <a:endParaRPr lang="es-MX"/>
+          </a:p>
+        </p:txBody>
       </p:sp>
       <p:sp>
         <p:nvSpPr>
@@ -12617,7 +12664,7 @@
           <a:bodyPr wrap="square" lIns="0" tIns="0" rIns="0" bIns="0" rtlCol="0" anchor="ctr"/>
           <a:lstStyle/>
           <a:p>
-            <a:pPr indent="0" marL="0">
+            <a:pPr marL="0" indent="0">
               <a:buNone/>
             </a:pPr>
             <a:r>
@@ -12656,7 +12703,7 @@
           <a:bodyPr wrap="square" lIns="0" tIns="0" rIns="0" bIns="0" rtlCol="0" anchor="ctr"/>
           <a:lstStyle/>
           <a:p>
-            <a:pPr indent="0" marL="0">
+            <a:pPr marL="0" indent="0">
               <a:buNone/>
             </a:pPr>
             <a:r>
@@ -12695,7 +12742,7 @@
           <a:bodyPr wrap="square" lIns="0" tIns="0" rIns="0" bIns="0" rtlCol="0" anchor="ctr"/>
           <a:lstStyle/>
           <a:p>
-            <a:pPr indent="0" marL="0">
+            <a:pPr marL="0" indent="0">
               <a:buNone/>
             </a:pPr>
             <a:r>
@@ -12732,13 +12779,20 @@
           </a:solidFill>
           <a:ln/>
           <a:effectLst>
-            <a:outerShdw sx="100000" sy="100000" kx="0" ky="0" algn="bl" rotWithShape="0" blurRad="101600" dist="25400" dir="8100000">
+            <a:outerShdw blurRad="101600" dist="25400" dir="8100000" algn="bl" rotWithShape="0">
               <a:srgbClr val="000000">
                 <a:alpha val="6000"/>
               </a:srgbClr>
             </a:outerShdw>
           </a:effectLst>
         </p:spPr>
+        <p:txBody>
+          <a:bodyPr/>
+          <a:lstStyle/>
+          <a:p>
+            <a:endParaRPr lang="es-MX"/>
+          </a:p>
+        </p:txBody>
       </p:sp>
       <p:sp>
         <p:nvSpPr>
@@ -12759,6 +12813,13 @@
           </a:solidFill>
           <a:ln/>
         </p:spPr>
+        <p:txBody>
+          <a:bodyPr/>
+          <a:lstStyle/>
+          <a:p>
+            <a:endParaRPr lang="es-MX"/>
+          </a:p>
+        </p:txBody>
       </p:sp>
       <p:sp>
         <p:nvSpPr>
@@ -12781,7 +12842,7 @@
           <a:bodyPr wrap="square" lIns="0" tIns="0" rIns="0" bIns="0" rtlCol="0" anchor="ctr"/>
           <a:lstStyle/>
           <a:p>
-            <a:pPr indent="0" marL="0">
+            <a:pPr marL="0" indent="0">
               <a:buNone/>
             </a:pPr>
             <a:r>
@@ -12820,7 +12881,7 @@
           <a:bodyPr wrap="square" lIns="0" tIns="0" rIns="0" bIns="0" rtlCol="0" anchor="ctr"/>
           <a:lstStyle/>
           <a:p>
-            <a:pPr indent="0" marL="0">
+            <a:pPr marL="0" indent="0">
               <a:buNone/>
             </a:pPr>
             <a:r>
@@ -12859,7 +12920,7 @@
           <a:bodyPr wrap="square" lIns="0" tIns="0" rIns="0" bIns="0" rtlCol="0" anchor="ctr"/>
           <a:lstStyle/>
           <a:p>
-            <a:pPr indent="0" marL="0">
+            <a:pPr marL="0" indent="0">
               <a:buNone/>
             </a:pPr>
             <a:r>
@@ -12874,65 +12935,6 @@
               <a:t>Consistencia reduce sigma rapidamente</a:t>
             </a:r>
             <a:endParaRPr lang="en-US" sz="900" dirty="0"/>
-          </a:p>
-        </p:txBody>
-      </p:sp>
-      <p:sp>
-        <p:nvSpPr>
-          <p:cNvPr id="17" name="Shape 13"/>
-          <p:cNvSpPr/>
-          <p:nvPr/>
-        </p:nvSpPr>
-        <p:spPr>
-          <a:xfrm>
-            <a:off x="0" y="4800600"/>
-            <a:ext cx="9144000" cy="342900"/>
-          </a:xfrm>
-          <a:prstGeom prst="rect">
-            <a:avLst/>
-          </a:prstGeom>
-          <a:solidFill>
-            <a:srgbClr val="1A1A2E"/>
-          </a:solidFill>
-          <a:ln/>
-        </p:spPr>
-      </p:sp>
-      <p:sp>
-        <p:nvSpPr>
-          <p:cNvPr id="18" name="Text 14"/>
-          <p:cNvSpPr/>
-          <p:nvPr/>
-        </p:nvSpPr>
-        <p:spPr>
-          <a:xfrm>
-            <a:off x="548640" y="4828032"/>
-            <a:ext cx="8046720" cy="274320"/>
-          </a:xfrm>
-          <a:prstGeom prst="rect">
-            <a:avLst/>
-          </a:prstGeom>
-          <a:noFill/>
-          <a:ln/>
-        </p:spPr>
-        <p:txBody>
-          <a:bodyPr wrap="square" rtlCol="0" anchor="ctr"/>
-          <a:lstStyle/>
-          <a:p>
-            <a:pPr indent="0" marL="0">
-              <a:buNone/>
-            </a:pPr>
-            <a:r>
-              <a:rPr lang="en-US" sz="700" i="1" dirty="0">
-                <a:solidFill>
-                  <a:srgbClr val="AAAAAA"/>
-                </a:solidFill>
-                <a:latin typeface="Georgia" pitchFamily="34" charset="0"/>
-                <a:ea typeface="Georgia" pitchFamily="34" charset="-122"/>
-                <a:cs typeface="Georgia" pitchFamily="34" charset="-120"/>
-              </a:rPr>
-              <a:t>docs/psr-audit/06-ejemplos-evolucion.md, 07-ventajas-limitaciones.md</a:t>
-            </a:r>
-            <a:endParaRPr lang="en-US" sz="700" dirty="0"/>
           </a:p>
         </p:txBody>
       </p:sp>
@@ -12952,6 +12954,7 @@
         <a:solidFill>
           <a:srgbClr val="1A1A2E"/>
         </a:solidFill>
+        <a:effectLst/>
       </p:bgPr>
     </p:bg>
     <p:spTree>
@@ -12989,7 +12992,7 @@
           <a:bodyPr wrap="square" lIns="0" tIns="0" rIns="0" bIns="0" rtlCol="0" anchor="ctr"/>
           <a:lstStyle/>
           <a:p>
-            <a:pPr indent="0" marL="0">
+            <a:pPr marL="0" indent="0">
               <a:buNone/>
             </a:pPr>
             <a:r>
@@ -13026,6 +13029,13 @@
           </a:solidFill>
           <a:ln/>
         </p:spPr>
+        <p:txBody>
+          <a:bodyPr/>
+          <a:lstStyle/>
+          <a:p>
+            <a:endParaRPr lang="es-MX"/>
+          </a:p>
+        </p:txBody>
       </p:sp>
       <p:sp>
         <p:nvSpPr>
@@ -13046,6 +13056,13 @@
           </a:solidFill>
           <a:ln/>
         </p:spPr>
+        <p:txBody>
+          <a:bodyPr/>
+          <a:lstStyle/>
+          <a:p>
+            <a:endParaRPr lang="es-MX"/>
+          </a:p>
+        </p:txBody>
       </p:sp>
       <p:sp>
         <p:nvSpPr>
@@ -13066,6 +13083,13 @@
           </a:solidFill>
           <a:ln/>
         </p:spPr>
+        <p:txBody>
+          <a:bodyPr/>
+          <a:lstStyle/>
+          <a:p>
+            <a:endParaRPr lang="es-MX"/>
+          </a:p>
+        </p:txBody>
       </p:sp>
       <p:sp>
         <p:nvSpPr>
@@ -13088,7 +13112,7 @@
           <a:bodyPr wrap="square" lIns="0" tIns="0" rIns="0" bIns="0" rtlCol="0" anchor="ctr"/>
           <a:lstStyle/>
           <a:p>
-            <a:pPr algn="ctr" indent="0" marL="0">
+            <a:pPr marL="0" indent="0" algn="ctr">
               <a:buNone/>
             </a:pPr>
             <a:r>
@@ -13127,7 +13151,7 @@
           <a:bodyPr wrap="square" lIns="0" tIns="0" rIns="0" bIns="0" rtlCol="0" anchor="ctr"/>
           <a:lstStyle/>
           <a:p>
-            <a:pPr algn="ctr" indent="0" marL="0">
+            <a:pPr marL="0" indent="0" algn="ctr">
               <a:buNone/>
             </a:pPr>
             <a:r>
@@ -13166,7 +13190,7 @@
           <a:bodyPr wrap="square" lIns="0" tIns="0" rIns="0" bIns="0" rtlCol="0" anchor="ctr"/>
           <a:lstStyle/>
           <a:p>
-            <a:pPr algn="ctr" indent="0" marL="0">
+            <a:pPr marL="0" indent="0" algn="ctr">
               <a:buNone/>
             </a:pPr>
             <a:r>
@@ -13205,7 +13229,7 @@
           <a:bodyPr wrap="square" lIns="0" tIns="0" rIns="0" bIns="0" rtlCol="0" anchor="ctr"/>
           <a:lstStyle/>
           <a:p>
-            <a:pPr indent="0" marL="0">
+            <a:pPr marL="0" indent="0">
               <a:buNone/>
             </a:pPr>
             <a:r>
@@ -13242,6 +13266,13 @@
           </a:solidFill>
           <a:ln/>
         </p:spPr>
+        <p:txBody>
+          <a:bodyPr/>
+          <a:lstStyle/>
+          <a:p>
+            <a:endParaRPr lang="es-MX"/>
+          </a:p>
+        </p:txBody>
       </p:sp>
       <p:sp>
         <p:nvSpPr>
@@ -13264,7 +13295,7 @@
           <a:bodyPr wrap="square" lIns="0" tIns="0" rIns="0" bIns="0" rtlCol="0" anchor="ctr"/>
           <a:lstStyle/>
           <a:p>
-            <a:pPr indent="0" marL="0">
+            <a:pPr marL="0" indent="0">
               <a:buNone/>
             </a:pPr>
             <a:r>
@@ -13303,7 +13334,7 @@
           <a:bodyPr wrap="square" lIns="0" tIns="0" rIns="0" bIns="0" rtlCol="0" anchor="ctr"/>
           <a:lstStyle/>
           <a:p>
-            <a:pPr indent="0" marL="0">
+            <a:pPr marL="0" indent="0">
               <a:buNone/>
             </a:pPr>
             <a:r>
@@ -13340,6 +13371,13 @@
           </a:solidFill>
           <a:ln/>
         </p:spPr>
+        <p:txBody>
+          <a:bodyPr/>
+          <a:lstStyle/>
+          <a:p>
+            <a:endParaRPr lang="es-MX"/>
+          </a:p>
+        </p:txBody>
       </p:sp>
       <p:sp>
         <p:nvSpPr>
@@ -13362,7 +13400,7 @@
           <a:bodyPr wrap="square" lIns="0" tIns="0" rIns="0" bIns="0" rtlCol="0" anchor="ctr"/>
           <a:lstStyle/>
           <a:p>
-            <a:pPr indent="0" marL="0">
+            <a:pPr marL="0" indent="0">
               <a:buNone/>
             </a:pPr>
             <a:r>
@@ -13401,7 +13439,7 @@
           <a:bodyPr wrap="square" lIns="0" tIns="0" rIns="0" bIns="0" rtlCol="0" anchor="ctr"/>
           <a:lstStyle/>
           <a:p>
-            <a:pPr algn="ctr" indent="0" marL="0">
+            <a:pPr marL="0" indent="0" algn="ctr">
               <a:buNone/>
             </a:pPr>
             <a:r>
@@ -13440,7 +13478,7 @@
           <a:bodyPr wrap="square" lIns="0" tIns="0" rIns="0" bIns="0" rtlCol="0" anchor="t"/>
           <a:lstStyle/>
           <a:p>
-            <a:pPr algn="ctr" indent="0" marL="0">
+            <a:pPr marL="0" indent="0" algn="ctr">
               <a:buNone/>
             </a:pPr>
             <a:r>
@@ -13457,7 +13495,7 @@
             <a:endParaRPr lang="en-US" sz="900" dirty="0"/>
           </a:p>
           <a:p>
-            <a:pPr algn="ctr" indent="0" marL="0">
+            <a:pPr marL="0" indent="0" algn="ctr">
               <a:buNone/>
             </a:pPr>
             <a:r>
@@ -13494,6 +13532,13 @@
           </a:solidFill>
           <a:ln/>
         </p:spPr>
+        <p:txBody>
+          <a:bodyPr/>
+          <a:lstStyle/>
+          <a:p>
+            <a:endParaRPr lang="es-MX"/>
+          </a:p>
+        </p:txBody>
       </p:sp>
       <p:sp>
         <p:nvSpPr>
@@ -13514,6 +13559,13 @@
           </a:solidFill>
           <a:ln/>
         </p:spPr>
+        <p:txBody>
+          <a:bodyPr/>
+          <a:lstStyle/>
+          <a:p>
+            <a:endParaRPr lang="es-MX"/>
+          </a:p>
+        </p:txBody>
       </p:sp>
       <p:sp>
         <p:nvSpPr>
@@ -13536,7 +13588,7 @@
           <a:bodyPr wrap="square" lIns="0" tIns="0" rIns="0" bIns="0" rtlCol="0" anchor="ctr"/>
           <a:lstStyle/>
           <a:p>
-            <a:pPr algn="ctr" indent="0" marL="0">
+            <a:pPr marL="0" indent="0" algn="ctr">
               <a:buNone/>
             </a:pPr>
             <a:r>
@@ -13575,7 +13627,7 @@
           <a:bodyPr wrap="square" lIns="0" tIns="0" rIns="0" bIns="0" rtlCol="0" anchor="ctr"/>
           <a:lstStyle/>
           <a:p>
-            <a:pPr algn="ctr" indent="0" marL="0">
+            <a:pPr marL="0" indent="0" algn="ctr">
               <a:buNone/>
             </a:pPr>
             <a:r>
@@ -13614,7 +13666,7 @@
           <a:bodyPr wrap="square" lIns="0" tIns="0" rIns="0" bIns="0" rtlCol="0" anchor="ctr"/>
           <a:lstStyle/>
           <a:p>
-            <a:pPr algn="ctr" indent="0" marL="0">
+            <a:pPr marL="0" indent="0" algn="ctr">
               <a:buNone/>
             </a:pPr>
             <a:r>
@@ -13653,7 +13705,7 @@
           <a:bodyPr wrap="square" lIns="0" tIns="0" rIns="0" bIns="0" rtlCol="0" anchor="ctr"/>
           <a:lstStyle/>
           <a:p>
-            <a:pPr indent="0" marL="0">
+            <a:pPr marL="0" indent="0">
               <a:buNone/>
             </a:pPr>
             <a:r>
@@ -13690,6 +13742,13 @@
           </a:solidFill>
           <a:ln/>
         </p:spPr>
+        <p:txBody>
+          <a:bodyPr/>
+          <a:lstStyle/>
+          <a:p>
+            <a:endParaRPr lang="es-MX"/>
+          </a:p>
+        </p:txBody>
       </p:sp>
       <p:sp>
         <p:nvSpPr>
@@ -13712,7 +13771,7 @@
           <a:bodyPr wrap="square" lIns="0" tIns="0" rIns="0" bIns="0" rtlCol="0" anchor="ctr"/>
           <a:lstStyle/>
           <a:p>
-            <a:pPr indent="0" marL="0">
+            <a:pPr marL="0" indent="0">
               <a:buNone/>
             </a:pPr>
             <a:r>
@@ -13751,7 +13810,7 @@
           <a:bodyPr wrap="square" lIns="0" tIns="0" rIns="0" bIns="0" rtlCol="0" anchor="ctr"/>
           <a:lstStyle/>
           <a:p>
-            <a:pPr indent="0" marL="0">
+            <a:pPr marL="0" indent="0">
               <a:buNone/>
             </a:pPr>
             <a:r>
@@ -13788,6 +13847,13 @@
           </a:solidFill>
           <a:ln/>
         </p:spPr>
+        <p:txBody>
+          <a:bodyPr/>
+          <a:lstStyle/>
+          <a:p>
+            <a:endParaRPr lang="es-MX"/>
+          </a:p>
+        </p:txBody>
       </p:sp>
       <p:sp>
         <p:nvSpPr>
@@ -13810,7 +13876,7 @@
           <a:bodyPr wrap="square" lIns="0" tIns="0" rIns="0" bIns="0" rtlCol="0" anchor="ctr"/>
           <a:lstStyle/>
           <a:p>
-            <a:pPr indent="0" marL="0">
+            <a:pPr marL="0" indent="0">
               <a:buNone/>
             </a:pPr>
             <a:r>
@@ -13849,7 +13915,7 @@
           <a:bodyPr wrap="square" lIns="0" tIns="0" rIns="0" bIns="0" rtlCol="0" anchor="ctr"/>
           <a:lstStyle/>
           <a:p>
-            <a:pPr algn="ctr" indent="0" marL="0">
+            <a:pPr marL="0" indent="0" algn="ctr">
               <a:buNone/>
             </a:pPr>
             <a:r>
@@ -13888,7 +13954,7 @@
           <a:bodyPr wrap="square" lIns="0" tIns="0" rIns="0" bIns="0" rtlCol="0" anchor="t"/>
           <a:lstStyle/>
           <a:p>
-            <a:pPr algn="ctr" indent="0" marL="0">
+            <a:pPr marL="0" indent="0" algn="ctr">
               <a:buNone/>
             </a:pPr>
             <a:r>
@@ -13905,7 +13971,7 @@
             <a:endParaRPr lang="en-US" sz="900" dirty="0"/>
           </a:p>
           <a:p>
-            <a:pPr algn="ctr" indent="0" marL="0">
+            <a:pPr marL="0" indent="0" algn="ctr">
               <a:buNone/>
             </a:pPr>
             <a:r>
@@ -13942,6 +14008,13 @@
           </a:solidFill>
           <a:ln/>
         </p:spPr>
+        <p:txBody>
+          <a:bodyPr/>
+          <a:lstStyle/>
+          <a:p>
+            <a:endParaRPr lang="es-MX"/>
+          </a:p>
+        </p:txBody>
       </p:sp>
       <p:sp>
         <p:nvSpPr>
@@ -13962,6 +14035,13 @@
           </a:solidFill>
           <a:ln/>
         </p:spPr>
+        <p:txBody>
+          <a:bodyPr/>
+          <a:lstStyle/>
+          <a:p>
+            <a:endParaRPr lang="es-MX"/>
+          </a:p>
+        </p:txBody>
       </p:sp>
       <p:sp>
         <p:nvSpPr>
@@ -13984,7 +14064,7 @@
           <a:bodyPr wrap="square" lIns="0" tIns="0" rIns="0" bIns="0" rtlCol="0" anchor="ctr"/>
           <a:lstStyle/>
           <a:p>
-            <a:pPr algn="ctr" indent="0" marL="0">
+            <a:pPr marL="0" indent="0" algn="ctr">
               <a:buNone/>
             </a:pPr>
             <a:r>
@@ -14023,7 +14103,7 @@
           <a:bodyPr wrap="square" lIns="0" tIns="0" rIns="0" bIns="0" rtlCol="0" anchor="ctr"/>
           <a:lstStyle/>
           <a:p>
-            <a:pPr algn="ctr" indent="0" marL="0">
+            <a:pPr marL="0" indent="0" algn="ctr">
               <a:buNone/>
             </a:pPr>
             <a:r>
@@ -14062,7 +14142,7 @@
           <a:bodyPr wrap="square" lIns="0" tIns="0" rIns="0" bIns="0" rtlCol="0" anchor="ctr"/>
           <a:lstStyle/>
           <a:p>
-            <a:pPr algn="ctr" indent="0" marL="0">
+            <a:pPr marL="0" indent="0" algn="ctr">
               <a:buNone/>
             </a:pPr>
             <a:r>
@@ -14101,7 +14181,7 @@
           <a:bodyPr wrap="square" lIns="0" tIns="0" rIns="0" bIns="0" rtlCol="0" anchor="ctr"/>
           <a:lstStyle/>
           <a:p>
-            <a:pPr indent="0" marL="0">
+            <a:pPr marL="0" indent="0">
               <a:buNone/>
             </a:pPr>
             <a:r>
@@ -14138,6 +14218,13 @@
           </a:solidFill>
           <a:ln/>
         </p:spPr>
+        <p:txBody>
+          <a:bodyPr/>
+          <a:lstStyle/>
+          <a:p>
+            <a:endParaRPr lang="es-MX"/>
+          </a:p>
+        </p:txBody>
       </p:sp>
       <p:sp>
         <p:nvSpPr>
@@ -14160,7 +14247,7 @@
           <a:bodyPr wrap="square" lIns="0" tIns="0" rIns="0" bIns="0" rtlCol="0" anchor="ctr"/>
           <a:lstStyle/>
           <a:p>
-            <a:pPr indent="0" marL="0">
+            <a:pPr marL="0" indent="0">
               <a:buNone/>
             </a:pPr>
             <a:r>
@@ -14199,7 +14286,7 @@
           <a:bodyPr wrap="square" lIns="0" tIns="0" rIns="0" bIns="0" rtlCol="0" anchor="ctr"/>
           <a:lstStyle/>
           <a:p>
-            <a:pPr indent="0" marL="0">
+            <a:pPr marL="0" indent="0">
               <a:buNone/>
             </a:pPr>
             <a:r>
@@ -14236,6 +14323,13 @@
           </a:solidFill>
           <a:ln/>
         </p:spPr>
+        <p:txBody>
+          <a:bodyPr/>
+          <a:lstStyle/>
+          <a:p>
+            <a:endParaRPr lang="es-MX"/>
+          </a:p>
+        </p:txBody>
       </p:sp>
       <p:sp>
         <p:nvSpPr>
@@ -14258,7 +14352,7 @@
           <a:bodyPr wrap="square" lIns="0" tIns="0" rIns="0" bIns="0" rtlCol="0" anchor="ctr"/>
           <a:lstStyle/>
           <a:p>
-            <a:pPr indent="0" marL="0">
+            <a:pPr marL="0" indent="0">
               <a:buNone/>
             </a:pPr>
             <a:r>
@@ -14297,7 +14391,7 @@
           <a:bodyPr wrap="square" lIns="0" tIns="0" rIns="0" bIns="0" rtlCol="0" anchor="ctr"/>
           <a:lstStyle/>
           <a:p>
-            <a:pPr algn="ctr" indent="0" marL="0">
+            <a:pPr marL="0" indent="0" algn="ctr">
               <a:buNone/>
             </a:pPr>
             <a:r>
@@ -14336,7 +14430,7 @@
           <a:bodyPr wrap="square" lIns="0" tIns="0" rIns="0" bIns="0" rtlCol="0" anchor="t"/>
           <a:lstStyle/>
           <a:p>
-            <a:pPr algn="ctr" indent="0" marL="0">
+            <a:pPr marL="0" indent="0" algn="ctr">
               <a:buNone/>
             </a:pPr>
             <a:r>
@@ -14353,7 +14447,7 @@
             <a:endParaRPr lang="en-US" sz="900" dirty="0"/>
           </a:p>
           <a:p>
-            <a:pPr algn="ctr" indent="0" marL="0">
+            <a:pPr marL="0" indent="0" algn="ctr">
               <a:buNone/>
             </a:pPr>
             <a:r>
@@ -14390,43 +14484,11 @@
           </a:solidFill>
           <a:ln/>
         </p:spPr>
-      </p:sp>
-      <p:sp>
-        <p:nvSpPr>
-          <p:cNvPr id="44" name="Text 42"/>
-          <p:cNvSpPr/>
-          <p:nvPr/>
-        </p:nvSpPr>
-        <p:spPr>
-          <a:xfrm>
-            <a:off x="548640" y="4828032"/>
-            <a:ext cx="8046720" cy="274320"/>
-          </a:xfrm>
-          <a:prstGeom prst="rect">
-            <a:avLst/>
-          </a:prstGeom>
-          <a:noFill/>
-          <a:ln/>
-        </p:spPr>
-        <p:txBody>
-          <a:bodyPr wrap="square" rtlCol="0" anchor="ctr"/>
-          <a:lstStyle/>
-          <a:p>
-            <a:pPr indent="0" marL="0">
-              <a:buNone/>
-            </a:pPr>
-            <a:r>
-              <a:rPr lang="en-US" sz="700" i="1" dirty="0">
-                <a:solidFill>
-                  <a:srgbClr val="AAAAAA"/>
-                </a:solidFill>
-                <a:latin typeface="Georgia" pitchFamily="34" charset="0"/>
-                <a:ea typeface="Georgia" pitchFamily="34" charset="-122"/>
-                <a:cs typeface="Georgia" pitchFamily="34" charset="-120"/>
-              </a:rPr>
-              <a:t>docs/psr-audit/02-metodologia-matematica.md, 06-ejemplos-evolucion.md</a:t>
-            </a:r>
-            <a:endParaRPr lang="en-US" sz="700" dirty="0"/>
+        <p:txBody>
+          <a:bodyPr/>
+          <a:lstStyle/>
+          <a:p>
+            <a:endParaRPr lang="es-MX"/>
           </a:p>
         </p:txBody>
       </p:sp>
@@ -14446,6 +14508,7 @@
         <a:solidFill>
           <a:srgbClr val="F7F3EE"/>
         </a:solidFill>
+        <a:effectLst/>
       </p:bgPr>
     </p:bg>
     <p:spTree>
@@ -14483,7 +14546,7 @@
           <a:bodyPr wrap="square" lIns="0" tIns="0" rIns="0" bIns="0" rtlCol="0" anchor="ctr"/>
           <a:lstStyle/>
           <a:p>
-            <a:pPr indent="0" marL="0">
+            <a:pPr marL="0" indent="0">
               <a:buNone/>
             </a:pPr>
             <a:r>
@@ -14520,6 +14583,13 @@
           </a:solidFill>
           <a:ln/>
         </p:spPr>
+        <p:txBody>
+          <a:bodyPr/>
+          <a:lstStyle/>
+          <a:p>
+            <a:endParaRPr lang="es-MX"/>
+          </a:p>
+        </p:txBody>
       </p:sp>
       <p:sp>
         <p:nvSpPr>
@@ -14529,24 +14599,24 @@
         </p:nvSpPr>
         <p:spPr>
           <a:xfrm>
-            <a:off x="731520" y="1188720"/>
-            <a:ext cx="3657600" cy="228600"/>
-          </a:xfrm>
-          <a:prstGeom prst="rect">
-            <a:avLst/>
-          </a:prstGeom>
-          <a:noFill/>
-          <a:ln/>
-        </p:spPr>
-        <p:txBody>
-          <a:bodyPr wrap="square" lIns="0" tIns="0" rIns="0" bIns="0" rtlCol="0" anchor="ctr"/>
-          <a:lstStyle/>
-          <a:p>
-            <a:pPr indent="0" marL="0">
-              <a:buNone/>
-            </a:pPr>
-            <a:r>
-              <a:rPr lang="en-US" sz="800" spc="300" kern="0" dirty="0">
+            <a:off x="731520" y="1159764"/>
+            <a:ext cx="4765040" cy="246888"/>
+          </a:xfrm>
+          <a:prstGeom prst="rect">
+            <a:avLst/>
+          </a:prstGeom>
+          <a:noFill/>
+          <a:ln/>
+        </p:spPr>
+        <p:txBody>
+          <a:bodyPr wrap="square" lIns="0" tIns="0" rIns="0" bIns="0" rtlCol="0" anchor="ctr"/>
+          <a:lstStyle/>
+          <a:p>
+            <a:pPr marL="0" indent="0">
+              <a:buNone/>
+            </a:pPr>
+            <a:r>
+              <a:rPr lang="en-US" sz="800" kern="0" spc="300" dirty="0">
                 <a:solidFill>
                   <a:srgbClr val="7A7A8A"/>
                 </a:solidFill>
@@ -14562,17 +14632,23 @@
       </p:sp>
       <p:graphicFrame>
         <p:nvGraphicFramePr>
-          <p:cNvPr id="5" name="Chart 0" descr=""/>
+          <p:cNvPr id="5" name="Chart 0"/>
           <p:cNvGraphicFramePr/>
-          <p:nvPr/>
+          <p:nvPr>
+            <p:extLst>
+              <p:ext uri="{D42A27DB-BD31-4B8C-83A1-F6EECF244321}">
+                <p14:modId xmlns:p14="http://schemas.microsoft.com/office/powerpoint/2010/main" val="1635170086"/>
+              </p:ext>
+            </p:extLst>
+          </p:nvPr>
         </p:nvGraphicFramePr>
         <p:xfrm>
-          <a:off x="274320" y="1371600"/>
+          <a:off x="274320" y="1422400"/>
           <a:ext cx="5669280" cy="3017520"/>
         </p:xfrm>
-        <a:graphic xmlns:a="http://schemas.openxmlformats.org/drawingml/2006/main">
+        <a:graphic>
           <a:graphicData uri="http://schemas.openxmlformats.org/drawingml/2006/chart">
-            <c:chart xmlns:c="http://schemas.openxmlformats.org/drawingml/2006/chart" r:id="rId1"/>
+            <c:chart xmlns:c="http://schemas.openxmlformats.org/drawingml/2006/chart" xmlns:r="http://schemas.openxmlformats.org/officeDocument/2006/relationships" r:id="rId3"/>
           </a:graphicData>
         </a:graphic>
       </p:graphicFrame>
@@ -14584,7 +14660,7 @@
         </p:nvSpPr>
         <p:spPr>
           <a:xfrm>
-            <a:off x="6217920" y="1371600"/>
+            <a:off x="6217920" y="1422400"/>
             <a:ext cx="2468880" cy="3017520"/>
           </a:xfrm>
           <a:prstGeom prst="rect">
@@ -14595,13 +14671,20 @@
           </a:solidFill>
           <a:ln/>
           <a:effectLst>
-            <a:outerShdw sx="100000" sy="100000" kx="0" ky="0" algn="bl" rotWithShape="0" blurRad="101600" dist="25400" dir="8100000">
+            <a:outerShdw blurRad="101600" dist="25400" dir="8100000" algn="bl" rotWithShape="0">
               <a:srgbClr val="000000">
                 <a:alpha val="6000"/>
               </a:srgbClr>
             </a:outerShdw>
           </a:effectLst>
         </p:spPr>
+        <p:txBody>
+          <a:bodyPr/>
+          <a:lstStyle/>
+          <a:p>
+            <a:endParaRPr lang="es-MX"/>
+          </a:p>
+        </p:txBody>
       </p:sp>
       <p:sp>
         <p:nvSpPr>
@@ -14611,7 +14694,7 @@
         </p:nvSpPr>
         <p:spPr>
           <a:xfrm>
-            <a:off x="6217920" y="1371600"/>
+            <a:off x="6217920" y="1422400"/>
             <a:ext cx="32004" cy="3017520"/>
           </a:xfrm>
           <a:prstGeom prst="rect">
@@ -14622,6 +14705,13 @@
           </a:solidFill>
           <a:ln/>
         </p:spPr>
+        <p:txBody>
+          <a:bodyPr/>
+          <a:lstStyle/>
+          <a:p>
+            <a:endParaRPr lang="es-MX"/>
+          </a:p>
+        </p:txBody>
       </p:sp>
       <p:sp>
         <p:nvSpPr>
@@ -14631,7 +14721,7 @@
         </p:nvSpPr>
         <p:spPr>
           <a:xfrm>
-            <a:off x="6400800" y="1463040"/>
+            <a:off x="6400800" y="1513840"/>
             <a:ext cx="2103120" cy="274320"/>
           </a:xfrm>
           <a:prstGeom prst="rect">
@@ -14644,7 +14734,7 @@
           <a:bodyPr wrap="square" lIns="0" tIns="0" rIns="0" bIns="0" rtlCol="0" anchor="ctr"/>
           <a:lstStyle/>
           <a:p>
-            <a:pPr indent="0" marL="0">
+            <a:pPr marL="0" indent="0">
               <a:buNone/>
             </a:pPr>
             <a:r>
@@ -14670,7 +14760,7 @@
         </p:nvSpPr>
         <p:spPr>
           <a:xfrm>
-            <a:off x="6400800" y="1874520"/>
+            <a:off x="6400800" y="1925320"/>
             <a:ext cx="2103120" cy="182880"/>
           </a:xfrm>
           <a:prstGeom prst="rect">
@@ -14683,7 +14773,7 @@
           <a:bodyPr wrap="square" lIns="0" tIns="0" rIns="0" bIns="0" rtlCol="0" anchor="ctr"/>
           <a:lstStyle/>
           <a:p>
-            <a:pPr indent="0" marL="0">
+            <a:pPr marL="0" indent="0">
               <a:buNone/>
             </a:pPr>
             <a:r>
@@ -14709,7 +14799,7 @@
         </p:nvSpPr>
         <p:spPr>
           <a:xfrm>
-            <a:off x="6400800" y="2075688"/>
+            <a:off x="6400800" y="2126488"/>
             <a:ext cx="2103120" cy="228600"/>
           </a:xfrm>
           <a:prstGeom prst="rect">
@@ -14722,7 +14812,7 @@
           <a:bodyPr wrap="square" lIns="0" tIns="0" rIns="0" bIns="0" rtlCol="0" anchor="ctr"/>
           <a:lstStyle/>
           <a:p>
-            <a:pPr indent="0" marL="0">
+            <a:pPr marL="0" indent="0">
               <a:buNone/>
             </a:pPr>
             <a:r>
@@ -14748,7 +14838,7 @@
         </p:nvSpPr>
         <p:spPr>
           <a:xfrm>
-            <a:off x="6400800" y="2468880"/>
+            <a:off x="6400800" y="2519680"/>
             <a:ext cx="2103120" cy="182880"/>
           </a:xfrm>
           <a:prstGeom prst="rect">
@@ -14761,7 +14851,7 @@
           <a:bodyPr wrap="square" lIns="0" tIns="0" rIns="0" bIns="0" rtlCol="0" anchor="ctr"/>
           <a:lstStyle/>
           <a:p>
-            <a:pPr indent="0" marL="0">
+            <a:pPr marL="0" indent="0">
               <a:buNone/>
             </a:pPr>
             <a:r>
@@ -14787,7 +14877,7 @@
         </p:nvSpPr>
         <p:spPr>
           <a:xfrm>
-            <a:off x="6400800" y="2670048"/>
+            <a:off x="6400800" y="2720848"/>
             <a:ext cx="2103120" cy="228600"/>
           </a:xfrm>
           <a:prstGeom prst="rect">
@@ -14800,7 +14890,7 @@
           <a:bodyPr wrap="square" lIns="0" tIns="0" rIns="0" bIns="0" rtlCol="0" anchor="ctr"/>
           <a:lstStyle/>
           <a:p>
-            <a:pPr indent="0" marL="0">
+            <a:pPr marL="0" indent="0">
               <a:buNone/>
             </a:pPr>
             <a:r>
@@ -14826,7 +14916,7 @@
         </p:nvSpPr>
         <p:spPr>
           <a:xfrm>
-            <a:off x="6400800" y="3063240"/>
+            <a:off x="6400800" y="3114040"/>
             <a:ext cx="2103120" cy="182880"/>
           </a:xfrm>
           <a:prstGeom prst="rect">
@@ -14839,7 +14929,7 @@
           <a:bodyPr wrap="square" lIns="0" tIns="0" rIns="0" bIns="0" rtlCol="0" anchor="ctr"/>
           <a:lstStyle/>
           <a:p>
-            <a:pPr indent="0" marL="0">
+            <a:pPr marL="0" indent="0">
               <a:buNone/>
             </a:pPr>
             <a:r>
@@ -14865,7 +14955,7 @@
         </p:nvSpPr>
         <p:spPr>
           <a:xfrm>
-            <a:off x="6400800" y="3264408"/>
+            <a:off x="6400800" y="3315208"/>
             <a:ext cx="2103120" cy="228600"/>
           </a:xfrm>
           <a:prstGeom prst="rect">
@@ -14878,7 +14968,7 @@
           <a:bodyPr wrap="square" lIns="0" tIns="0" rIns="0" bIns="0" rtlCol="0" anchor="ctr"/>
           <a:lstStyle/>
           <a:p>
-            <a:pPr indent="0" marL="0">
+            <a:pPr marL="0" indent="0">
               <a:buNone/>
             </a:pPr>
             <a:r>
@@ -14904,7 +14994,7 @@
         </p:nvSpPr>
         <p:spPr>
           <a:xfrm>
-            <a:off x="6400800" y="3657600"/>
+            <a:off x="6400800" y="3708400"/>
             <a:ext cx="2103120" cy="182880"/>
           </a:xfrm>
           <a:prstGeom prst="rect">
@@ -14917,7 +15007,7 @@
           <a:bodyPr wrap="square" lIns="0" tIns="0" rIns="0" bIns="0" rtlCol="0" anchor="ctr"/>
           <a:lstStyle/>
           <a:p>
-            <a:pPr indent="0" marL="0">
+            <a:pPr marL="0" indent="0">
               <a:buNone/>
             </a:pPr>
             <a:r>
@@ -14943,7 +15033,7 @@
         </p:nvSpPr>
         <p:spPr>
           <a:xfrm>
-            <a:off x="6400800" y="3858768"/>
+            <a:off x="6400800" y="3909568"/>
             <a:ext cx="2103120" cy="228600"/>
           </a:xfrm>
           <a:prstGeom prst="rect">
@@ -14956,7 +15046,7 @@
           <a:bodyPr wrap="square" lIns="0" tIns="0" rIns="0" bIns="0" rtlCol="0" anchor="ctr"/>
           <a:lstStyle/>
           <a:p>
-            <a:pPr indent="0" marL="0">
+            <a:pPr marL="0" indent="0">
               <a:buNone/>
             </a:pPr>
             <a:r>
@@ -14974,65 +15064,36 @@
           </a:p>
         </p:txBody>
       </p:sp>
-      <p:sp>
-        <p:nvSpPr>
-          <p:cNvPr id="17" name="Shape 14"/>
-          <p:cNvSpPr/>
-          <p:nvPr/>
-        </p:nvSpPr>
-        <p:spPr>
-          <a:xfrm>
-            <a:off x="0" y="4800600"/>
-            <a:ext cx="9144000" cy="342900"/>
-          </a:xfrm>
-          <a:prstGeom prst="rect">
-            <a:avLst/>
-          </a:prstGeom>
-          <a:solidFill>
-            <a:srgbClr val="1A1A2E"/>
-          </a:solidFill>
-          <a:ln/>
-        </p:spPr>
-      </p:sp>
-      <p:sp>
-        <p:nvSpPr>
-          <p:cNvPr id="18" name="Text 15"/>
-          <p:cNvSpPr/>
-          <p:nvPr/>
-        </p:nvSpPr>
-        <p:spPr>
-          <a:xfrm>
-            <a:off x="548640" y="4828032"/>
-            <a:ext cx="8046720" cy="274320"/>
-          </a:xfrm>
-          <a:prstGeom prst="rect">
-            <a:avLst/>
-          </a:prstGeom>
-          <a:noFill/>
-          <a:ln/>
-        </p:spPr>
-        <p:txBody>
-          <a:bodyPr wrap="square" rtlCol="0" anchor="ctr"/>
-          <a:lstStyle/>
-          <a:p>
-            <a:pPr indent="0" marL="0">
-              <a:buNone/>
-            </a:pPr>
-            <a:r>
-              <a:rPr lang="en-US" sz="700" i="1" dirty="0">
-                <a:solidFill>
-                  <a:srgbClr val="AAAAAA"/>
-                </a:solidFill>
-                <a:latin typeface="Georgia" pitchFamily="34" charset="0"/>
-                <a:ea typeface="Georgia" pitchFamily="34" charset="-122"/>
-                <a:cs typeface="Georgia" pitchFamily="34" charset="-120"/>
-              </a:rPr>
-              <a:t>docs/psr-audit/06-ejemplos-evolucion.md (Ejemplo 5)</a:t>
-            </a:r>
-            <a:endParaRPr lang="en-US" sz="700" dirty="0"/>
-          </a:p>
-        </p:txBody>
-      </p:sp>
+      <p:pic>
+        <p:nvPicPr>
+          <p:cNvPr id="21" name="Imagen 20">
+            <a:extLst>
+              <a:ext uri="{FF2B5EF4-FFF2-40B4-BE49-F238E27FC236}">
+                <a16:creationId xmlns:a16="http://schemas.microsoft.com/office/drawing/2014/main" id="{B5235012-A693-88D3-7898-2D3657F13ED6}"/>
+              </a:ext>
+            </a:extLst>
+          </p:cNvPr>
+          <p:cNvPicPr>
+            <a:picLocks noChangeAspect="1"/>
+          </p:cNvPicPr>
+          <p:nvPr/>
+        </p:nvPicPr>
+        <p:blipFill>
+          <a:blip r:embed="rId4"/>
+          <a:stretch>
+            <a:fillRect/>
+          </a:stretch>
+        </p:blipFill>
+        <p:spPr>
+          <a:xfrm>
+            <a:off x="6327655" y="198223"/>
+            <a:ext cx="2249410" cy="822198"/>
+          </a:xfrm>
+          <a:prstGeom prst="rect">
+            <a:avLst/>
+          </a:prstGeom>
+        </p:spPr>
+      </p:pic>
     </p:spTree>
   </p:cSld>
   <p:clrMapOvr>
@@ -15334,4 +15395,319 @@
     </a:ext>
   </a:extLst>
 </a:theme>
+</file>
+
+<file path=ppt/theme/theme2.xml><?xml version="1.0" encoding="utf-8"?>
+<a:theme xmlns:a="http://schemas.openxmlformats.org/drawingml/2006/main" name="Tema de Office">
+  <a:themeElements>
+    <a:clrScheme name="Office">
+      <a:dk1>
+        <a:sysClr val="windowText" lastClr="000000"/>
+      </a:dk1>
+      <a:lt1>
+        <a:sysClr val="window" lastClr="FFFFFF"/>
+      </a:lt1>
+      <a:dk2>
+        <a:srgbClr val="0E2841"/>
+      </a:dk2>
+      <a:lt2>
+        <a:srgbClr val="E8E8E8"/>
+      </a:lt2>
+      <a:accent1>
+        <a:srgbClr val="156082"/>
+      </a:accent1>
+      <a:accent2>
+        <a:srgbClr val="E97132"/>
+      </a:accent2>
+      <a:accent3>
+        <a:srgbClr val="196B24"/>
+      </a:accent3>
+      <a:accent4>
+        <a:srgbClr val="0F9ED5"/>
+      </a:accent4>
+      <a:accent5>
+        <a:srgbClr val="A02B93"/>
+      </a:accent5>
+      <a:accent6>
+        <a:srgbClr val="4EA72E"/>
+      </a:accent6>
+      <a:hlink>
+        <a:srgbClr val="467886"/>
+      </a:hlink>
+      <a:folHlink>
+        <a:srgbClr val="96607D"/>
+      </a:folHlink>
+    </a:clrScheme>
+    <a:fontScheme name="Office">
+      <a:majorFont>
+        <a:latin typeface="Aptos Display" panose="02110004020202020204"/>
+        <a:ea typeface=""/>
+        <a:cs typeface=""/>
+        <a:font script="Jpan" typeface="游ゴシック Light"/>
+        <a:font script="Hang" typeface="맑은 고딕"/>
+        <a:font script="Hans" typeface="等线 Light"/>
+        <a:font script="Hant" typeface="新細明體"/>
+        <a:font script="Arab" typeface="Times New Roman"/>
+        <a:font script="Hebr" typeface="Times New Roman"/>
+        <a:font script="Thai" typeface="Angsana New"/>
+        <a:font script="Ethi" typeface="Nyala"/>
+        <a:font script="Beng" typeface="Vrinda"/>
+        <a:font script="Gujr" typeface="Shruti"/>
+        <a:font script="Khmr" typeface="MoolBoran"/>
+        <a:font script="Knda" typeface="Tunga"/>
+        <a:font script="Guru" typeface="Raavi"/>
+        <a:font script="Cans" typeface="Euphemia"/>
+        <a:font script="Cher" typeface="Plantagenet Cherokee"/>
+        <a:font script="Yiii" typeface="Microsoft Yi Baiti"/>
+        <a:font script="Tibt" typeface="Microsoft Himalaya"/>
+        <a:font script="Thaa" typeface="MV Boli"/>
+        <a:font script="Deva" typeface="Mangal"/>
+        <a:font script="Telu" typeface="Gautami"/>
+        <a:font script="Taml" typeface="Latha"/>
+        <a:font script="Syrc" typeface="Estrangelo Edessa"/>
+        <a:font script="Orya" typeface="Kalinga"/>
+        <a:font script="Mlym" typeface="Kartika"/>
+        <a:font script="Laoo" typeface="DokChampa"/>
+        <a:font script="Sinh" typeface="Iskoola Pota"/>
+        <a:font script="Mong" typeface="Mongolian Baiti"/>
+        <a:font script="Viet" typeface="Times New Roman"/>
+        <a:font script="Uigh" typeface="Microsoft Uighur"/>
+        <a:font script="Geor" typeface="Sylfaen"/>
+        <a:font script="Armn" typeface="Arial"/>
+        <a:font script="Bugi" typeface="Leelawadee UI"/>
+        <a:font script="Bopo" typeface="Microsoft JhengHei"/>
+        <a:font script="Java" typeface="Javanese Text"/>
+        <a:font script="Lisu" typeface="Segoe UI"/>
+        <a:font script="Mymr" typeface="Myanmar Text"/>
+        <a:font script="Nkoo" typeface="Ebrima"/>
+        <a:font script="Olck" typeface="Nirmala UI"/>
+        <a:font script="Osma" typeface="Ebrima"/>
+        <a:font script="Phag" typeface="Phagspa"/>
+        <a:font script="Syrn" typeface="Estrangelo Edessa"/>
+        <a:font script="Syrj" typeface="Estrangelo Edessa"/>
+        <a:font script="Syre" typeface="Estrangelo Edessa"/>
+        <a:font script="Sora" typeface="Nirmala UI"/>
+        <a:font script="Tale" typeface="Microsoft Tai Le"/>
+        <a:font script="Talu" typeface="Microsoft New Tai Lue"/>
+        <a:font script="Tfng" typeface="Ebrima"/>
+      </a:majorFont>
+      <a:minorFont>
+        <a:latin typeface="Aptos" panose="02110004020202020204"/>
+        <a:ea typeface=""/>
+        <a:cs typeface=""/>
+        <a:font script="Jpan" typeface="游ゴシック"/>
+        <a:font script="Hang" typeface="맑은 고딕"/>
+        <a:font script="Hans" typeface="等线"/>
+        <a:font script="Hant" typeface="新細明體"/>
+        <a:font script="Arab" typeface="Arial"/>
+        <a:font script="Hebr" typeface="Arial"/>
+        <a:font script="Thai" typeface="Cordia New"/>
+        <a:font script="Ethi" typeface="Nyala"/>
+        <a:font script="Beng" typeface="Vrinda"/>
+        <a:font script="Gujr" typeface="Shruti"/>
+        <a:font script="Khmr" typeface="DaunPenh"/>
+        <a:font script="Knda" typeface="Tunga"/>
+        <a:font script="Guru" typeface="Raavi"/>
+        <a:font script="Cans" typeface="Euphemia"/>
+        <a:font script="Cher" typeface="Plantagenet Cherokee"/>
+        <a:font script="Yiii" typeface="Microsoft Yi Baiti"/>
+        <a:font script="Tibt" typeface="Microsoft Himalaya"/>
+        <a:font script="Thaa" typeface="MV Boli"/>
+        <a:font script="Deva" typeface="Mangal"/>
+        <a:font script="Telu" typeface="Gautami"/>
+        <a:font script="Taml" typeface="Latha"/>
+        <a:font script="Syrc" typeface="Estrangelo Edessa"/>
+        <a:font script="Orya" typeface="Kalinga"/>
+        <a:font script="Mlym" typeface="Kartika"/>
+        <a:font script="Laoo" typeface="DokChampa"/>
+        <a:font script="Sinh" typeface="Iskoola Pota"/>
+        <a:font script="Mong" typeface="Mongolian Baiti"/>
+        <a:font script="Viet" typeface="Arial"/>
+        <a:font script="Uigh" typeface="Microsoft Uighur"/>
+        <a:font script="Geor" typeface="Sylfaen"/>
+        <a:font script="Armn" typeface="Arial"/>
+        <a:font script="Bugi" typeface="Leelawadee UI"/>
+        <a:font script="Bopo" typeface="Microsoft JhengHei"/>
+        <a:font script="Java" typeface="Javanese Text"/>
+        <a:font script="Lisu" typeface="Segoe UI"/>
+        <a:font script="Mymr" typeface="Myanmar Text"/>
+        <a:font script="Nkoo" typeface="Ebrima"/>
+        <a:font script="Olck" typeface="Nirmala UI"/>
+        <a:font script="Osma" typeface="Ebrima"/>
+        <a:font script="Phag" typeface="Phagspa"/>
+        <a:font script="Syrn" typeface="Estrangelo Edessa"/>
+        <a:font script="Syrj" typeface="Estrangelo Edessa"/>
+        <a:font script="Syre" typeface="Estrangelo Edessa"/>
+        <a:font script="Sora" typeface="Nirmala UI"/>
+        <a:font script="Tale" typeface="Microsoft Tai Le"/>
+        <a:font script="Talu" typeface="Microsoft New Tai Lue"/>
+        <a:font script="Tfng" typeface="Ebrima"/>
+      </a:minorFont>
+    </a:fontScheme>
+    <a:fmtScheme name="Office">
+      <a:fillStyleLst>
+        <a:solidFill>
+          <a:schemeClr val="phClr"/>
+        </a:solidFill>
+        <a:gradFill rotWithShape="1">
+          <a:gsLst>
+            <a:gs pos="0">
+              <a:schemeClr val="phClr">
+                <a:lumMod val="110000"/>
+                <a:satMod val="105000"/>
+                <a:tint val="67000"/>
+              </a:schemeClr>
+            </a:gs>
+            <a:gs pos="50000">
+              <a:schemeClr val="phClr">
+                <a:lumMod val="105000"/>
+                <a:satMod val="103000"/>
+                <a:tint val="73000"/>
+              </a:schemeClr>
+            </a:gs>
+            <a:gs pos="100000">
+              <a:schemeClr val="phClr">
+                <a:lumMod val="105000"/>
+                <a:satMod val="109000"/>
+                <a:tint val="81000"/>
+              </a:schemeClr>
+            </a:gs>
+          </a:gsLst>
+          <a:lin ang="5400000" scaled="0"/>
+        </a:gradFill>
+        <a:gradFill rotWithShape="1">
+          <a:gsLst>
+            <a:gs pos="0">
+              <a:schemeClr val="phClr">
+                <a:satMod val="103000"/>
+                <a:lumMod val="102000"/>
+                <a:tint val="94000"/>
+              </a:schemeClr>
+            </a:gs>
+            <a:gs pos="50000">
+              <a:schemeClr val="phClr">
+                <a:satMod val="110000"/>
+                <a:lumMod val="100000"/>
+                <a:shade val="100000"/>
+              </a:schemeClr>
+            </a:gs>
+            <a:gs pos="100000">
+              <a:schemeClr val="phClr">
+                <a:lumMod val="99000"/>
+                <a:satMod val="120000"/>
+                <a:shade val="78000"/>
+              </a:schemeClr>
+            </a:gs>
+          </a:gsLst>
+          <a:lin ang="5400000" scaled="0"/>
+        </a:gradFill>
+      </a:fillStyleLst>
+      <a:lnStyleLst>
+        <a:ln w="12700" cap="flat" cmpd="sng" algn="ctr">
+          <a:solidFill>
+            <a:schemeClr val="phClr"/>
+          </a:solidFill>
+          <a:prstDash val="solid"/>
+          <a:miter lim="800000"/>
+        </a:ln>
+        <a:ln w="19050" cap="flat" cmpd="sng" algn="ctr">
+          <a:solidFill>
+            <a:schemeClr val="phClr"/>
+          </a:solidFill>
+          <a:prstDash val="solid"/>
+          <a:miter lim="800000"/>
+        </a:ln>
+        <a:ln w="25400" cap="flat" cmpd="sng" algn="ctr">
+          <a:solidFill>
+            <a:schemeClr val="phClr"/>
+          </a:solidFill>
+          <a:prstDash val="solid"/>
+          <a:miter lim="800000"/>
+        </a:ln>
+      </a:lnStyleLst>
+      <a:effectStyleLst>
+        <a:effectStyle>
+          <a:effectLst/>
+        </a:effectStyle>
+        <a:effectStyle>
+          <a:effectLst/>
+        </a:effectStyle>
+        <a:effectStyle>
+          <a:effectLst>
+            <a:outerShdw blurRad="57150" dist="19050" dir="5400000" algn="ctr" rotWithShape="0">
+              <a:srgbClr val="000000">
+                <a:alpha val="63000"/>
+              </a:srgbClr>
+            </a:outerShdw>
+          </a:effectLst>
+        </a:effectStyle>
+      </a:effectStyleLst>
+      <a:bgFillStyleLst>
+        <a:solidFill>
+          <a:schemeClr val="phClr"/>
+        </a:solidFill>
+        <a:solidFill>
+          <a:schemeClr val="phClr">
+            <a:tint val="95000"/>
+            <a:satMod val="170000"/>
+          </a:schemeClr>
+        </a:solidFill>
+        <a:gradFill rotWithShape="1">
+          <a:gsLst>
+            <a:gs pos="0">
+              <a:schemeClr val="phClr">
+                <a:tint val="93000"/>
+                <a:satMod val="150000"/>
+                <a:shade val="98000"/>
+                <a:lumMod val="102000"/>
+              </a:schemeClr>
+            </a:gs>
+            <a:gs pos="50000">
+              <a:schemeClr val="phClr">
+                <a:tint val="98000"/>
+                <a:satMod val="130000"/>
+                <a:shade val="90000"/>
+                <a:lumMod val="103000"/>
+              </a:schemeClr>
+            </a:gs>
+            <a:gs pos="100000">
+              <a:schemeClr val="phClr">
+                <a:shade val="63000"/>
+                <a:satMod val="120000"/>
+              </a:schemeClr>
+            </a:gs>
+          </a:gsLst>
+          <a:lin ang="5400000" scaled="0"/>
+        </a:gradFill>
+      </a:bgFillStyleLst>
+    </a:fmtScheme>
+  </a:themeElements>
+  <a:objectDefaults>
+    <a:lnDef>
+      <a:spPr/>
+      <a:bodyPr/>
+      <a:lstStyle/>
+      <a:style>
+        <a:lnRef idx="2">
+          <a:schemeClr val="accent1"/>
+        </a:lnRef>
+        <a:fillRef idx="0">
+          <a:schemeClr val="accent1"/>
+        </a:fillRef>
+        <a:effectRef idx="1">
+          <a:schemeClr val="accent1"/>
+        </a:effectRef>
+        <a:fontRef idx="minor">
+          <a:schemeClr val="tx1"/>
+        </a:fontRef>
+      </a:style>
+    </a:lnDef>
+  </a:objectDefaults>
+  <a:extraClrSchemeLst/>
+  <a:extLst>
+    <a:ext uri="{05A4C25C-085E-4340-85A3-A5531E510DB2}">
+      <thm15:themeFamily xmlns:thm15="http://schemas.microsoft.com/office/thememl/2012/main" name="Office Theme" id="{2E142A2C-CD16-42D6-873A-C26D2A0506FA}" vid="{1BDDFF52-6CD6-40A5-AB3C-68EB2F1E4D0A}"/>
+    </a:ext>
+  </a:extLst>
+</a:theme>
 </file>